--- a/2024/2024-03-15-AI-Updates.pptx
+++ b/2024/2024-03-15-AI-Updates.pptx
@@ -5,7 +5,7 @@
     <p:sldMasterId id="2147483659" r:id="rId1"/>
   </p:sldMasterIdLst>
   <p:notesMasterIdLst>
-    <p:notesMasterId r:id="rId26"/>
+    <p:notesMasterId r:id="rId27"/>
   </p:notesMasterIdLst>
   <p:sldIdLst>
     <p:sldId id="256" r:id="rId2"/>
@@ -32,16 +32,17 @@
     <p:sldId id="277" r:id="rId23"/>
     <p:sldId id="278" r:id="rId24"/>
     <p:sldId id="279" r:id="rId25"/>
+    <p:sldId id="280" r:id="rId26"/>
   </p:sldIdLst>
   <p:sldSz cx="9144000" cy="5143500" type="screen16x9"/>
   <p:notesSz cx="6858000" cy="9144000"/>
   <p:embeddedFontLst>
     <p:embeddedFont>
       <p:font typeface="Roboto Mono" pitchFamily="49" charset="0"/>
-      <p:regular r:id="rId27"/>
-      <p:bold r:id="rId28"/>
-      <p:italic r:id="rId29"/>
-      <p:boldItalic r:id="rId30"/>
+      <p:regular r:id="rId28"/>
+      <p:bold r:id="rId29"/>
+      <p:italic r:id="rId30"/>
+      <p:boldItalic r:id="rId31"/>
     </p:embeddedFont>
   </p:embeddedFontLst>
   <p:defaultTextStyle>
@@ -982,7 +983,7 @@
   <p:cSld>
     <p:spTree>
       <p:nvGrpSpPr>
-        <p:cNvPr id="1" name="Shape 141"/>
+        <p:cNvPr id="1" name="Shape 146"/>
         <p:cNvGrpSpPr/>
         <p:nvPr/>
       </p:nvGrpSpPr>
@@ -996,7 +997,7 @@
       </p:grpSpPr>
       <p:sp>
         <p:nvSpPr>
-          <p:cNvPr id="142" name="Google Shape;142;g28f005bb032_0_0:notes"/>
+          <p:cNvPr id="147" name="Google Shape;147;g28f005bb032_2_0:notes"/>
           <p:cNvSpPr>
             <a:spLocks noGrp="1" noRot="1" noChangeAspect="1"/>
           </p:cNvSpPr>
@@ -1047,7 +1048,7 @@
       </p:sp>
       <p:sp>
         <p:nvSpPr>
-          <p:cNvPr id="143" name="Google Shape;143;g28f005bb032_0_0:notes"/>
+          <p:cNvPr id="148" name="Google Shape;148;g28f005bb032_2_0:notes"/>
           <p:cNvSpPr txBox="1">
             <a:spLocks noGrp="1"/>
           </p:cNvSpPr>
@@ -1104,7 +1105,7 @@
   <p:cSld>
     <p:spTree>
       <p:nvGrpSpPr>
-        <p:cNvPr id="1" name="Shape 149"/>
+        <p:cNvPr id="1" name="Shape 153"/>
         <p:cNvGrpSpPr/>
         <p:nvPr/>
       </p:nvGrpSpPr>
@@ -1118,7 +1119,7 @@
       </p:grpSpPr>
       <p:sp>
         <p:nvSpPr>
-          <p:cNvPr id="150" name="Google Shape;150;p6:notes"/>
+          <p:cNvPr id="154" name="Google Shape;154;g2c265ec0a43_0_0:notes"/>
           <p:cNvSpPr>
             <a:spLocks noGrp="1" noRot="1" noChangeAspect="1"/>
           </p:cNvSpPr>
@@ -1169,7 +1170,7 @@
       </p:sp>
       <p:sp>
         <p:nvSpPr>
-          <p:cNvPr id="151" name="Google Shape;151;p6:notes"/>
+          <p:cNvPr id="155" name="Google Shape;155;g2c265ec0a43_0_0:notes"/>
           <p:cNvSpPr txBox="1">
             <a:spLocks noGrp="1"/>
           </p:cNvSpPr>
@@ -1226,7 +1227,7 @@
   <p:cSld>
     <p:spTree>
       <p:nvGrpSpPr>
-        <p:cNvPr id="1" name="Shape 165"/>
+        <p:cNvPr id="1" name="Shape 161"/>
         <p:cNvGrpSpPr/>
         <p:nvPr/>
       </p:nvGrpSpPr>
@@ -1240,7 +1241,7 @@
       </p:grpSpPr>
       <p:sp>
         <p:nvSpPr>
-          <p:cNvPr id="166" name="Google Shape;166;p7:notes"/>
+          <p:cNvPr id="162" name="Google Shape;162;g28f005bb032_0_0:notes"/>
           <p:cNvSpPr>
             <a:spLocks noGrp="1" noRot="1" noChangeAspect="1"/>
           </p:cNvSpPr>
@@ -1291,7 +1292,7 @@
       </p:sp>
       <p:sp>
         <p:nvSpPr>
-          <p:cNvPr id="167" name="Google Shape;167;p7:notes"/>
+          <p:cNvPr id="163" name="Google Shape;163;g28f005bb032_0_0:notes"/>
           <p:cNvSpPr txBox="1">
             <a:spLocks noGrp="1"/>
           </p:cNvSpPr>
@@ -1348,7 +1349,7 @@
   <p:cSld>
     <p:spTree>
       <p:nvGrpSpPr>
-        <p:cNvPr id="1" name="Shape 177"/>
+        <p:cNvPr id="1" name="Shape 169"/>
         <p:cNvGrpSpPr/>
         <p:nvPr/>
       </p:nvGrpSpPr>
@@ -1362,7 +1363,7 @@
       </p:grpSpPr>
       <p:sp>
         <p:nvSpPr>
-          <p:cNvPr id="178" name="Google Shape;178;p8:notes"/>
+          <p:cNvPr id="170" name="Google Shape;170;p6:notes"/>
           <p:cNvSpPr>
             <a:spLocks noGrp="1" noRot="1" noChangeAspect="1"/>
           </p:cNvSpPr>
@@ -1413,7 +1414,7 @@
       </p:sp>
       <p:sp>
         <p:nvSpPr>
-          <p:cNvPr id="179" name="Google Shape;179;p8:notes"/>
+          <p:cNvPr id="171" name="Google Shape;171;p6:notes"/>
           <p:cNvSpPr txBox="1">
             <a:spLocks noGrp="1"/>
           </p:cNvSpPr>
@@ -1470,7 +1471,7 @@
   <p:cSld>
     <p:spTree>
       <p:nvGrpSpPr>
-        <p:cNvPr id="1" name="Shape 186"/>
+        <p:cNvPr id="1" name="Shape 185"/>
         <p:cNvGrpSpPr/>
         <p:nvPr/>
       </p:nvGrpSpPr>
@@ -1484,7 +1485,7 @@
       </p:grpSpPr>
       <p:sp>
         <p:nvSpPr>
-          <p:cNvPr id="187" name="Google Shape;187;p9:notes"/>
+          <p:cNvPr id="186" name="Google Shape;186;p7:notes"/>
           <p:cNvSpPr>
             <a:spLocks noGrp="1" noRot="1" noChangeAspect="1"/>
           </p:cNvSpPr>
@@ -1535,7 +1536,7 @@
       </p:sp>
       <p:sp>
         <p:nvSpPr>
-          <p:cNvPr id="188" name="Google Shape;188;p9:notes"/>
+          <p:cNvPr id="187" name="Google Shape;187;p7:notes"/>
           <p:cNvSpPr txBox="1">
             <a:spLocks noGrp="1"/>
           </p:cNvSpPr>
@@ -1592,7 +1593,7 @@
   <p:cSld>
     <p:spTree>
       <p:nvGrpSpPr>
-        <p:cNvPr id="1" name="Shape 194"/>
+        <p:cNvPr id="1" name="Shape 197"/>
         <p:cNvGrpSpPr/>
         <p:nvPr/>
       </p:nvGrpSpPr>
@@ -1606,7 +1607,7 @@
       </p:grpSpPr>
       <p:sp>
         <p:nvSpPr>
-          <p:cNvPr id="195" name="Google Shape;195;p10:notes"/>
+          <p:cNvPr id="198" name="Google Shape;198;p8:notes"/>
           <p:cNvSpPr>
             <a:spLocks noGrp="1" noRot="1" noChangeAspect="1"/>
           </p:cNvSpPr>
@@ -1657,7 +1658,7 @@
       </p:sp>
       <p:sp>
         <p:nvSpPr>
-          <p:cNvPr id="196" name="Google Shape;196;p10:notes"/>
+          <p:cNvPr id="199" name="Google Shape;199;p8:notes"/>
           <p:cNvSpPr txBox="1">
             <a:spLocks noGrp="1"/>
           </p:cNvSpPr>
@@ -1714,7 +1715,7 @@
   <p:cSld>
     <p:spTree>
       <p:nvGrpSpPr>
-        <p:cNvPr id="1" name="Shape 201"/>
+        <p:cNvPr id="1" name="Shape 206"/>
         <p:cNvGrpSpPr/>
         <p:nvPr/>
       </p:nvGrpSpPr>
@@ -1728,7 +1729,7 @@
       </p:grpSpPr>
       <p:sp>
         <p:nvSpPr>
-          <p:cNvPr id="202" name="Google Shape;202;p11:notes"/>
+          <p:cNvPr id="207" name="Google Shape;207;p9:notes"/>
           <p:cNvSpPr>
             <a:spLocks noGrp="1" noRot="1" noChangeAspect="1"/>
           </p:cNvSpPr>
@@ -1779,7 +1780,7 @@
       </p:sp>
       <p:sp>
         <p:nvSpPr>
-          <p:cNvPr id="203" name="Google Shape;203;p11:notes"/>
+          <p:cNvPr id="208" name="Google Shape;208;p9:notes"/>
           <p:cNvSpPr txBox="1">
             <a:spLocks noGrp="1"/>
           </p:cNvSpPr>
@@ -1836,7 +1837,7 @@
   <p:cSld>
     <p:spTree>
       <p:nvGrpSpPr>
-        <p:cNvPr id="1" name="Shape 209"/>
+        <p:cNvPr id="1" name="Shape 214"/>
         <p:cNvGrpSpPr/>
         <p:nvPr/>
       </p:nvGrpSpPr>
@@ -1850,7 +1851,7 @@
       </p:grpSpPr>
       <p:sp>
         <p:nvSpPr>
-          <p:cNvPr id="210" name="Google Shape;210;p12:notes"/>
+          <p:cNvPr id="215" name="Google Shape;215;p10:notes"/>
           <p:cNvSpPr>
             <a:spLocks noGrp="1" noRot="1" noChangeAspect="1"/>
           </p:cNvSpPr>
@@ -1901,7 +1902,7 @@
       </p:sp>
       <p:sp>
         <p:nvSpPr>
-          <p:cNvPr id="211" name="Google Shape;211;p12:notes"/>
+          <p:cNvPr id="216" name="Google Shape;216;p10:notes"/>
           <p:cNvSpPr txBox="1">
             <a:spLocks noGrp="1"/>
           </p:cNvSpPr>
@@ -1958,7 +1959,7 @@
   <p:cSld>
     <p:spTree>
       <p:nvGrpSpPr>
-        <p:cNvPr id="1" name="Shape 218"/>
+        <p:cNvPr id="1" name="Shape 221"/>
         <p:cNvGrpSpPr/>
         <p:nvPr/>
       </p:nvGrpSpPr>
@@ -1972,7 +1973,7 @@
       </p:grpSpPr>
       <p:sp>
         <p:nvSpPr>
-          <p:cNvPr id="219" name="Google Shape;219;p13:notes"/>
+          <p:cNvPr id="222" name="Google Shape;222;p11:notes"/>
           <p:cNvSpPr>
             <a:spLocks noGrp="1" noRot="1" noChangeAspect="1"/>
           </p:cNvSpPr>
@@ -2023,7 +2024,7 @@
       </p:sp>
       <p:sp>
         <p:nvSpPr>
-          <p:cNvPr id="220" name="Google Shape;220;p13:notes"/>
+          <p:cNvPr id="223" name="Google Shape;223;p11:notes"/>
           <p:cNvSpPr txBox="1">
             <a:spLocks noGrp="1"/>
           </p:cNvSpPr>
@@ -2080,7 +2081,7 @@
   <p:cSld>
     <p:spTree>
       <p:nvGrpSpPr>
-        <p:cNvPr id="1" name="Shape 226"/>
+        <p:cNvPr id="1" name="Shape 229"/>
         <p:cNvGrpSpPr/>
         <p:nvPr/>
       </p:nvGrpSpPr>
@@ -2094,7 +2095,7 @@
       </p:grpSpPr>
       <p:sp>
         <p:nvSpPr>
-          <p:cNvPr id="227" name="Google Shape;227;p14:notes"/>
+          <p:cNvPr id="230" name="Google Shape;230;p12:notes"/>
           <p:cNvSpPr>
             <a:spLocks noGrp="1" noRot="1" noChangeAspect="1"/>
           </p:cNvSpPr>
@@ -2145,7 +2146,7 @@
       </p:sp>
       <p:sp>
         <p:nvSpPr>
-          <p:cNvPr id="228" name="Google Shape;228;p14:notes"/>
+          <p:cNvPr id="231" name="Google Shape;231;p12:notes"/>
           <p:cNvSpPr txBox="1">
             <a:spLocks noGrp="1"/>
           </p:cNvSpPr>
@@ -2324,7 +2325,7 @@
   <p:cSld>
     <p:spTree>
       <p:nvGrpSpPr>
-        <p:cNvPr id="1" name="Shape 234"/>
+        <p:cNvPr id="1" name="Shape 238"/>
         <p:cNvGrpSpPr/>
         <p:nvPr/>
       </p:nvGrpSpPr>
@@ -2338,7 +2339,7 @@
       </p:grpSpPr>
       <p:sp>
         <p:nvSpPr>
-          <p:cNvPr id="235" name="Google Shape;235;g1f3f1947ede_0_0:notes"/>
+          <p:cNvPr id="239" name="Google Shape;239;p13:notes"/>
           <p:cNvSpPr>
             <a:spLocks noGrp="1" noRot="1" noChangeAspect="1"/>
           </p:cNvSpPr>
@@ -2389,7 +2390,7 @@
       </p:sp>
       <p:sp>
         <p:nvSpPr>
-          <p:cNvPr id="236" name="Google Shape;236;g1f3f1947ede_0_0:notes"/>
+          <p:cNvPr id="240" name="Google Shape;240;p13:notes"/>
           <p:cNvSpPr txBox="1">
             <a:spLocks noGrp="1"/>
           </p:cNvSpPr>
@@ -2446,7 +2447,7 @@
   <p:cSld>
     <p:spTree>
       <p:nvGrpSpPr>
-        <p:cNvPr id="1" name="Shape 243"/>
+        <p:cNvPr id="1" name="Shape 246"/>
         <p:cNvGrpSpPr/>
         <p:nvPr/>
       </p:nvGrpSpPr>
@@ -2460,7 +2461,7 @@
       </p:grpSpPr>
       <p:sp>
         <p:nvSpPr>
-          <p:cNvPr id="244" name="Google Shape;244;p15:notes"/>
+          <p:cNvPr id="247" name="Google Shape;247;p14:notes"/>
           <p:cNvSpPr>
             <a:spLocks noGrp="1" noRot="1" noChangeAspect="1"/>
           </p:cNvSpPr>
@@ -2511,7 +2512,7 @@
       </p:sp>
       <p:sp>
         <p:nvSpPr>
-          <p:cNvPr id="245" name="Google Shape;245;p15:notes"/>
+          <p:cNvPr id="248" name="Google Shape;248;p14:notes"/>
           <p:cNvSpPr txBox="1">
             <a:spLocks noGrp="1"/>
           </p:cNvSpPr>
@@ -2568,7 +2569,7 @@
   <p:cSld>
     <p:spTree>
       <p:nvGrpSpPr>
-        <p:cNvPr id="1" name="Shape 252"/>
+        <p:cNvPr id="1" name="Shape 254"/>
         <p:cNvGrpSpPr/>
         <p:nvPr/>
       </p:nvGrpSpPr>
@@ -2582,7 +2583,7 @@
       </p:grpSpPr>
       <p:sp>
         <p:nvSpPr>
-          <p:cNvPr id="253" name="Google Shape;253;p16:notes"/>
+          <p:cNvPr id="255" name="Google Shape;255;g1f3f1947ede_0_0:notes"/>
           <p:cNvSpPr>
             <a:spLocks noGrp="1" noRot="1" noChangeAspect="1"/>
           </p:cNvSpPr>
@@ -2633,7 +2634,7 @@
       </p:sp>
       <p:sp>
         <p:nvSpPr>
-          <p:cNvPr id="254" name="Google Shape;254;p16:notes"/>
+          <p:cNvPr id="256" name="Google Shape;256;g1f3f1947ede_0_0:notes"/>
           <p:cNvSpPr txBox="1">
             <a:spLocks noGrp="1"/>
           </p:cNvSpPr>
@@ -2690,7 +2691,7 @@
   <p:cSld>
     <p:spTree>
       <p:nvGrpSpPr>
-        <p:cNvPr id="1" name="Shape 259"/>
+        <p:cNvPr id="1" name="Shape 261"/>
         <p:cNvGrpSpPr/>
         <p:nvPr/>
       </p:nvGrpSpPr>
@@ -2704,7 +2705,129 @@
       </p:grpSpPr>
       <p:sp>
         <p:nvSpPr>
-          <p:cNvPr id="260" name="Google Shape;260;p2:notes"/>
+          <p:cNvPr id="262" name="Google Shape;262;p16:notes"/>
+          <p:cNvSpPr>
+            <a:spLocks noGrp="1" noRot="1" noChangeAspect="1"/>
+          </p:cNvSpPr>
+          <p:nvPr>
+            <p:ph type="sldImg" idx="2"/>
+          </p:nvPr>
+        </p:nvSpPr>
+        <p:spPr>
+          <a:xfrm>
+            <a:off x="381300" y="685800"/>
+            <a:ext cx="6096000" cy="3429000"/>
+          </a:xfrm>
+          <a:custGeom>
+            <a:avLst/>
+            <a:gdLst/>
+            <a:ahLst/>
+            <a:cxnLst/>
+            <a:rect l="l" t="t" r="r" b="b"/>
+            <a:pathLst>
+              <a:path w="120000" h="120000" extrusionOk="0">
+                <a:moveTo>
+                  <a:pt x="0" y="0"/>
+                </a:moveTo>
+                <a:lnTo>
+                  <a:pt x="120000" y="0"/>
+                </a:lnTo>
+                <a:lnTo>
+                  <a:pt x="120000" y="120000"/>
+                </a:lnTo>
+                <a:lnTo>
+                  <a:pt x="0" y="120000"/>
+                </a:lnTo>
+                <a:close/>
+              </a:path>
+            </a:pathLst>
+          </a:custGeom>
+          <a:noFill/>
+          <a:ln w="9525" cap="flat" cmpd="sng">
+            <a:solidFill>
+              <a:srgbClr val="000000"/>
+            </a:solidFill>
+            <a:prstDash val="solid"/>
+            <a:round/>
+            <a:headEnd type="none" w="sm" len="sm"/>
+            <a:tailEnd type="none" w="sm" len="sm"/>
+          </a:ln>
+        </p:spPr>
+      </p:sp>
+      <p:sp>
+        <p:nvSpPr>
+          <p:cNvPr id="263" name="Google Shape;263;p16:notes"/>
+          <p:cNvSpPr txBox="1">
+            <a:spLocks noGrp="1"/>
+          </p:cNvSpPr>
+          <p:nvPr>
+            <p:ph type="body" idx="1"/>
+          </p:nvPr>
+        </p:nvSpPr>
+        <p:spPr>
+          <a:xfrm>
+            <a:off x="685800" y="4343400"/>
+            <a:ext cx="5486400" cy="4114800"/>
+          </a:xfrm>
+          <a:prstGeom prst="rect">
+            <a:avLst/>
+          </a:prstGeom>
+          <a:noFill/>
+          <a:ln>
+            <a:noFill/>
+          </a:ln>
+        </p:spPr>
+        <p:txBody>
+          <a:bodyPr spcFirstLastPara="1" wrap="square" lIns="91425" tIns="91425" rIns="91425" bIns="91425" anchor="t" anchorCtr="0">
+            <a:noAutofit/>
+          </a:bodyPr>
+          <a:lstStyle/>
+          <a:p>
+            <a:pPr marL="0" lvl="0" indent="0" algn="l" rtl="0">
+              <a:lnSpc>
+                <a:spcPct val="100000"/>
+              </a:lnSpc>
+              <a:spcBef>
+                <a:spcPts val="0"/>
+              </a:spcBef>
+              <a:spcAft>
+                <a:spcPts val="0"/>
+              </a:spcAft>
+              <a:buSzPts val="1100"/>
+              <a:buNone/>
+            </a:pPr>
+            <a:endParaRPr/>
+          </a:p>
+        </p:txBody>
+      </p:sp>
+    </p:spTree>
+  </p:cSld>
+  <p:clrMapOvr>
+    <a:masterClrMapping/>
+  </p:clrMapOvr>
+</p:notes>
+</file>
+
+<file path=ppt/notesSlides/notesSlide24.xml><?xml version="1.0" encoding="utf-8"?>
+<p:notes xmlns:a="http://schemas.openxmlformats.org/drawingml/2006/main" xmlns:r="http://schemas.openxmlformats.org/officeDocument/2006/relationships" xmlns:p="http://schemas.openxmlformats.org/presentationml/2006/main" showMasterSp="0" showMasterPhAnim="0">
+  <p:cSld>
+    <p:spTree>
+      <p:nvGrpSpPr>
+        <p:cNvPr id="1" name="Shape 268"/>
+        <p:cNvGrpSpPr/>
+        <p:nvPr/>
+      </p:nvGrpSpPr>
+      <p:grpSpPr>
+        <a:xfrm>
+          <a:off x="0" y="0"/>
+          <a:ext cx="0" cy="0"/>
+          <a:chOff x="0" y="0"/>
+          <a:chExt cx="0" cy="0"/>
+        </a:xfrm>
+      </p:grpSpPr>
+      <p:sp>
+        <p:nvSpPr>
+          <p:cNvPr id="269" name="Google Shape;269;p2:notes"/>
           <p:cNvSpPr>
             <a:spLocks noGrp="1" noRot="1" noChangeAspect="1"/>
           </p:cNvSpPr>
@@ -2755,7 +2878,7 @@
       </p:sp>
       <p:sp>
         <p:nvSpPr>
-          <p:cNvPr id="261" name="Google Shape;261;p2:notes"/>
+          <p:cNvPr id="270" name="Google Shape;270;p2:notes"/>
           <p:cNvSpPr txBox="1">
             <a:spLocks noGrp="1"/>
           </p:cNvSpPr>
@@ -2807,12 +2930,12 @@
 </p:notes>
 </file>
 
-<file path=ppt/notesSlides/notesSlide24.xml><?xml version="1.0" encoding="utf-8"?>
+<file path=ppt/notesSlides/notesSlide25.xml><?xml version="1.0" encoding="utf-8"?>
 <p:notes xmlns:a="http://schemas.openxmlformats.org/drawingml/2006/main" xmlns:r="http://schemas.openxmlformats.org/officeDocument/2006/relationships" xmlns:p="http://schemas.openxmlformats.org/presentationml/2006/main" showMasterSp="0" showMasterPhAnim="0">
   <p:cSld>
     <p:spTree>
       <p:nvGrpSpPr>
-        <p:cNvPr id="1" name="Shape 269"/>
+        <p:cNvPr id="1" name="Shape 278"/>
         <p:cNvGrpSpPr/>
         <p:nvPr/>
       </p:nvGrpSpPr>
@@ -2826,7 +2949,7 @@
       </p:grpSpPr>
       <p:sp>
         <p:nvSpPr>
-          <p:cNvPr id="270" name="Google Shape;270;p17:notes"/>
+          <p:cNvPr id="279" name="Google Shape;279;p17:notes"/>
           <p:cNvSpPr>
             <a:spLocks noGrp="1" noRot="1" noChangeAspect="1"/>
           </p:cNvSpPr>
@@ -2877,7 +3000,7 @@
       </p:sp>
       <p:sp>
         <p:nvSpPr>
-          <p:cNvPr id="271" name="Google Shape;271;p17:notes"/>
+          <p:cNvPr id="280" name="Google Shape;280;p17:notes"/>
           <p:cNvSpPr txBox="1">
             <a:spLocks noGrp="1"/>
           </p:cNvSpPr>
@@ -3070,7 +3193,7 @@
       </p:grpSpPr>
       <p:sp>
         <p:nvSpPr>
-          <p:cNvPr id="79" name="Google Shape;79;g2c250605088_0_0:notes"/>
+          <p:cNvPr id="79" name="Google Shape;79;g2c329307fa9_0_4:notes"/>
           <p:cNvSpPr>
             <a:spLocks noGrp="1" noRot="1" noChangeAspect="1"/>
           </p:cNvSpPr>
@@ -3121,7 +3244,7 @@
       </p:sp>
       <p:sp>
         <p:nvSpPr>
-          <p:cNvPr id="80" name="Google Shape;80;g2c250605088_0_0:notes"/>
+          <p:cNvPr id="80" name="Google Shape;80;g2c329307fa9_0_4:notes"/>
           <p:cNvSpPr txBox="1">
             <a:spLocks noGrp="1"/>
           </p:cNvSpPr>
@@ -3178,7 +3301,7 @@
   <p:cSld>
     <p:spTree>
       <p:nvGrpSpPr>
-        <p:cNvPr id="1" name="Shape 87"/>
+        <p:cNvPr id="1" name="Shape 86"/>
         <p:cNvGrpSpPr/>
         <p:nvPr/>
       </p:nvGrpSpPr>
@@ -3192,7 +3315,7 @@
       </p:grpSpPr>
       <p:sp>
         <p:nvSpPr>
-          <p:cNvPr id="88" name="Google Shape;88;p4:notes"/>
+          <p:cNvPr id="87" name="Google Shape;87;p15:notes"/>
           <p:cNvSpPr>
             <a:spLocks noGrp="1" noRot="1" noChangeAspect="1"/>
           </p:cNvSpPr>
@@ -3243,7 +3366,7 @@
       </p:sp>
       <p:sp>
         <p:nvSpPr>
-          <p:cNvPr id="89" name="Google Shape;89;p4:notes"/>
+          <p:cNvPr id="88" name="Google Shape;88;p15:notes"/>
           <p:cNvSpPr txBox="1">
             <a:spLocks noGrp="1"/>
           </p:cNvSpPr>
@@ -3300,7 +3423,7 @@
   <p:cSld>
     <p:spTree>
       <p:nvGrpSpPr>
-        <p:cNvPr id="1" name="Shape 100"/>
+        <p:cNvPr id="1" name="Shape 99"/>
         <p:cNvGrpSpPr/>
         <p:nvPr/>
       </p:nvGrpSpPr>
@@ -3314,7 +3437,7 @@
       </p:grpSpPr>
       <p:sp>
         <p:nvSpPr>
-          <p:cNvPr id="101" name="Google Shape;101;p5:notes"/>
+          <p:cNvPr id="100" name="Google Shape;100;g2c250605088_0_0:notes"/>
           <p:cNvSpPr>
             <a:spLocks noGrp="1" noRot="1" noChangeAspect="1"/>
           </p:cNvSpPr>
@@ -3365,7 +3488,7 @@
       </p:sp>
       <p:sp>
         <p:nvSpPr>
-          <p:cNvPr id="102" name="Google Shape;102;p5:notes"/>
+          <p:cNvPr id="101" name="Google Shape;101;g2c250605088_0_0:notes"/>
           <p:cNvSpPr txBox="1">
             <a:spLocks noGrp="1"/>
           </p:cNvSpPr>
@@ -3422,7 +3545,7 @@
   <p:cSld>
     <p:spTree>
       <p:nvGrpSpPr>
-        <p:cNvPr id="1" name="Shape 116"/>
+        <p:cNvPr id="1" name="Shape 108"/>
         <p:cNvGrpSpPr/>
         <p:nvPr/>
       </p:nvGrpSpPr>
@@ -3436,7 +3559,7 @@
       </p:grpSpPr>
       <p:sp>
         <p:nvSpPr>
-          <p:cNvPr id="117" name="Google Shape;117;g2c26a41e676_0_0:notes"/>
+          <p:cNvPr id="109" name="Google Shape;109;p4:notes"/>
           <p:cNvSpPr>
             <a:spLocks noGrp="1" noRot="1" noChangeAspect="1"/>
           </p:cNvSpPr>
@@ -3487,7 +3610,7 @@
       </p:sp>
       <p:sp>
         <p:nvSpPr>
-          <p:cNvPr id="118" name="Google Shape;118;g2c26a41e676_0_0:notes"/>
+          <p:cNvPr id="110" name="Google Shape;110;p4:notes"/>
           <p:cNvSpPr txBox="1">
             <a:spLocks noGrp="1"/>
           </p:cNvSpPr>
@@ -3544,7 +3667,7 @@
   <p:cSld>
     <p:spTree>
       <p:nvGrpSpPr>
-        <p:cNvPr id="1" name="Shape 126"/>
+        <p:cNvPr id="1" name="Shape 121"/>
         <p:cNvGrpSpPr/>
         <p:nvPr/>
       </p:nvGrpSpPr>
@@ -3558,7 +3681,7 @@
       </p:grpSpPr>
       <p:sp>
         <p:nvSpPr>
-          <p:cNvPr id="127" name="Google Shape;127;g28f005bb032_2_0:notes"/>
+          <p:cNvPr id="122" name="Google Shape;122;p5:notes"/>
           <p:cNvSpPr>
             <a:spLocks noGrp="1" noRot="1" noChangeAspect="1"/>
           </p:cNvSpPr>
@@ -3609,7 +3732,7 @@
       </p:sp>
       <p:sp>
         <p:nvSpPr>
-          <p:cNvPr id="128" name="Google Shape;128;g28f005bb032_2_0:notes"/>
+          <p:cNvPr id="123" name="Google Shape;123;p5:notes"/>
           <p:cNvSpPr txBox="1">
             <a:spLocks noGrp="1"/>
           </p:cNvSpPr>
@@ -3666,7 +3789,7 @@
   <p:cSld>
     <p:spTree>
       <p:nvGrpSpPr>
-        <p:cNvPr id="1" name="Shape 133"/>
+        <p:cNvPr id="1" name="Shape 137"/>
         <p:cNvGrpSpPr/>
         <p:nvPr/>
       </p:nvGrpSpPr>
@@ -3680,7 +3803,7 @@
       </p:grpSpPr>
       <p:sp>
         <p:nvSpPr>
-          <p:cNvPr id="134" name="Google Shape;134;g2c265ec0a43_0_0:notes"/>
+          <p:cNvPr id="138" name="Google Shape;138;g2c26a41e676_0_0:notes"/>
           <p:cNvSpPr>
             <a:spLocks noGrp="1" noRot="1" noChangeAspect="1"/>
           </p:cNvSpPr>
@@ -3731,7 +3854,7 @@
       </p:sp>
       <p:sp>
         <p:nvSpPr>
-          <p:cNvPr id="135" name="Google Shape;135;g2c265ec0a43_0_0:notes"/>
+          <p:cNvPr id="139" name="Google Shape;139;g2c26a41e676_0_0:notes"/>
           <p:cNvSpPr txBox="1">
             <a:spLocks noGrp="1"/>
           </p:cNvSpPr>
@@ -11659,7 +11782,7 @@
                   <a:srgbClr val="3C78D8"/>
                 </a:solidFill>
               </a:rPr>
-              <a:t>Emergent autonomous scientific research</a:t>
+              <a:t>Gen AI Explosion on GitHub</a:t>
             </a:r>
             <a:endParaRPr sz="1500" b="1">
               <a:solidFill>
@@ -11690,7 +11813,7 @@
                   <a:srgbClr val="3C78D8"/>
                 </a:solidFill>
               </a:rPr>
-              <a:t>Yann LeCun - learn from high-bandwidth sensory inputs</a:t>
+              <a:t>Crowd-sourced "Arena" Leaderboard</a:t>
             </a:r>
             <a:endParaRPr sz="1500" b="1">
               <a:solidFill>
@@ -11721,7 +11844,7 @@
                   <a:srgbClr val="3C78D8"/>
                 </a:solidFill>
               </a:rPr>
-              <a:t>Trends: The Five Research Directions</a:t>
+              <a:t>Emergent autonomous scientific research</a:t>
             </a:r>
             <a:endParaRPr sz="1500" b="1">
               <a:solidFill>
@@ -11752,7 +11875,7 @@
                   <a:srgbClr val="3C78D8"/>
                 </a:solidFill>
               </a:rPr>
-              <a:t>Chain-of-Abstraction Reasoning</a:t>
+              <a:t>Yann LeCun high-bandwidth sensory inputs</a:t>
             </a:r>
             <a:endParaRPr sz="1500" b="1">
               <a:solidFill>
@@ -11783,7 +11906,7 @@
                   <a:srgbClr val="3C78D8"/>
                 </a:solidFill>
               </a:rPr>
-              <a:t>Amazon reviews dataset</a:t>
+              <a:t>Trends: The Five Research Directions</a:t>
             </a:r>
             <a:endParaRPr sz="1500" b="1">
               <a:solidFill>
@@ -11814,7 +11937,69 @@
                   <a:srgbClr val="3C78D8"/>
                 </a:solidFill>
               </a:rPr>
-              <a:t>LLM Jailbreaking using morse code  or  ASCII Art </a:t>
+              <a:t>Chain-of-Abstraction Reasoning</a:t>
+            </a:r>
+            <a:endParaRPr sz="1500" b="1">
+              <a:solidFill>
+                <a:srgbClr val="3C78D8"/>
+              </a:solidFill>
+            </a:endParaRPr>
+          </a:p>
+          <a:p>
+            <a:pPr marL="228600" marR="0" lvl="0" indent="-209550" algn="l" rtl="0">
+              <a:lnSpc>
+                <a:spcPct val="100000"/>
+              </a:lnSpc>
+              <a:spcBef>
+                <a:spcPts val="0"/>
+              </a:spcBef>
+              <a:spcAft>
+                <a:spcPts val="0"/>
+              </a:spcAft>
+              <a:buClr>
+                <a:srgbClr val="3C78D8"/>
+              </a:buClr>
+              <a:buSzPts val="1500"/>
+              <a:buChar char="●"/>
+            </a:pPr>
+            <a:r>
+              <a:rPr lang="en" sz="1500" b="1">
+                <a:solidFill>
+                  <a:srgbClr val="3C78D8"/>
+                </a:solidFill>
+              </a:rPr>
+              <a:t>Amazon reviews dataset</a:t>
+            </a:r>
+            <a:endParaRPr sz="1500" b="1">
+              <a:solidFill>
+                <a:srgbClr val="3C78D8"/>
+              </a:solidFill>
+            </a:endParaRPr>
+          </a:p>
+          <a:p>
+            <a:pPr marL="228600" marR="0" lvl="0" indent="-209550" algn="l" rtl="0">
+              <a:lnSpc>
+                <a:spcPct val="100000"/>
+              </a:lnSpc>
+              <a:spcBef>
+                <a:spcPts val="0"/>
+              </a:spcBef>
+              <a:spcAft>
+                <a:spcPts val="0"/>
+              </a:spcAft>
+              <a:buClr>
+                <a:srgbClr val="3C78D8"/>
+              </a:buClr>
+              <a:buSzPts val="1500"/>
+              <a:buChar char="●"/>
+            </a:pPr>
+            <a:r>
+              <a:rPr lang="en" sz="1500" b="1">
+                <a:solidFill>
+                  <a:srgbClr val="3C78D8"/>
+                </a:solidFill>
+              </a:rPr>
+              <a:t>LLM Jailbreaking </a:t>
             </a:r>
             <a:endParaRPr sz="1500" b="1">
               <a:solidFill>
@@ -12019,7 +12204,7 @@
         <p:spPr>
           <a:xfrm>
             <a:off x="4627375" y="1127825"/>
-            <a:ext cx="4420200" cy="3879000"/>
+            <a:ext cx="4420200" cy="3648000"/>
           </a:xfrm>
           <a:prstGeom prst="rect">
             <a:avLst/>
@@ -12435,7 +12620,7 @@
                   <a:srgbClr val="3C78D8"/>
                 </a:solidFill>
               </a:rPr>
-              <a:t>Figure 01 - Breakthrough</a:t>
+              <a:t>Figure 01 - Robot Breakthrough</a:t>
             </a:r>
             <a:endParaRPr sz="1500" b="1">
               <a:solidFill>
@@ -12472,46 +12657,6 @@
               <a:solidFill>
                 <a:srgbClr val="3C78D8"/>
               </a:solidFill>
-            </a:endParaRPr>
-          </a:p>
-          <a:p>
-            <a:pPr marL="228600" marR="0" lvl="0" indent="-209550" algn="l" rtl="0">
-              <a:lnSpc>
-                <a:spcPct val="100000"/>
-              </a:lnSpc>
-              <a:spcBef>
-                <a:spcPts val="0"/>
-              </a:spcBef>
-              <a:spcAft>
-                <a:spcPts val="0"/>
-              </a:spcAft>
-              <a:buClr>
-                <a:srgbClr val="3C78D8"/>
-              </a:buClr>
-              <a:buSzPts val="1500"/>
-              <a:buFont typeface="Arial"/>
-              <a:buChar char="●"/>
-            </a:pPr>
-            <a:r>
-              <a:rPr lang="en" sz="1500" b="1" i="0" u="none" strike="noStrike" cap="none">
-                <a:solidFill>
-                  <a:srgbClr val="3C78D8"/>
-                </a:solidFill>
-                <a:latin typeface="Arial"/>
-                <a:ea typeface="Arial"/>
-                <a:cs typeface="Arial"/>
-                <a:sym typeface="Arial"/>
-              </a:rPr>
-              <a:t>Crowd-sourced "Arena" Leaderboard</a:t>
-            </a:r>
-            <a:endParaRPr sz="1500" b="1" i="0" u="none" strike="noStrike" cap="none">
-              <a:solidFill>
-                <a:srgbClr val="3C78D8"/>
-              </a:solidFill>
-              <a:latin typeface="Arial"/>
-              <a:ea typeface="Arial"/>
-              <a:cs typeface="Arial"/>
-              <a:sym typeface="Arial"/>
             </a:endParaRPr>
           </a:p>
           <a:p>
@@ -12666,7 +12811,7 @@
   <p:cSld>
     <p:spTree>
       <p:nvGrpSpPr>
-        <p:cNvPr id="1" name="Shape 144"/>
+        <p:cNvPr id="1" name="Shape 149"/>
         <p:cNvGrpSpPr/>
         <p:nvPr/>
       </p:nvGrpSpPr>
@@ -12680,7 +12825,783 @@
       </p:grpSpPr>
       <p:sp>
         <p:nvSpPr>
-          <p:cNvPr id="145" name="Google Shape;145;p22"/>
+          <p:cNvPr id="150" name="Google Shape;150;p22"/>
+          <p:cNvSpPr txBox="1"/>
+          <p:nvPr/>
+        </p:nvSpPr>
+        <p:spPr>
+          <a:xfrm>
+            <a:off x="119316" y="0"/>
+            <a:ext cx="2871000" cy="326400"/>
+          </a:xfrm>
+          <a:prstGeom prst="rect">
+            <a:avLst/>
+          </a:prstGeom>
+          <a:noFill/>
+          <a:ln>
+            <a:noFill/>
+          </a:ln>
+        </p:spPr>
+        <p:txBody>
+          <a:bodyPr spcFirstLastPara="1" wrap="square" lIns="9125" tIns="9125" rIns="9125" bIns="9125" anchor="t" anchorCtr="0">
+            <a:spAutoFit/>
+          </a:bodyPr>
+          <a:lstStyle/>
+          <a:p>
+            <a:pPr marL="0" marR="0" lvl="0" indent="0" algn="l" rtl="0">
+              <a:lnSpc>
+                <a:spcPct val="100000"/>
+              </a:lnSpc>
+              <a:spcBef>
+                <a:spcPts val="0"/>
+              </a:spcBef>
+              <a:spcAft>
+                <a:spcPts val="0"/>
+              </a:spcAft>
+              <a:buClr>
+                <a:srgbClr val="000000"/>
+              </a:buClr>
+              <a:buSzPts val="2000"/>
+              <a:buFont typeface="Arial"/>
+              <a:buNone/>
+            </a:pPr>
+            <a:r>
+              <a:rPr lang="en" sz="2000" b="1">
+                <a:solidFill>
+                  <a:schemeClr val="dk1"/>
+                </a:solidFill>
+                <a:latin typeface="Calibri"/>
+                <a:ea typeface="Calibri"/>
+                <a:cs typeface="Calibri"/>
+                <a:sym typeface="Calibri"/>
+              </a:rPr>
+              <a:t>Training Llama3</a:t>
+            </a:r>
+            <a:endParaRPr sz="2000" b="1" i="0" u="none" strike="noStrike" cap="none">
+              <a:solidFill>
+                <a:srgbClr val="000000"/>
+              </a:solidFill>
+              <a:latin typeface="Calibri"/>
+              <a:ea typeface="Calibri"/>
+              <a:cs typeface="Calibri"/>
+              <a:sym typeface="Calibri"/>
+            </a:endParaRPr>
+          </a:p>
+        </p:txBody>
+      </p:sp>
+      <p:sp>
+        <p:nvSpPr>
+          <p:cNvPr id="151" name="Google Shape;151;p22"/>
+          <p:cNvSpPr txBox="1"/>
+          <p:nvPr/>
+        </p:nvSpPr>
+        <p:spPr>
+          <a:xfrm>
+            <a:off x="119325" y="397700"/>
+            <a:ext cx="5176800" cy="1237500"/>
+          </a:xfrm>
+          <a:prstGeom prst="rect">
+            <a:avLst/>
+          </a:prstGeom>
+          <a:solidFill>
+            <a:srgbClr val="FFF2CC"/>
+          </a:solidFill>
+          <a:ln w="9525" cap="flat" cmpd="sng">
+            <a:solidFill>
+              <a:srgbClr val="FF0000"/>
+            </a:solidFill>
+            <a:prstDash val="solid"/>
+            <a:round/>
+            <a:headEnd type="none" w="sm" len="sm"/>
+            <a:tailEnd type="none" w="sm" len="sm"/>
+          </a:ln>
+        </p:spPr>
+        <p:txBody>
+          <a:bodyPr spcFirstLastPara="1" wrap="square" lIns="18275" tIns="18275" rIns="18275" bIns="18275" anchor="t" anchorCtr="0">
+            <a:spAutoFit/>
+          </a:bodyPr>
+          <a:lstStyle/>
+          <a:p>
+            <a:pPr marL="0" marR="0" lvl="0" indent="0" algn="l" rtl="0">
+              <a:lnSpc>
+                <a:spcPct val="100000"/>
+              </a:lnSpc>
+              <a:spcBef>
+                <a:spcPts val="0"/>
+              </a:spcBef>
+              <a:spcAft>
+                <a:spcPts val="0"/>
+              </a:spcAft>
+              <a:buClr>
+                <a:schemeClr val="dk1"/>
+              </a:buClr>
+              <a:buSzPts val="1100"/>
+              <a:buFont typeface="Arial"/>
+              <a:buNone/>
+            </a:pPr>
+            <a:r>
+              <a:rPr lang="en" sz="1200">
+                <a:solidFill>
+                  <a:schemeClr val="dk1"/>
+                </a:solidFill>
+                <a:latin typeface="Calibri"/>
+                <a:ea typeface="Calibri"/>
+                <a:cs typeface="Calibri"/>
+                <a:sym typeface="Calibri"/>
+              </a:rPr>
+              <a:t>Meta Llama3 training:</a:t>
+            </a:r>
+            <a:endParaRPr sz="1200">
+              <a:solidFill>
+                <a:schemeClr val="dk1"/>
+              </a:solidFill>
+              <a:latin typeface="Calibri"/>
+              <a:ea typeface="Calibri"/>
+              <a:cs typeface="Calibri"/>
+              <a:sym typeface="Calibri"/>
+            </a:endParaRPr>
+          </a:p>
+          <a:p>
+            <a:pPr marL="228600" marR="0" lvl="0" indent="-171450" algn="l" rtl="0">
+              <a:lnSpc>
+                <a:spcPct val="100000"/>
+              </a:lnSpc>
+              <a:spcBef>
+                <a:spcPts val="0"/>
+              </a:spcBef>
+              <a:spcAft>
+                <a:spcPts val="0"/>
+              </a:spcAft>
+              <a:buSzPts val="900"/>
+              <a:buFont typeface="Calibri"/>
+              <a:buChar char="●"/>
+            </a:pPr>
+            <a:r>
+              <a:rPr lang="en" sz="900" u="sng">
+                <a:solidFill>
+                  <a:schemeClr val="hlink"/>
+                </a:solidFill>
+                <a:latin typeface="Calibri"/>
+                <a:ea typeface="Calibri"/>
+                <a:cs typeface="Calibri"/>
+                <a:sym typeface="Calibri"/>
+                <a:hlinkClick r:id="rId3"/>
+              </a:rPr>
+              <a:t>https://engineering.fb.com/2024/03/12/data-center-engineering/building-metas-genai-infrastructure/</a:t>
+            </a:r>
+            <a:r>
+              <a:rPr lang="en" sz="900">
+                <a:solidFill>
+                  <a:schemeClr val="dk1"/>
+                </a:solidFill>
+                <a:latin typeface="Calibri"/>
+                <a:ea typeface="Calibri"/>
+                <a:cs typeface="Calibri"/>
+                <a:sym typeface="Calibri"/>
+              </a:rPr>
+              <a:t> </a:t>
+            </a:r>
+            <a:endParaRPr sz="900">
+              <a:solidFill>
+                <a:schemeClr val="dk1"/>
+              </a:solidFill>
+              <a:latin typeface="Calibri"/>
+              <a:ea typeface="Calibri"/>
+              <a:cs typeface="Calibri"/>
+              <a:sym typeface="Calibri"/>
+            </a:endParaRPr>
+          </a:p>
+          <a:p>
+            <a:pPr marL="228600" marR="0" lvl="0" indent="-171450" algn="l" rtl="0">
+              <a:lnSpc>
+                <a:spcPct val="100000"/>
+              </a:lnSpc>
+              <a:spcBef>
+                <a:spcPts val="0"/>
+              </a:spcBef>
+              <a:spcAft>
+                <a:spcPts val="0"/>
+              </a:spcAft>
+              <a:buSzPts val="900"/>
+              <a:buFont typeface="Calibri"/>
+              <a:buChar char="●"/>
+            </a:pPr>
+            <a:r>
+              <a:rPr lang="en" sz="900" u="sng">
+                <a:solidFill>
+                  <a:schemeClr val="hlink"/>
+                </a:solidFill>
+                <a:latin typeface="Calibri"/>
+                <a:ea typeface="Calibri"/>
+                <a:cs typeface="Calibri"/>
+                <a:sym typeface="Calibri"/>
+                <a:hlinkClick r:id="rId4"/>
+              </a:rPr>
+              <a:t>https://twitter.com/soumithchintala/status/1767579981419315400</a:t>
+            </a:r>
+            <a:r>
+              <a:rPr lang="en" sz="900">
+                <a:solidFill>
+                  <a:schemeClr val="dk1"/>
+                </a:solidFill>
+                <a:latin typeface="Calibri"/>
+                <a:ea typeface="Calibri"/>
+                <a:cs typeface="Calibri"/>
+                <a:sym typeface="Calibri"/>
+              </a:rPr>
+              <a:t> </a:t>
+            </a:r>
+            <a:endParaRPr sz="900">
+              <a:solidFill>
+                <a:schemeClr val="dk1"/>
+              </a:solidFill>
+              <a:latin typeface="Calibri"/>
+              <a:ea typeface="Calibri"/>
+              <a:cs typeface="Calibri"/>
+              <a:sym typeface="Calibri"/>
+            </a:endParaRPr>
+          </a:p>
+          <a:p>
+            <a:pPr marL="0" marR="0" lvl="0" indent="0" algn="l" rtl="0">
+              <a:lnSpc>
+                <a:spcPct val="100000"/>
+              </a:lnSpc>
+              <a:spcBef>
+                <a:spcPts val="0"/>
+              </a:spcBef>
+              <a:spcAft>
+                <a:spcPts val="0"/>
+              </a:spcAft>
+              <a:buClr>
+                <a:schemeClr val="dk1"/>
+              </a:buClr>
+              <a:buSzPts val="1100"/>
+              <a:buFont typeface="Arial"/>
+              <a:buNone/>
+            </a:pPr>
+            <a:r>
+              <a:rPr lang="en" sz="1200">
+                <a:solidFill>
+                  <a:schemeClr val="dk1"/>
+                </a:solidFill>
+                <a:latin typeface="Calibri"/>
+                <a:ea typeface="Calibri"/>
+                <a:cs typeface="Calibri"/>
+                <a:sym typeface="Calibri"/>
+              </a:rPr>
+              <a:t>24K H100 Cluster Pods</a:t>
+            </a:r>
+            <a:endParaRPr sz="1200">
+              <a:solidFill>
+                <a:schemeClr val="dk1"/>
+              </a:solidFill>
+              <a:latin typeface="Calibri"/>
+              <a:ea typeface="Calibri"/>
+              <a:cs typeface="Calibri"/>
+              <a:sym typeface="Calibri"/>
+            </a:endParaRPr>
+          </a:p>
+          <a:p>
+            <a:pPr marL="0" lvl="0" indent="0" algn="l" rtl="0">
+              <a:spcBef>
+                <a:spcPts val="0"/>
+              </a:spcBef>
+              <a:spcAft>
+                <a:spcPts val="0"/>
+              </a:spcAft>
+              <a:buClr>
+                <a:schemeClr val="dk1"/>
+              </a:buClr>
+              <a:buSzPts val="1100"/>
+              <a:buFont typeface="Arial"/>
+              <a:buNone/>
+            </a:pPr>
+            <a:r>
+              <a:rPr lang="en" sz="1200">
+                <a:solidFill>
+                  <a:schemeClr val="dk1"/>
+                </a:solidFill>
+                <a:latin typeface="Calibri"/>
+                <a:ea typeface="Calibri"/>
+                <a:cs typeface="Calibri"/>
+                <a:sym typeface="Calibri"/>
+              </a:rPr>
+              <a:t>PyTorch, NCCL library from Nvidia - </a:t>
+            </a:r>
+            <a:r>
+              <a:rPr lang="en" sz="900" u="sng">
+                <a:solidFill>
+                  <a:schemeClr val="hlink"/>
+                </a:solidFill>
+                <a:latin typeface="Calibri"/>
+                <a:ea typeface="Calibri"/>
+                <a:cs typeface="Calibri"/>
+                <a:sym typeface="Calibri"/>
+                <a:hlinkClick r:id="rId5"/>
+              </a:rPr>
+              <a:t>https://developer.nvidia.com/nccl</a:t>
+            </a:r>
+            <a:r>
+              <a:rPr lang="en" sz="900">
+                <a:solidFill>
+                  <a:schemeClr val="dk1"/>
+                </a:solidFill>
+                <a:latin typeface="Calibri"/>
+                <a:ea typeface="Calibri"/>
+                <a:cs typeface="Calibri"/>
+                <a:sym typeface="Calibri"/>
+              </a:rPr>
+              <a:t> </a:t>
+            </a:r>
+            <a:endParaRPr sz="900">
+              <a:solidFill>
+                <a:schemeClr val="dk1"/>
+              </a:solidFill>
+              <a:latin typeface="Calibri"/>
+              <a:ea typeface="Calibri"/>
+              <a:cs typeface="Calibri"/>
+              <a:sym typeface="Calibri"/>
+            </a:endParaRPr>
+          </a:p>
+          <a:p>
+            <a:pPr marL="0" lvl="0" indent="0" algn="l" rtl="0">
+              <a:spcBef>
+                <a:spcPts val="0"/>
+              </a:spcBef>
+              <a:spcAft>
+                <a:spcPts val="0"/>
+              </a:spcAft>
+              <a:buClr>
+                <a:schemeClr val="dk1"/>
+              </a:buClr>
+              <a:buSzPts val="1100"/>
+              <a:buFont typeface="Arial"/>
+              <a:buNone/>
+            </a:pPr>
+            <a:r>
+              <a:rPr lang="en" sz="1200">
+                <a:solidFill>
+                  <a:schemeClr val="dk1"/>
+                </a:solidFill>
+                <a:latin typeface="Calibri"/>
+                <a:ea typeface="Calibri"/>
+                <a:cs typeface="Calibri"/>
+                <a:sym typeface="Calibri"/>
+              </a:rPr>
+              <a:t>Network: RoCEv2 - </a:t>
+            </a:r>
+            <a:r>
+              <a:rPr lang="en" sz="900" u="sng">
+                <a:solidFill>
+                  <a:schemeClr val="hlink"/>
+                </a:solidFill>
+                <a:latin typeface="Calibri"/>
+                <a:ea typeface="Calibri"/>
+                <a:cs typeface="Calibri"/>
+                <a:sym typeface="Calibri"/>
+                <a:hlinkClick r:id="rId6"/>
+              </a:rPr>
+              <a:t>https://docs.nvidia.com/networking/display/winofv55053000/rocev2</a:t>
+            </a:r>
+            <a:r>
+              <a:rPr lang="en" sz="900">
+                <a:solidFill>
+                  <a:schemeClr val="dk1"/>
+                </a:solidFill>
+                <a:latin typeface="Calibri"/>
+                <a:ea typeface="Calibri"/>
+                <a:cs typeface="Calibri"/>
+                <a:sym typeface="Calibri"/>
+              </a:rPr>
+              <a:t> </a:t>
+            </a:r>
+            <a:endParaRPr sz="900">
+              <a:solidFill>
+                <a:schemeClr val="dk1"/>
+              </a:solidFill>
+              <a:latin typeface="Calibri"/>
+              <a:ea typeface="Calibri"/>
+              <a:cs typeface="Calibri"/>
+              <a:sym typeface="Calibri"/>
+            </a:endParaRPr>
+          </a:p>
+          <a:p>
+            <a:pPr marL="0" lvl="0" indent="0" algn="l" rtl="0">
+              <a:spcBef>
+                <a:spcPts val="0"/>
+              </a:spcBef>
+              <a:spcAft>
+                <a:spcPts val="0"/>
+              </a:spcAft>
+              <a:buClr>
+                <a:schemeClr val="dk1"/>
+              </a:buClr>
+              <a:buSzPts val="1100"/>
+              <a:buFont typeface="Arial"/>
+              <a:buNone/>
+            </a:pPr>
+            <a:r>
+              <a:rPr lang="en" sz="1200">
+                <a:solidFill>
+                  <a:schemeClr val="dk1"/>
+                </a:solidFill>
+                <a:latin typeface="Calibri"/>
+                <a:ea typeface="Calibri"/>
+                <a:cs typeface="Calibri"/>
+                <a:sym typeface="Calibri"/>
+              </a:rPr>
+              <a:t>Storage: NFS/FUSE based on Tectonic/Hammerspace</a:t>
+            </a:r>
+            <a:endParaRPr sz="1200">
+              <a:solidFill>
+                <a:schemeClr val="dk1"/>
+              </a:solidFill>
+              <a:latin typeface="Calibri"/>
+              <a:ea typeface="Calibri"/>
+              <a:cs typeface="Calibri"/>
+              <a:sym typeface="Calibri"/>
+            </a:endParaRPr>
+          </a:p>
+        </p:txBody>
+      </p:sp>
+      <p:pic>
+        <p:nvPicPr>
+          <p:cNvPr id="152" name="Google Shape;152;p22"/>
+          <p:cNvPicPr preferRelativeResize="0"/>
+          <p:nvPr/>
+        </p:nvPicPr>
+        <p:blipFill>
+          <a:blip r:embed="rId7" cstate="email">
+            <a:alphaModFix/>
+            <a:extLst>
+              <a:ext uri="{28A0092B-C50C-407E-A947-70E740481C1C}">
+                <a14:useLocalDpi xmlns:a14="http://schemas.microsoft.com/office/drawing/2010/main"/>
+              </a:ext>
+            </a:extLst>
+          </a:blip>
+          <a:stretch>
+            <a:fillRect/>
+          </a:stretch>
+        </p:blipFill>
+        <p:spPr>
+          <a:xfrm>
+            <a:off x="2207625" y="1706500"/>
+            <a:ext cx="4703977" cy="3369725"/>
+          </a:xfrm>
+          <a:prstGeom prst="rect">
+            <a:avLst/>
+          </a:prstGeom>
+          <a:noFill/>
+          <a:ln w="9525" cap="flat" cmpd="sng">
+            <a:solidFill>
+              <a:srgbClr val="FF0000"/>
+            </a:solidFill>
+            <a:prstDash val="solid"/>
+            <a:round/>
+            <a:headEnd type="none" w="sm" len="sm"/>
+            <a:tailEnd type="none" w="sm" len="sm"/>
+          </a:ln>
+        </p:spPr>
+      </p:pic>
+    </p:spTree>
+  </p:cSld>
+  <p:clrMapOvr>
+    <a:masterClrMapping/>
+  </p:clrMapOvr>
+</p:sld>
+</file>
+
+<file path=ppt/slides/slide11.xml><?xml version="1.0" encoding="utf-8"?>
+<p:sld xmlns:a="http://schemas.openxmlformats.org/drawingml/2006/main" xmlns:r="http://schemas.openxmlformats.org/officeDocument/2006/relationships" xmlns:p="http://schemas.openxmlformats.org/presentationml/2006/main">
+  <p:cSld>
+    <p:spTree>
+      <p:nvGrpSpPr>
+        <p:cNvPr id="1" name="Shape 156"/>
+        <p:cNvGrpSpPr/>
+        <p:nvPr/>
+      </p:nvGrpSpPr>
+      <p:grpSpPr>
+        <a:xfrm>
+          <a:off x="0" y="0"/>
+          <a:ext cx="0" cy="0"/>
+          <a:chOff x="0" y="0"/>
+          <a:chExt cx="0" cy="0"/>
+        </a:xfrm>
+      </p:grpSpPr>
+      <p:sp>
+        <p:nvSpPr>
+          <p:cNvPr id="157" name="Google Shape;157;p23"/>
+          <p:cNvSpPr txBox="1"/>
+          <p:nvPr/>
+        </p:nvSpPr>
+        <p:spPr>
+          <a:xfrm>
+            <a:off x="119316" y="0"/>
+            <a:ext cx="2871000" cy="326400"/>
+          </a:xfrm>
+          <a:prstGeom prst="rect">
+            <a:avLst/>
+          </a:prstGeom>
+          <a:noFill/>
+          <a:ln>
+            <a:noFill/>
+          </a:ln>
+        </p:spPr>
+        <p:txBody>
+          <a:bodyPr spcFirstLastPara="1" wrap="square" lIns="9125" tIns="9125" rIns="9125" bIns="9125" anchor="t" anchorCtr="0">
+            <a:spAutoFit/>
+          </a:bodyPr>
+          <a:lstStyle/>
+          <a:p>
+            <a:pPr marL="0" marR="0" lvl="0" indent="0" algn="l" rtl="0">
+              <a:lnSpc>
+                <a:spcPct val="100000"/>
+              </a:lnSpc>
+              <a:spcBef>
+                <a:spcPts val="0"/>
+              </a:spcBef>
+              <a:spcAft>
+                <a:spcPts val="0"/>
+              </a:spcAft>
+              <a:buClr>
+                <a:srgbClr val="000000"/>
+              </a:buClr>
+              <a:buSzPts val="2000"/>
+              <a:buFont typeface="Arial"/>
+              <a:buNone/>
+            </a:pPr>
+            <a:r>
+              <a:rPr lang="en" sz="2000" b="1">
+                <a:solidFill>
+                  <a:schemeClr val="dk1"/>
+                </a:solidFill>
+                <a:latin typeface="Calibri"/>
+                <a:ea typeface="Calibri"/>
+                <a:cs typeface="Calibri"/>
+                <a:sym typeface="Calibri"/>
+              </a:rPr>
+              <a:t>Nvidia</a:t>
+            </a:r>
+            <a:endParaRPr sz="2000" b="1" i="0" u="none" strike="noStrike" cap="none">
+              <a:solidFill>
+                <a:srgbClr val="000000"/>
+              </a:solidFill>
+              <a:latin typeface="Calibri"/>
+              <a:ea typeface="Calibri"/>
+              <a:cs typeface="Calibri"/>
+              <a:sym typeface="Calibri"/>
+            </a:endParaRPr>
+          </a:p>
+        </p:txBody>
+      </p:sp>
+      <p:sp>
+        <p:nvSpPr>
+          <p:cNvPr id="158" name="Google Shape;158;p23"/>
+          <p:cNvSpPr txBox="1"/>
+          <p:nvPr/>
+        </p:nvSpPr>
+        <p:spPr>
+          <a:xfrm>
+            <a:off x="119325" y="397700"/>
+            <a:ext cx="4329000" cy="437100"/>
+          </a:xfrm>
+          <a:prstGeom prst="rect">
+            <a:avLst/>
+          </a:prstGeom>
+          <a:solidFill>
+            <a:srgbClr val="FFF2CC"/>
+          </a:solidFill>
+          <a:ln w="9525" cap="flat" cmpd="sng">
+            <a:solidFill>
+              <a:srgbClr val="FF0000"/>
+            </a:solidFill>
+            <a:prstDash val="solid"/>
+            <a:round/>
+            <a:headEnd type="none" w="sm" len="sm"/>
+            <a:tailEnd type="none" w="sm" len="sm"/>
+          </a:ln>
+        </p:spPr>
+        <p:txBody>
+          <a:bodyPr spcFirstLastPara="1" wrap="square" lIns="18275" tIns="18275" rIns="18275" bIns="18275" anchor="t" anchorCtr="0">
+            <a:spAutoFit/>
+          </a:bodyPr>
+          <a:lstStyle/>
+          <a:p>
+            <a:pPr marL="0" marR="0" lvl="0" indent="0" algn="l" rtl="0">
+              <a:lnSpc>
+                <a:spcPct val="100000"/>
+              </a:lnSpc>
+              <a:spcBef>
+                <a:spcPts val="0"/>
+              </a:spcBef>
+              <a:spcAft>
+                <a:spcPts val="0"/>
+              </a:spcAft>
+              <a:buClr>
+                <a:schemeClr val="dk1"/>
+              </a:buClr>
+              <a:buSzPts val="1100"/>
+              <a:buFont typeface="Arial"/>
+              <a:buNone/>
+            </a:pPr>
+            <a:r>
+              <a:rPr lang="en" sz="1300">
+                <a:solidFill>
+                  <a:schemeClr val="dk1"/>
+                </a:solidFill>
+                <a:latin typeface="Calibri"/>
+                <a:ea typeface="Calibri"/>
+                <a:cs typeface="Calibri"/>
+                <a:sym typeface="Calibri"/>
+              </a:rPr>
+              <a:t>Nvidia is now also very active in making an AI model portfolio. </a:t>
+            </a:r>
+            <a:endParaRPr sz="1300">
+              <a:solidFill>
+                <a:schemeClr val="dk1"/>
+              </a:solidFill>
+              <a:latin typeface="Calibri"/>
+              <a:ea typeface="Calibri"/>
+              <a:cs typeface="Calibri"/>
+              <a:sym typeface="Calibri"/>
+            </a:endParaRPr>
+          </a:p>
+          <a:p>
+            <a:pPr marL="0" marR="0" lvl="0" indent="0" algn="l" rtl="0">
+              <a:lnSpc>
+                <a:spcPct val="100000"/>
+              </a:lnSpc>
+              <a:spcBef>
+                <a:spcPts val="0"/>
+              </a:spcBef>
+              <a:spcAft>
+                <a:spcPts val="0"/>
+              </a:spcAft>
+              <a:buClr>
+                <a:schemeClr val="dk1"/>
+              </a:buClr>
+              <a:buSzPts val="1100"/>
+              <a:buFont typeface="Arial"/>
+              <a:buNone/>
+            </a:pPr>
+            <a:r>
+              <a:rPr lang="en" sz="1300">
+                <a:solidFill>
+                  <a:schemeClr val="dk1"/>
+                </a:solidFill>
+                <a:latin typeface="Calibri"/>
+                <a:ea typeface="Calibri"/>
+                <a:cs typeface="Calibri"/>
+                <a:sym typeface="Calibri"/>
+              </a:rPr>
+              <a:t>Helps them sell the GPUs</a:t>
+            </a:r>
+            <a:endParaRPr sz="1300">
+              <a:solidFill>
+                <a:schemeClr val="dk1"/>
+              </a:solidFill>
+              <a:latin typeface="Calibri"/>
+              <a:ea typeface="Calibri"/>
+              <a:cs typeface="Calibri"/>
+              <a:sym typeface="Calibri"/>
+            </a:endParaRPr>
+          </a:p>
+        </p:txBody>
+      </p:sp>
+      <p:pic>
+        <p:nvPicPr>
+          <p:cNvPr id="159" name="Google Shape;159;p23"/>
+          <p:cNvPicPr preferRelativeResize="0"/>
+          <p:nvPr/>
+        </p:nvPicPr>
+        <p:blipFill>
+          <a:blip r:embed="rId3" cstate="email">
+            <a:alphaModFix/>
+            <a:extLst>
+              <a:ext uri="{28A0092B-C50C-407E-A947-70E740481C1C}">
+                <a14:useLocalDpi xmlns:a14="http://schemas.microsoft.com/office/drawing/2010/main"/>
+              </a:ext>
+            </a:extLst>
+          </a:blip>
+          <a:stretch>
+            <a:fillRect/>
+          </a:stretch>
+        </p:blipFill>
+        <p:spPr>
+          <a:xfrm>
+            <a:off x="119325" y="906099"/>
+            <a:ext cx="8479200" cy="1552900"/>
+          </a:xfrm>
+          <a:prstGeom prst="rect">
+            <a:avLst/>
+          </a:prstGeom>
+          <a:noFill/>
+          <a:ln>
+            <a:noFill/>
+          </a:ln>
+        </p:spPr>
+      </p:pic>
+      <p:pic>
+        <p:nvPicPr>
+          <p:cNvPr id="160" name="Google Shape;160;p23"/>
+          <p:cNvPicPr preferRelativeResize="0"/>
+          <p:nvPr/>
+        </p:nvPicPr>
+        <p:blipFill>
+          <a:blip r:embed="rId4" cstate="email">
+            <a:alphaModFix/>
+            <a:extLst>
+              <a:ext uri="{28A0092B-C50C-407E-A947-70E740481C1C}">
+                <a14:useLocalDpi xmlns:a14="http://schemas.microsoft.com/office/drawing/2010/main"/>
+              </a:ext>
+            </a:extLst>
+          </a:blip>
+          <a:stretch>
+            <a:fillRect/>
+          </a:stretch>
+        </p:blipFill>
+        <p:spPr>
+          <a:xfrm>
+            <a:off x="152400" y="2611399"/>
+            <a:ext cx="4607995" cy="2379700"/>
+          </a:xfrm>
+          <a:prstGeom prst="rect">
+            <a:avLst/>
+          </a:prstGeom>
+          <a:noFill/>
+          <a:ln>
+            <a:noFill/>
+          </a:ln>
+        </p:spPr>
+      </p:pic>
+    </p:spTree>
+  </p:cSld>
+  <p:clrMapOvr>
+    <a:masterClrMapping/>
+  </p:clrMapOvr>
+</p:sld>
+</file>
+
+<file path=ppt/slides/slide12.xml><?xml version="1.0" encoding="utf-8"?>
+<p:sld xmlns:a="http://schemas.openxmlformats.org/drawingml/2006/main" xmlns:r="http://schemas.openxmlformats.org/officeDocument/2006/relationships" xmlns:p="http://schemas.openxmlformats.org/presentationml/2006/main">
+  <p:cSld>
+    <p:spTree>
+      <p:nvGrpSpPr>
+        <p:cNvPr id="1" name="Shape 164"/>
+        <p:cNvGrpSpPr/>
+        <p:nvPr/>
+      </p:nvGrpSpPr>
+      <p:grpSpPr>
+        <a:xfrm>
+          <a:off x="0" y="0"/>
+          <a:ext cx="0" cy="0"/>
+          <a:chOff x="0" y="0"/>
+          <a:chExt cx="0" cy="0"/>
+        </a:xfrm>
+      </p:grpSpPr>
+      <p:sp>
+        <p:nvSpPr>
+          <p:cNvPr id="165" name="Google Shape;165;p24"/>
           <p:cNvSpPr txBox="1"/>
           <p:nvPr/>
         </p:nvSpPr>
@@ -12746,7 +13667,7 @@
       </p:sp>
       <p:sp>
         <p:nvSpPr>
-          <p:cNvPr id="146" name="Google Shape;146;p22"/>
+          <p:cNvPr id="166" name="Google Shape;166;p24"/>
           <p:cNvSpPr txBox="1"/>
           <p:nvPr/>
         </p:nvSpPr>
@@ -13076,7 +13997,7 @@
       </p:sp>
       <p:sp>
         <p:nvSpPr>
-          <p:cNvPr id="147" name="Google Shape;147;p22"/>
+          <p:cNvPr id="167" name="Google Shape;167;p24"/>
           <p:cNvSpPr txBox="1"/>
           <p:nvPr/>
         </p:nvSpPr>
@@ -13443,7 +14364,7 @@
       </p:sp>
       <p:pic>
         <p:nvPicPr>
-          <p:cNvPr id="148" name="Google Shape;148;p22"/>
+          <p:cNvPr id="168" name="Google Shape;168;p24"/>
           <p:cNvPicPr preferRelativeResize="0"/>
           <p:nvPr/>
         </p:nvPicPr>
@@ -13482,12 +14403,12 @@
 </p:sld>
 </file>
 
-<file path=ppt/slides/slide11.xml><?xml version="1.0" encoding="utf-8"?>
+<file path=ppt/slides/slide13.xml><?xml version="1.0" encoding="utf-8"?>
 <p:sld xmlns:a="http://schemas.openxmlformats.org/drawingml/2006/main" xmlns:r="http://schemas.openxmlformats.org/officeDocument/2006/relationships" xmlns:p="http://schemas.openxmlformats.org/presentationml/2006/main">
   <p:cSld>
     <p:spTree>
       <p:nvGrpSpPr>
-        <p:cNvPr id="1" name="Shape 152"/>
+        <p:cNvPr id="1" name="Shape 172"/>
         <p:cNvGrpSpPr/>
         <p:nvPr/>
       </p:nvGrpSpPr>
@@ -13501,7 +14422,7 @@
       </p:grpSpPr>
       <p:sp>
         <p:nvSpPr>
-          <p:cNvPr id="153" name="Google Shape;153;p23"/>
+          <p:cNvPr id="173" name="Google Shape;173;p25"/>
           <p:cNvSpPr txBox="1"/>
           <p:nvPr/>
         </p:nvSpPr>
@@ -13585,7 +14506,7 @@
       </p:sp>
       <p:sp>
         <p:nvSpPr>
-          <p:cNvPr id="154" name="Google Shape;154;p23"/>
+          <p:cNvPr id="174" name="Google Shape;174;p25"/>
           <p:cNvSpPr txBox="1"/>
           <p:nvPr/>
         </p:nvSpPr>
@@ -13699,7 +14620,7 @@
       </p:sp>
       <p:sp>
         <p:nvSpPr>
-          <p:cNvPr id="155" name="Google Shape;155;p23"/>
+          <p:cNvPr id="175" name="Google Shape;175;p25"/>
           <p:cNvSpPr txBox="1"/>
           <p:nvPr/>
         </p:nvSpPr>
@@ -13813,7 +14734,7 @@
       </p:sp>
       <p:sp>
         <p:nvSpPr>
-          <p:cNvPr id="156" name="Google Shape;156;p23"/>
+          <p:cNvPr id="176" name="Google Shape;176;p25"/>
           <p:cNvSpPr txBox="1"/>
           <p:nvPr/>
         </p:nvSpPr>
@@ -14153,7 +15074,7 @@
       </p:sp>
       <p:pic>
         <p:nvPicPr>
-          <p:cNvPr id="157" name="Google Shape;157;p23"/>
+          <p:cNvPr id="177" name="Google Shape;177;p25"/>
           <p:cNvPicPr preferRelativeResize="0"/>
           <p:nvPr/>
         </p:nvPicPr>
@@ -14180,7 +15101,7 @@
       </p:pic>
       <p:pic>
         <p:nvPicPr>
-          <p:cNvPr id="158" name="Google Shape;158;p23"/>
+          <p:cNvPr id="178" name="Google Shape;178;p25"/>
           <p:cNvPicPr preferRelativeResize="0"/>
           <p:nvPr/>
         </p:nvPicPr>
@@ -14207,7 +15128,7 @@
       </p:pic>
       <p:sp>
         <p:nvSpPr>
-          <p:cNvPr id="159" name="Google Shape;159;p23"/>
+          <p:cNvPr id="179" name="Google Shape;179;p25"/>
           <p:cNvSpPr txBox="1"/>
           <p:nvPr/>
         </p:nvSpPr>
@@ -14273,7 +15194,7 @@
       </p:sp>
       <p:sp>
         <p:nvSpPr>
-          <p:cNvPr id="160" name="Google Shape;160;p23"/>
+          <p:cNvPr id="180" name="Google Shape;180;p25"/>
           <p:cNvSpPr txBox="1"/>
           <p:nvPr/>
         </p:nvSpPr>
@@ -14339,7 +15260,7 @@
       </p:sp>
       <p:sp>
         <p:nvSpPr>
-          <p:cNvPr id="161" name="Google Shape;161;p23"/>
+          <p:cNvPr id="181" name="Google Shape;181;p25"/>
           <p:cNvSpPr txBox="1"/>
           <p:nvPr/>
         </p:nvSpPr>
@@ -14719,7 +15640,7 @@
       </p:sp>
       <p:pic>
         <p:nvPicPr>
-          <p:cNvPr id="162" name="Google Shape;162;p23"/>
+          <p:cNvPr id="182" name="Google Shape;182;p25"/>
           <p:cNvPicPr preferRelativeResize="0"/>
           <p:nvPr/>
         </p:nvPicPr>
@@ -14746,7 +15667,7 @@
       </p:pic>
       <p:sp>
         <p:nvSpPr>
-          <p:cNvPr id="163" name="Google Shape;163;p23"/>
+          <p:cNvPr id="183" name="Google Shape;183;p25"/>
           <p:cNvSpPr txBox="1"/>
           <p:nvPr/>
         </p:nvSpPr>
@@ -14852,7 +15773,7 @@
       </p:sp>
       <p:pic>
         <p:nvPicPr>
-          <p:cNvPr id="164" name="Google Shape;164;p23"/>
+          <p:cNvPr id="184" name="Google Shape;184;p25"/>
           <p:cNvPicPr preferRelativeResize="0"/>
           <p:nvPr/>
         </p:nvPicPr>
@@ -14885,12 +15806,12 @@
 </p:sld>
 </file>
 
-<file path=ppt/slides/slide12.xml><?xml version="1.0" encoding="utf-8"?>
+<file path=ppt/slides/slide14.xml><?xml version="1.0" encoding="utf-8"?>
 <p:sld xmlns:a="http://schemas.openxmlformats.org/drawingml/2006/main" xmlns:r="http://schemas.openxmlformats.org/officeDocument/2006/relationships" xmlns:p="http://schemas.openxmlformats.org/presentationml/2006/main">
   <p:cSld>
     <p:spTree>
       <p:nvGrpSpPr>
-        <p:cNvPr id="1" name="Shape 168"/>
+        <p:cNvPr id="1" name="Shape 188"/>
         <p:cNvGrpSpPr/>
         <p:nvPr/>
       </p:nvGrpSpPr>
@@ -14904,7 +15825,7 @@
       </p:grpSpPr>
       <p:sp>
         <p:nvSpPr>
-          <p:cNvPr id="169" name="Google Shape;169;p24"/>
+          <p:cNvPr id="189" name="Google Shape;189;p26"/>
           <p:cNvSpPr txBox="1"/>
           <p:nvPr/>
         </p:nvSpPr>
@@ -14973,7 +15894,7 @@
       </p:sp>
       <p:sp>
         <p:nvSpPr>
-          <p:cNvPr id="170" name="Google Shape;170;p24"/>
+          <p:cNvPr id="190" name="Google Shape;190;p26"/>
           <p:cNvSpPr txBox="1"/>
           <p:nvPr/>
         </p:nvSpPr>
@@ -15154,7 +16075,7 @@
       </p:sp>
       <p:sp>
         <p:nvSpPr>
-          <p:cNvPr id="171" name="Google Shape;171;p24"/>
+          <p:cNvPr id="191" name="Google Shape;191;p26"/>
           <p:cNvSpPr txBox="1"/>
           <p:nvPr/>
         </p:nvSpPr>
@@ -15440,7 +16361,7 @@
       </p:sp>
       <p:sp>
         <p:nvSpPr>
-          <p:cNvPr id="172" name="Google Shape;172;p24"/>
+          <p:cNvPr id="192" name="Google Shape;192;p26"/>
           <p:cNvSpPr txBox="1"/>
           <p:nvPr/>
         </p:nvSpPr>
@@ -15587,7 +16508,7 @@
       </p:sp>
       <p:sp>
         <p:nvSpPr>
-          <p:cNvPr id="173" name="Google Shape;173;p24"/>
+          <p:cNvPr id="193" name="Google Shape;193;p26"/>
           <p:cNvSpPr txBox="1"/>
           <p:nvPr/>
         </p:nvSpPr>
@@ -15714,7 +16635,7 @@
       </p:sp>
       <p:pic>
         <p:nvPicPr>
-          <p:cNvPr id="174" name="Google Shape;174;p24"/>
+          <p:cNvPr id="194" name="Google Shape;194;p26"/>
           <p:cNvPicPr preferRelativeResize="0"/>
           <p:nvPr/>
         </p:nvPicPr>
@@ -15741,7 +16662,7 @@
       </p:pic>
       <p:sp>
         <p:nvSpPr>
-          <p:cNvPr id="175" name="Google Shape;175;p24"/>
+          <p:cNvPr id="195" name="Google Shape;195;p26"/>
           <p:cNvSpPr txBox="1"/>
           <p:nvPr/>
         </p:nvSpPr>
@@ -16134,6 +17055,18 @@
               <a:buChar char="●"/>
             </a:pPr>
             <a:r>
+              <a:rPr lang="en" sz="1200" b="1" i="0" u="none" strike="noStrike" cap="none">
+                <a:solidFill>
+                  <a:srgbClr val="3C78D8"/>
+                </a:solidFill>
+                <a:latin typeface="Calibri"/>
+                <a:ea typeface="Calibri"/>
+                <a:cs typeface="Calibri"/>
+                <a:sym typeface="Calibri"/>
+              </a:rPr>
+              <a:t>LangChain</a:t>
+            </a:r>
+            <a:r>
               <a:rPr lang="en" sz="1200" b="0" i="0" u="none" strike="noStrike" cap="none">
                 <a:solidFill>
                   <a:schemeClr val="dk1"/>
@@ -16143,7 +17076,31 @@
                 <a:cs typeface="Calibri"/>
                 <a:sym typeface="Calibri"/>
               </a:rPr>
-              <a:t>LangChain - python library</a:t>
+              <a:t> - python library (+</a:t>
+            </a:r>
+            <a:r>
+              <a:rPr lang="en" sz="1200" b="1" i="0" u="none" strike="noStrike" cap="none">
+                <a:solidFill>
+                  <a:srgbClr val="3C78D8"/>
+                </a:solidFill>
+                <a:latin typeface="Calibri"/>
+                <a:ea typeface="Calibri"/>
+                <a:cs typeface="Calibri"/>
+                <a:sym typeface="Calibri"/>
+              </a:rPr>
+              <a:t>LangSmith</a:t>
+            </a:r>
+            <a:r>
+              <a:rPr lang="en" sz="1200" b="0" i="0" u="none" strike="noStrike" cap="none">
+                <a:solidFill>
+                  <a:schemeClr val="dk1"/>
+                </a:solidFill>
+                <a:latin typeface="Calibri"/>
+                <a:ea typeface="Calibri"/>
+                <a:cs typeface="Calibri"/>
+                <a:sym typeface="Calibri"/>
+              </a:rPr>
+              <a:t>)</a:t>
             </a:r>
             <a:endParaRPr sz="1200" b="0" i="0" u="none" strike="noStrike" cap="none">
               <a:solidFill>
@@ -16159,7 +17116,7 @@
       </p:sp>
       <p:sp>
         <p:nvSpPr>
-          <p:cNvPr id="176" name="Google Shape;176;p24"/>
+          <p:cNvPr id="196" name="Google Shape;196;p26"/>
           <p:cNvSpPr txBox="1"/>
           <p:nvPr/>
         </p:nvSpPr>
@@ -16399,12 +17356,12 @@
 </p:sld>
 </file>
 
-<file path=ppt/slides/slide13.xml><?xml version="1.0" encoding="utf-8"?>
+<file path=ppt/slides/slide15.xml><?xml version="1.0" encoding="utf-8"?>
 <p:sld xmlns:a="http://schemas.openxmlformats.org/drawingml/2006/main" xmlns:r="http://schemas.openxmlformats.org/officeDocument/2006/relationships" xmlns:p="http://schemas.openxmlformats.org/presentationml/2006/main">
   <p:cSld>
     <p:spTree>
       <p:nvGrpSpPr>
-        <p:cNvPr id="1" name="Shape 180"/>
+        <p:cNvPr id="1" name="Shape 200"/>
         <p:cNvGrpSpPr/>
         <p:nvPr/>
       </p:nvGrpSpPr>
@@ -16418,7 +17375,7 @@
       </p:grpSpPr>
       <p:sp>
         <p:nvSpPr>
-          <p:cNvPr id="181" name="Google Shape;181;p25"/>
+          <p:cNvPr id="201" name="Google Shape;201;p27"/>
           <p:cNvSpPr txBox="1"/>
           <p:nvPr/>
         </p:nvSpPr>
@@ -16487,7 +17444,7 @@
       </p:sp>
       <p:sp>
         <p:nvSpPr>
-          <p:cNvPr id="182" name="Google Shape;182;p25"/>
+          <p:cNvPr id="202" name="Google Shape;202;p27"/>
           <p:cNvSpPr txBox="1"/>
           <p:nvPr/>
         </p:nvSpPr>
@@ -16586,7 +17543,7 @@
       </p:sp>
       <p:pic>
         <p:nvPicPr>
-          <p:cNvPr id="183" name="Google Shape;183;p25"/>
+          <p:cNvPr id="203" name="Google Shape;203;p27"/>
           <p:cNvPicPr preferRelativeResize="0"/>
           <p:nvPr/>
         </p:nvPicPr>
@@ -16619,7 +17576,7 @@
       </p:pic>
       <p:pic>
         <p:nvPicPr>
-          <p:cNvPr id="184" name="Google Shape;184;p25"/>
+          <p:cNvPr id="204" name="Google Shape;204;p27"/>
           <p:cNvPicPr preferRelativeResize="0"/>
           <p:nvPr/>
         </p:nvPicPr>
@@ -16652,7 +17609,7 @@
       </p:pic>
       <p:pic>
         <p:nvPicPr>
-          <p:cNvPr id="185" name="Google Shape;185;p25"/>
+          <p:cNvPr id="205" name="Google Shape;205;p27"/>
           <p:cNvPicPr preferRelativeResize="0"/>
           <p:nvPr/>
         </p:nvPicPr>
@@ -16691,12 +17648,12 @@
 </p:sld>
 </file>
 
-<file path=ppt/slides/slide14.xml><?xml version="1.0" encoding="utf-8"?>
+<file path=ppt/slides/slide16.xml><?xml version="1.0" encoding="utf-8"?>
 <p:sld xmlns:a="http://schemas.openxmlformats.org/drawingml/2006/main" xmlns:r="http://schemas.openxmlformats.org/officeDocument/2006/relationships" xmlns:p="http://schemas.openxmlformats.org/presentationml/2006/main">
   <p:cSld>
     <p:spTree>
       <p:nvGrpSpPr>
-        <p:cNvPr id="1" name="Shape 189"/>
+        <p:cNvPr id="1" name="Shape 209"/>
         <p:cNvGrpSpPr/>
         <p:nvPr/>
       </p:nvGrpSpPr>
@@ -16710,7 +17667,7 @@
       </p:grpSpPr>
       <p:sp>
         <p:nvSpPr>
-          <p:cNvPr id="190" name="Google Shape;190;p26"/>
+          <p:cNvPr id="210" name="Google Shape;210;p28"/>
           <p:cNvSpPr txBox="1"/>
           <p:nvPr/>
         </p:nvSpPr>
@@ -16776,7 +17733,7 @@
       </p:sp>
       <p:sp>
         <p:nvSpPr>
-          <p:cNvPr id="191" name="Google Shape;191;p26"/>
+          <p:cNvPr id="211" name="Google Shape;211;p28"/>
           <p:cNvSpPr txBox="1"/>
           <p:nvPr/>
         </p:nvSpPr>
@@ -17062,7 +18019,7 @@
       </p:sp>
       <p:sp>
         <p:nvSpPr>
-          <p:cNvPr id="192" name="Google Shape;192;p26"/>
+          <p:cNvPr id="212" name="Google Shape;212;p28"/>
           <p:cNvSpPr txBox="1"/>
           <p:nvPr/>
         </p:nvSpPr>
@@ -17586,7 +18543,7 @@
       </p:sp>
       <p:pic>
         <p:nvPicPr>
-          <p:cNvPr id="193" name="Google Shape;193;p26"/>
+          <p:cNvPr id="213" name="Google Shape;213;p28"/>
           <p:cNvPicPr preferRelativeResize="0"/>
           <p:nvPr/>
         </p:nvPicPr>
@@ -17619,12 +18576,12 @@
 </p:sld>
 </file>
 
-<file path=ppt/slides/slide15.xml><?xml version="1.0" encoding="utf-8"?>
+<file path=ppt/slides/slide17.xml><?xml version="1.0" encoding="utf-8"?>
 <p:sld xmlns:a="http://schemas.openxmlformats.org/drawingml/2006/main" xmlns:r="http://schemas.openxmlformats.org/officeDocument/2006/relationships" xmlns:p="http://schemas.openxmlformats.org/presentationml/2006/main">
   <p:cSld>
     <p:spTree>
       <p:nvGrpSpPr>
-        <p:cNvPr id="1" name="Shape 197"/>
+        <p:cNvPr id="1" name="Shape 217"/>
         <p:cNvGrpSpPr/>
         <p:nvPr/>
       </p:nvGrpSpPr>
@@ -17638,7 +18595,7 @@
       </p:grpSpPr>
       <p:sp>
         <p:nvSpPr>
-          <p:cNvPr id="198" name="Google Shape;198;p27"/>
+          <p:cNvPr id="218" name="Google Shape;218;p29"/>
           <p:cNvSpPr txBox="1"/>
           <p:nvPr/>
         </p:nvSpPr>
@@ -17704,7 +18661,7 @@
       </p:sp>
       <p:sp>
         <p:nvSpPr>
-          <p:cNvPr id="199" name="Google Shape;199;p27"/>
+          <p:cNvPr id="219" name="Google Shape;219;p29"/>
           <p:cNvSpPr txBox="1"/>
           <p:nvPr/>
         </p:nvSpPr>
@@ -17806,6 +18763,18 @@
               <a:buNone/>
             </a:pPr>
             <a:r>
+              <a:rPr lang="en" sz="1300" b="1" i="0" u="none" strike="noStrike" cap="none">
+                <a:solidFill>
+                  <a:srgbClr val="FF0000"/>
+                </a:solidFill>
+                <a:latin typeface="Calibri"/>
+                <a:ea typeface="Calibri"/>
+                <a:cs typeface="Calibri"/>
+                <a:sym typeface="Calibri"/>
+              </a:rPr>
+              <a:t>Seven Failure Points</a:t>
+            </a:r>
+            <a:r>
               <a:rPr lang="en" sz="1300" b="0" i="0" u="none" strike="noStrike" cap="none">
                 <a:solidFill>
                   <a:schemeClr val="dk1"/>
@@ -17815,7 +18784,7 @@
                 <a:cs typeface="Calibri"/>
                 <a:sym typeface="Calibri"/>
               </a:rPr>
-              <a:t>Seven Failure Points When Engineering a Retrieval Augmented Generation System</a:t>
+              <a:t> When Engineering a Retrieval Augmented Generation System</a:t>
             </a:r>
             <a:endParaRPr sz="1300" b="0" i="0" u="none" strike="noStrike" cap="none">
               <a:solidFill>
@@ -17884,7 +18853,7 @@
       </p:sp>
       <p:pic>
         <p:nvPicPr>
-          <p:cNvPr id="200" name="Google Shape;200;p27"/>
+          <p:cNvPr id="220" name="Google Shape;220;p29"/>
           <p:cNvPicPr preferRelativeResize="0"/>
           <p:nvPr/>
         </p:nvPicPr>
@@ -17917,12 +18886,12 @@
 </p:sld>
 </file>
 
-<file path=ppt/slides/slide16.xml><?xml version="1.0" encoding="utf-8"?>
+<file path=ppt/slides/slide18.xml><?xml version="1.0" encoding="utf-8"?>
 <p:sld xmlns:a="http://schemas.openxmlformats.org/drawingml/2006/main" xmlns:r="http://schemas.openxmlformats.org/officeDocument/2006/relationships" xmlns:p="http://schemas.openxmlformats.org/presentationml/2006/main">
   <p:cSld>
     <p:spTree>
       <p:nvGrpSpPr>
-        <p:cNvPr id="1" name="Shape 204"/>
+        <p:cNvPr id="1" name="Shape 224"/>
         <p:cNvGrpSpPr/>
         <p:nvPr/>
       </p:nvGrpSpPr>
@@ -17936,7 +18905,7 @@
       </p:grpSpPr>
       <p:sp>
         <p:nvSpPr>
-          <p:cNvPr id="205" name="Google Shape;205;p28"/>
+          <p:cNvPr id="225" name="Google Shape;225;p30"/>
           <p:cNvSpPr txBox="1"/>
           <p:nvPr/>
         </p:nvSpPr>
@@ -18002,7 +18971,7 @@
       </p:sp>
       <p:sp>
         <p:nvSpPr>
-          <p:cNvPr id="206" name="Google Shape;206;p28"/>
+          <p:cNvPr id="226" name="Google Shape;226;p30"/>
           <p:cNvSpPr txBox="1"/>
           <p:nvPr/>
         </p:nvSpPr>
@@ -18409,7 +19378,7 @@
       </p:sp>
       <p:sp>
         <p:nvSpPr>
-          <p:cNvPr id="207" name="Google Shape;207;p28"/>
+          <p:cNvPr id="227" name="Google Shape;227;p30"/>
           <p:cNvSpPr txBox="1"/>
           <p:nvPr/>
         </p:nvSpPr>
@@ -18939,7 +19908,7 @@
       </p:sp>
       <p:sp>
         <p:nvSpPr>
-          <p:cNvPr id="208" name="Google Shape;208;p28"/>
+          <p:cNvPr id="228" name="Google Shape;228;p30"/>
           <p:cNvSpPr txBox="1"/>
           <p:nvPr/>
         </p:nvSpPr>
@@ -19136,12 +20105,12 @@
 </p:sld>
 </file>
 
-<file path=ppt/slides/slide17.xml><?xml version="1.0" encoding="utf-8"?>
+<file path=ppt/slides/slide19.xml><?xml version="1.0" encoding="utf-8"?>
 <p:sld xmlns:a="http://schemas.openxmlformats.org/drawingml/2006/main" xmlns:r="http://schemas.openxmlformats.org/officeDocument/2006/relationships" xmlns:p="http://schemas.openxmlformats.org/presentationml/2006/main">
   <p:cSld>
     <p:spTree>
       <p:nvGrpSpPr>
-        <p:cNvPr id="1" name="Shape 212"/>
+        <p:cNvPr id="1" name="Shape 232"/>
         <p:cNvGrpSpPr/>
         <p:nvPr/>
       </p:nvGrpSpPr>
@@ -19155,7 +20124,7 @@
       </p:grpSpPr>
       <p:sp>
         <p:nvSpPr>
-          <p:cNvPr id="213" name="Google Shape;213;p29"/>
+          <p:cNvPr id="233" name="Google Shape;233;p31"/>
           <p:cNvSpPr txBox="1"/>
           <p:nvPr/>
         </p:nvSpPr>
@@ -19221,7 +20190,7 @@
       </p:sp>
       <p:sp>
         <p:nvSpPr>
-          <p:cNvPr id="214" name="Google Shape;214;p29"/>
+          <p:cNvPr id="234" name="Google Shape;234;p31"/>
           <p:cNvSpPr txBox="1"/>
           <p:nvPr/>
         </p:nvSpPr>
@@ -19795,7 +20764,7 @@
       </p:sp>
       <p:pic>
         <p:nvPicPr>
-          <p:cNvPr id="215" name="Google Shape;215;p29"/>
+          <p:cNvPr id="235" name="Google Shape;235;p31"/>
           <p:cNvPicPr preferRelativeResize="0"/>
           <p:nvPr/>
         </p:nvPicPr>
@@ -19822,7 +20791,7 @@
       </p:pic>
       <p:pic>
         <p:nvPicPr>
-          <p:cNvPr id="216" name="Google Shape;216;p29"/>
+          <p:cNvPr id="236" name="Google Shape;236;p31"/>
           <p:cNvPicPr preferRelativeResize="0"/>
           <p:nvPr/>
         </p:nvPicPr>
@@ -19849,7 +20818,7 @@
       </p:pic>
       <p:pic>
         <p:nvPicPr>
-          <p:cNvPr id="217" name="Google Shape;217;p29"/>
+          <p:cNvPr id="237" name="Google Shape;237;p31"/>
           <p:cNvPicPr preferRelativeResize="0"/>
           <p:nvPr/>
         </p:nvPicPr>
@@ -19864,719 +20833,6 @@
           <a:xfrm>
             <a:off x="6575150" y="3475575"/>
             <a:ext cx="2077800" cy="1558350"/>
-          </a:xfrm>
-          <a:prstGeom prst="rect">
-            <a:avLst/>
-          </a:prstGeom>
-          <a:noFill/>
-          <a:ln>
-            <a:noFill/>
-          </a:ln>
-        </p:spPr>
-      </p:pic>
-    </p:spTree>
-  </p:cSld>
-  <p:clrMapOvr>
-    <a:masterClrMapping/>
-  </p:clrMapOvr>
-</p:sld>
-</file>
-
-<file path=ppt/slides/slide18.xml><?xml version="1.0" encoding="utf-8"?>
-<p:sld xmlns:a="http://schemas.openxmlformats.org/drawingml/2006/main" xmlns:r="http://schemas.openxmlformats.org/officeDocument/2006/relationships" xmlns:p="http://schemas.openxmlformats.org/presentationml/2006/main">
-  <p:cSld>
-    <p:spTree>
-      <p:nvGrpSpPr>
-        <p:cNvPr id="1" name="Shape 221"/>
-        <p:cNvGrpSpPr/>
-        <p:nvPr/>
-      </p:nvGrpSpPr>
-      <p:grpSpPr>
-        <a:xfrm>
-          <a:off x="0" y="0"/>
-          <a:ext cx="0" cy="0"/>
-          <a:chOff x="0" y="0"/>
-          <a:chExt cx="0" cy="0"/>
-        </a:xfrm>
-      </p:grpSpPr>
-      <p:sp>
-        <p:nvSpPr>
-          <p:cNvPr id="222" name="Google Shape;222;p30"/>
-          <p:cNvSpPr txBox="1"/>
-          <p:nvPr/>
-        </p:nvSpPr>
-        <p:spPr>
-          <a:xfrm>
-            <a:off x="72300" y="0"/>
-            <a:ext cx="4133400" cy="326400"/>
-          </a:xfrm>
-          <a:prstGeom prst="rect">
-            <a:avLst/>
-          </a:prstGeom>
-          <a:noFill/>
-          <a:ln>
-            <a:noFill/>
-          </a:ln>
-        </p:spPr>
-        <p:txBody>
-          <a:bodyPr spcFirstLastPara="1" wrap="square" lIns="9125" tIns="9125" rIns="9125" bIns="9125" anchor="t" anchorCtr="0">
-            <a:spAutoFit/>
-          </a:bodyPr>
-          <a:lstStyle/>
-          <a:p>
-            <a:pPr marL="0" marR="0" lvl="0" indent="0" algn="l" rtl="0">
-              <a:lnSpc>
-                <a:spcPct val="100000"/>
-              </a:lnSpc>
-              <a:spcBef>
-                <a:spcPts val="0"/>
-              </a:spcBef>
-              <a:spcAft>
-                <a:spcPts val="0"/>
-              </a:spcAft>
-              <a:buClr>
-                <a:schemeClr val="dk1"/>
-              </a:buClr>
-              <a:buSzPts val="1100"/>
-              <a:buFont typeface="Arial"/>
-              <a:buNone/>
-            </a:pPr>
-            <a:r>
-              <a:rPr lang="en" sz="2000" b="1" i="0" u="none" strike="noStrike" cap="none">
-                <a:solidFill>
-                  <a:schemeClr val="dk1"/>
-                </a:solidFill>
-                <a:latin typeface="Calibri"/>
-                <a:ea typeface="Calibri"/>
-                <a:cs typeface="Calibri"/>
-                <a:sym typeface="Calibri"/>
-              </a:rPr>
-              <a:t>MLC LLM</a:t>
-            </a:r>
-            <a:endParaRPr sz="2000" b="1" i="0" u="none" strike="noStrike" cap="none">
-              <a:solidFill>
-                <a:schemeClr val="dk1"/>
-              </a:solidFill>
-              <a:latin typeface="Calibri"/>
-              <a:ea typeface="Calibri"/>
-              <a:cs typeface="Calibri"/>
-              <a:sym typeface="Calibri"/>
-            </a:endParaRPr>
-          </a:p>
-        </p:txBody>
-      </p:sp>
-      <p:sp>
-        <p:nvSpPr>
-          <p:cNvPr id="223" name="Google Shape;223;p30"/>
-          <p:cNvSpPr txBox="1"/>
-          <p:nvPr/>
-        </p:nvSpPr>
-        <p:spPr>
-          <a:xfrm>
-            <a:off x="72300" y="397425"/>
-            <a:ext cx="4381500" cy="2385900"/>
-          </a:xfrm>
-          <a:prstGeom prst="rect">
-            <a:avLst/>
-          </a:prstGeom>
-          <a:solidFill>
-            <a:srgbClr val="FFF2CC"/>
-          </a:solidFill>
-          <a:ln w="9525" cap="flat" cmpd="sng">
-            <a:solidFill>
-              <a:srgbClr val="FF0000"/>
-            </a:solidFill>
-            <a:prstDash val="solid"/>
-            <a:round/>
-            <a:headEnd type="none" w="sm" len="sm"/>
-            <a:tailEnd type="none" w="sm" len="sm"/>
-          </a:ln>
-        </p:spPr>
-        <p:txBody>
-          <a:bodyPr spcFirstLastPara="1" wrap="square" lIns="91425" tIns="91425" rIns="91425" bIns="91425" anchor="t" anchorCtr="0">
-            <a:spAutoFit/>
-          </a:bodyPr>
-          <a:lstStyle/>
-          <a:p>
-            <a:pPr marL="0" marR="0" lvl="0" indent="0" algn="l" rtl="0">
-              <a:lnSpc>
-                <a:spcPct val="100000"/>
-              </a:lnSpc>
-              <a:spcBef>
-                <a:spcPts val="0"/>
-              </a:spcBef>
-              <a:spcAft>
-                <a:spcPts val="0"/>
-              </a:spcAft>
-              <a:buClr>
-                <a:schemeClr val="dk1"/>
-              </a:buClr>
-              <a:buSzPts val="1100"/>
-              <a:buFont typeface="Arial"/>
-              <a:buNone/>
-            </a:pPr>
-            <a:r>
-              <a:rPr lang="en" sz="1300" b="0" i="0" u="none" strike="noStrike" cap="none">
-                <a:solidFill>
-                  <a:schemeClr val="dk1"/>
-                </a:solidFill>
-                <a:latin typeface="Calibri"/>
-                <a:ea typeface="Calibri"/>
-                <a:cs typeface="Calibri"/>
-                <a:sym typeface="Calibri"/>
-              </a:rPr>
-              <a:t>Machine Learning Compilation for Large Language Models (MLC LLM) - </a:t>
-            </a:r>
-            <a:r>
-              <a:rPr lang="en" sz="1300" b="0" i="0" u="sng" strike="noStrike" cap="none">
-                <a:solidFill>
-                  <a:schemeClr val="hlink"/>
-                </a:solidFill>
-                <a:latin typeface="Calibri"/>
-                <a:ea typeface="Calibri"/>
-                <a:cs typeface="Calibri"/>
-                <a:sym typeface="Calibri"/>
-                <a:hlinkClick r:id="rId3"/>
-              </a:rPr>
-              <a:t>https://github.com/mlc-ai/mlc-llm</a:t>
-            </a:r>
-            <a:endParaRPr sz="1300" b="0" i="0" u="none" strike="noStrike" cap="none">
-              <a:solidFill>
-                <a:srgbClr val="000000"/>
-              </a:solidFill>
-              <a:latin typeface="Calibri"/>
-              <a:ea typeface="Calibri"/>
-              <a:cs typeface="Calibri"/>
-              <a:sym typeface="Calibri"/>
-            </a:endParaRPr>
-          </a:p>
-          <a:p>
-            <a:pPr marL="0" marR="0" lvl="0" indent="0" algn="l" rtl="0">
-              <a:lnSpc>
-                <a:spcPct val="100000"/>
-              </a:lnSpc>
-              <a:spcBef>
-                <a:spcPts val="0"/>
-              </a:spcBef>
-              <a:spcAft>
-                <a:spcPts val="0"/>
-              </a:spcAft>
-              <a:buClr>
-                <a:schemeClr val="dk1"/>
-              </a:buClr>
-              <a:buSzPts val="1100"/>
-              <a:buFont typeface="Arial"/>
-              <a:buNone/>
-            </a:pPr>
-            <a:r>
-              <a:rPr lang="en" sz="1300" b="0" i="0" u="sng" strike="noStrike" cap="none">
-                <a:solidFill>
-                  <a:schemeClr val="hlink"/>
-                </a:solidFill>
-                <a:latin typeface="Calibri"/>
-                <a:ea typeface="Calibri"/>
-                <a:cs typeface="Calibri"/>
-                <a:sym typeface="Calibri"/>
-                <a:hlinkClick r:id="rId4"/>
-              </a:rPr>
-              <a:t>https://llm.mlc.ai</a:t>
-            </a:r>
-            <a:endParaRPr sz="1300" b="0" i="0" u="none" strike="noStrike" cap="none">
-              <a:solidFill>
-                <a:srgbClr val="000000"/>
-              </a:solidFill>
-              <a:latin typeface="Calibri"/>
-              <a:ea typeface="Calibri"/>
-              <a:cs typeface="Calibri"/>
-              <a:sym typeface="Calibri"/>
-            </a:endParaRPr>
-          </a:p>
-          <a:p>
-            <a:pPr marL="0" marR="0" lvl="0" indent="0" algn="l" rtl="0">
-              <a:lnSpc>
-                <a:spcPct val="100000"/>
-              </a:lnSpc>
-              <a:spcBef>
-                <a:spcPts val="0"/>
-              </a:spcBef>
-              <a:spcAft>
-                <a:spcPts val="0"/>
-              </a:spcAft>
-              <a:buClr>
-                <a:schemeClr val="dk1"/>
-              </a:buClr>
-              <a:buSzPts val="1100"/>
-              <a:buFont typeface="Arial"/>
-              <a:buNone/>
-            </a:pPr>
-            <a:endParaRPr sz="1300" b="0" i="0" u="none" strike="noStrike" cap="none">
-              <a:solidFill>
-                <a:srgbClr val="000000"/>
-              </a:solidFill>
-              <a:latin typeface="Calibri"/>
-              <a:ea typeface="Calibri"/>
-              <a:cs typeface="Calibri"/>
-              <a:sym typeface="Calibri"/>
-            </a:endParaRPr>
-          </a:p>
-          <a:p>
-            <a:pPr marL="0" marR="0" lvl="0" indent="0" algn="l" rtl="0">
-              <a:lnSpc>
-                <a:spcPct val="100000"/>
-              </a:lnSpc>
-              <a:spcBef>
-                <a:spcPts val="0"/>
-              </a:spcBef>
-              <a:spcAft>
-                <a:spcPts val="0"/>
-              </a:spcAft>
-              <a:buClr>
-                <a:schemeClr val="dk1"/>
-              </a:buClr>
-              <a:buSzPts val="1100"/>
-              <a:buFont typeface="Arial"/>
-              <a:buNone/>
-            </a:pPr>
-            <a:r>
-              <a:rPr lang="en" sz="1300" b="0" i="0" u="none" strike="noStrike" cap="none">
-                <a:solidFill>
-                  <a:srgbClr val="000000"/>
-                </a:solidFill>
-                <a:latin typeface="Calibri"/>
-                <a:ea typeface="Calibri"/>
-                <a:cs typeface="Calibri"/>
-                <a:sym typeface="Calibri"/>
-              </a:rPr>
-              <a:t>MLC LLM is a high-performance universal deployment solution that allows native deployment of any LLM with native APIs with compiler acceleration. </a:t>
-            </a:r>
-            <a:endParaRPr sz="1300" b="0" i="0" u="none" strike="noStrike" cap="none">
-              <a:solidFill>
-                <a:srgbClr val="000000"/>
-              </a:solidFill>
-              <a:latin typeface="Calibri"/>
-              <a:ea typeface="Calibri"/>
-              <a:cs typeface="Calibri"/>
-              <a:sym typeface="Calibri"/>
-            </a:endParaRPr>
-          </a:p>
-          <a:p>
-            <a:pPr marL="0" marR="0" lvl="0" indent="0" algn="l" rtl="0">
-              <a:lnSpc>
-                <a:spcPct val="100000"/>
-              </a:lnSpc>
-              <a:spcBef>
-                <a:spcPts val="0"/>
-              </a:spcBef>
-              <a:spcAft>
-                <a:spcPts val="0"/>
-              </a:spcAft>
-              <a:buClr>
-                <a:schemeClr val="dk1"/>
-              </a:buClr>
-              <a:buSzPts val="1100"/>
-              <a:buFont typeface="Arial"/>
-              <a:buNone/>
-            </a:pPr>
-            <a:endParaRPr sz="1300" b="0" i="0" u="none" strike="noStrike" cap="none">
-              <a:solidFill>
-                <a:srgbClr val="000000"/>
-              </a:solidFill>
-              <a:latin typeface="Calibri"/>
-              <a:ea typeface="Calibri"/>
-              <a:cs typeface="Calibri"/>
-              <a:sym typeface="Calibri"/>
-            </a:endParaRPr>
-          </a:p>
-          <a:p>
-            <a:pPr marL="0" marR="0" lvl="0" indent="0" algn="l" rtl="0">
-              <a:lnSpc>
-                <a:spcPct val="100000"/>
-              </a:lnSpc>
-              <a:spcBef>
-                <a:spcPts val="0"/>
-              </a:spcBef>
-              <a:spcAft>
-                <a:spcPts val="0"/>
-              </a:spcAft>
-              <a:buClr>
-                <a:schemeClr val="dk1"/>
-              </a:buClr>
-              <a:buSzPts val="1100"/>
-              <a:buFont typeface="Arial"/>
-              <a:buNone/>
-            </a:pPr>
-            <a:r>
-              <a:rPr lang="en" sz="1300" b="0" i="0" u="none" strike="noStrike" cap="none">
-                <a:solidFill>
-                  <a:srgbClr val="000000"/>
-                </a:solidFill>
-                <a:latin typeface="Calibri"/>
-                <a:ea typeface="Calibri"/>
-                <a:cs typeface="Calibri"/>
-                <a:sym typeface="Calibri"/>
-              </a:rPr>
-              <a:t>The mission of this project is to enable everyone to develop, optimize and deploy AI models natively on everyone's devices with ML compilation techniques.</a:t>
-            </a:r>
-            <a:endParaRPr sz="1300" b="0" i="0" u="none" strike="noStrike" cap="none">
-              <a:solidFill>
-                <a:srgbClr val="000000"/>
-              </a:solidFill>
-              <a:latin typeface="Calibri"/>
-              <a:ea typeface="Calibri"/>
-              <a:cs typeface="Calibri"/>
-              <a:sym typeface="Calibri"/>
-            </a:endParaRPr>
-          </a:p>
-        </p:txBody>
-      </p:sp>
-      <p:pic>
-        <p:nvPicPr>
-          <p:cNvPr id="224" name="Google Shape;224;p30"/>
-          <p:cNvPicPr preferRelativeResize="0"/>
-          <p:nvPr/>
-        </p:nvPicPr>
-        <p:blipFill rotWithShape="1">
-          <a:blip r:embed="rId5">
-            <a:alphaModFix/>
-          </a:blip>
-          <a:srcRect/>
-          <a:stretch/>
-        </p:blipFill>
-        <p:spPr>
-          <a:xfrm>
-            <a:off x="39100" y="2850925"/>
-            <a:ext cx="5726726" cy="2255475"/>
-          </a:xfrm>
-          <a:prstGeom prst="rect">
-            <a:avLst/>
-          </a:prstGeom>
-          <a:noFill/>
-          <a:ln>
-            <a:noFill/>
-          </a:ln>
-        </p:spPr>
-      </p:pic>
-      <p:pic>
-        <p:nvPicPr>
-          <p:cNvPr id="225" name="Google Shape;225;p30"/>
-          <p:cNvPicPr preferRelativeResize="0"/>
-          <p:nvPr/>
-        </p:nvPicPr>
-        <p:blipFill rotWithShape="1">
-          <a:blip r:embed="rId6">
-            <a:alphaModFix/>
-          </a:blip>
-          <a:srcRect/>
-          <a:stretch/>
-        </p:blipFill>
-        <p:spPr>
-          <a:xfrm>
-            <a:off x="6785275" y="-7"/>
-            <a:ext cx="2358724" cy="769725"/>
-          </a:xfrm>
-          <a:prstGeom prst="rect">
-            <a:avLst/>
-          </a:prstGeom>
-          <a:noFill/>
-          <a:ln>
-            <a:noFill/>
-          </a:ln>
-        </p:spPr>
-      </p:pic>
-    </p:spTree>
-  </p:cSld>
-  <p:clrMapOvr>
-    <a:masterClrMapping/>
-  </p:clrMapOvr>
-</p:sld>
-</file>
-
-<file path=ppt/slides/slide19.xml><?xml version="1.0" encoding="utf-8"?>
-<p:sld xmlns:a="http://schemas.openxmlformats.org/drawingml/2006/main" xmlns:r="http://schemas.openxmlformats.org/officeDocument/2006/relationships" xmlns:p="http://schemas.openxmlformats.org/presentationml/2006/main">
-  <p:cSld>
-    <p:spTree>
-      <p:nvGrpSpPr>
-        <p:cNvPr id="1" name="Shape 229"/>
-        <p:cNvGrpSpPr/>
-        <p:nvPr/>
-      </p:nvGrpSpPr>
-      <p:grpSpPr>
-        <a:xfrm>
-          <a:off x="0" y="0"/>
-          <a:ext cx="0" cy="0"/>
-          <a:chOff x="0" y="0"/>
-          <a:chExt cx="0" cy="0"/>
-        </a:xfrm>
-      </p:grpSpPr>
-      <p:sp>
-        <p:nvSpPr>
-          <p:cNvPr id="230" name="Google Shape;230;p31"/>
-          <p:cNvSpPr txBox="1"/>
-          <p:nvPr/>
-        </p:nvSpPr>
-        <p:spPr>
-          <a:xfrm>
-            <a:off x="72300" y="0"/>
-            <a:ext cx="3651300" cy="326400"/>
-          </a:xfrm>
-          <a:prstGeom prst="rect">
-            <a:avLst/>
-          </a:prstGeom>
-          <a:noFill/>
-          <a:ln>
-            <a:noFill/>
-          </a:ln>
-        </p:spPr>
-        <p:txBody>
-          <a:bodyPr spcFirstLastPara="1" wrap="square" lIns="9125" tIns="9125" rIns="9125" bIns="9125" anchor="t" anchorCtr="0">
-            <a:spAutoFit/>
-          </a:bodyPr>
-          <a:lstStyle/>
-          <a:p>
-            <a:pPr marL="0" marR="0" lvl="0" indent="0" algn="l" rtl="0">
-              <a:lnSpc>
-                <a:spcPct val="100000"/>
-              </a:lnSpc>
-              <a:spcBef>
-                <a:spcPts val="0"/>
-              </a:spcBef>
-              <a:spcAft>
-                <a:spcPts val="0"/>
-              </a:spcAft>
-              <a:buClr>
-                <a:srgbClr val="000000"/>
-              </a:buClr>
-              <a:buSzPts val="2000"/>
-              <a:buFont typeface="Arial"/>
-              <a:buNone/>
-            </a:pPr>
-            <a:r>
-              <a:rPr lang="en" sz="2000" b="1">
-                <a:solidFill>
-                  <a:schemeClr val="dk1"/>
-                </a:solidFill>
-                <a:latin typeface="Calibri"/>
-                <a:ea typeface="Calibri"/>
-                <a:cs typeface="Calibri"/>
-                <a:sym typeface="Calibri"/>
-              </a:rPr>
-              <a:t>Figure 01 - Breakthrough</a:t>
-            </a:r>
-            <a:endParaRPr sz="2000" b="1" i="0" u="none" strike="noStrike" cap="none">
-              <a:solidFill>
-                <a:srgbClr val="000000"/>
-              </a:solidFill>
-              <a:latin typeface="Calibri"/>
-              <a:ea typeface="Calibri"/>
-              <a:cs typeface="Calibri"/>
-              <a:sym typeface="Calibri"/>
-            </a:endParaRPr>
-          </a:p>
-        </p:txBody>
-      </p:sp>
-      <p:sp>
-        <p:nvSpPr>
-          <p:cNvPr id="231" name="Google Shape;231;p31"/>
-          <p:cNvSpPr txBox="1"/>
-          <p:nvPr/>
-        </p:nvSpPr>
-        <p:spPr>
-          <a:xfrm>
-            <a:off x="72300" y="553750"/>
-            <a:ext cx="4133400" cy="692700"/>
-          </a:xfrm>
-          <a:prstGeom prst="rect">
-            <a:avLst/>
-          </a:prstGeom>
-          <a:solidFill>
-            <a:srgbClr val="FFF2CC"/>
-          </a:solidFill>
-          <a:ln w="9525" cap="flat" cmpd="sng">
-            <a:solidFill>
-              <a:srgbClr val="FF0000"/>
-            </a:solidFill>
-            <a:prstDash val="solid"/>
-            <a:round/>
-            <a:headEnd type="none" w="sm" len="sm"/>
-            <a:tailEnd type="none" w="sm" len="sm"/>
-          </a:ln>
-        </p:spPr>
-        <p:txBody>
-          <a:bodyPr spcFirstLastPara="1" wrap="square" lIns="91425" tIns="91425" rIns="91425" bIns="91425" anchor="t" anchorCtr="0">
-            <a:spAutoFit/>
-          </a:bodyPr>
-          <a:lstStyle/>
-          <a:p>
-            <a:pPr marL="0" marR="0" lvl="0" indent="0" algn="l" rtl="0">
-              <a:lnSpc>
-                <a:spcPct val="100000"/>
-              </a:lnSpc>
-              <a:spcBef>
-                <a:spcPts val="0"/>
-              </a:spcBef>
-              <a:spcAft>
-                <a:spcPts val="0"/>
-              </a:spcAft>
-              <a:buClr>
-                <a:schemeClr val="dk1"/>
-              </a:buClr>
-              <a:buSzPts val="1100"/>
-              <a:buFont typeface="Arial"/>
-              <a:buNone/>
-            </a:pPr>
-            <a:r>
-              <a:rPr lang="en" sz="1300">
-                <a:latin typeface="Calibri"/>
-                <a:ea typeface="Calibri"/>
-                <a:cs typeface="Calibri"/>
-                <a:sym typeface="Calibri"/>
-              </a:rPr>
-              <a:t>Robot talks to you and executes commands</a:t>
-            </a:r>
-            <a:endParaRPr sz="1300">
-              <a:latin typeface="Calibri"/>
-              <a:ea typeface="Calibri"/>
-              <a:cs typeface="Calibri"/>
-              <a:sym typeface="Calibri"/>
-            </a:endParaRPr>
-          </a:p>
-          <a:p>
-            <a:pPr marL="457200" marR="0" lvl="0" indent="-292100" algn="l" rtl="0">
-              <a:lnSpc>
-                <a:spcPct val="100000"/>
-              </a:lnSpc>
-              <a:spcBef>
-                <a:spcPts val="0"/>
-              </a:spcBef>
-              <a:spcAft>
-                <a:spcPts val="0"/>
-              </a:spcAft>
-              <a:buSzPts val="1000"/>
-              <a:buFont typeface="Calibri"/>
-              <a:buChar char="●"/>
-            </a:pPr>
-            <a:r>
-              <a:rPr lang="en" sz="1000" u="sng">
-                <a:solidFill>
-                  <a:schemeClr val="hlink"/>
-                </a:solidFill>
-                <a:latin typeface="Calibri"/>
-                <a:ea typeface="Calibri"/>
-                <a:cs typeface="Calibri"/>
-                <a:sym typeface="Calibri"/>
-                <a:hlinkClick r:id="rId3"/>
-              </a:rPr>
-              <a:t>https://www.youtube.com/watch?v=Sq1QZB5baNw</a:t>
-            </a:r>
-            <a:endParaRPr sz="1000">
-              <a:latin typeface="Calibri"/>
-              <a:ea typeface="Calibri"/>
-              <a:cs typeface="Calibri"/>
-              <a:sym typeface="Calibri"/>
-            </a:endParaRPr>
-          </a:p>
-          <a:p>
-            <a:pPr marL="457200" marR="0" lvl="0" indent="-292100" algn="l" rtl="0">
-              <a:lnSpc>
-                <a:spcPct val="100000"/>
-              </a:lnSpc>
-              <a:spcBef>
-                <a:spcPts val="0"/>
-              </a:spcBef>
-              <a:spcAft>
-                <a:spcPts val="0"/>
-              </a:spcAft>
-              <a:buSzPts val="1000"/>
-              <a:buFont typeface="Calibri"/>
-              <a:buChar char="●"/>
-            </a:pPr>
-            <a:r>
-              <a:rPr lang="en" sz="1000" u="sng">
-                <a:solidFill>
-                  <a:schemeClr val="hlink"/>
-                </a:solidFill>
-                <a:latin typeface="Calibri"/>
-                <a:ea typeface="Calibri"/>
-                <a:cs typeface="Calibri"/>
-                <a:sym typeface="Calibri"/>
-                <a:hlinkClick r:id="rId4"/>
-              </a:rPr>
-              <a:t>https://www.youtube.com/watch?v=GiKvPJSOUmE</a:t>
-            </a:r>
-            <a:r>
-              <a:rPr lang="en" sz="1000">
-                <a:latin typeface="Calibri"/>
-                <a:ea typeface="Calibri"/>
-                <a:cs typeface="Calibri"/>
-                <a:sym typeface="Calibri"/>
-              </a:rPr>
-              <a:t>  </a:t>
-            </a:r>
-            <a:endParaRPr sz="1000">
-              <a:latin typeface="Calibri"/>
-              <a:ea typeface="Calibri"/>
-              <a:cs typeface="Calibri"/>
-              <a:sym typeface="Calibri"/>
-            </a:endParaRPr>
-          </a:p>
-        </p:txBody>
-      </p:sp>
-      <p:pic>
-        <p:nvPicPr>
-          <p:cNvPr id="232" name="Google Shape;232;p31"/>
-          <p:cNvPicPr preferRelativeResize="0"/>
-          <p:nvPr/>
-        </p:nvPicPr>
-        <p:blipFill>
-          <a:blip r:embed="rId5" cstate="email">
-            <a:alphaModFix/>
-            <a:extLst>
-              <a:ext uri="{28A0092B-C50C-407E-A947-70E740481C1C}">
-                <a14:useLocalDpi xmlns:a14="http://schemas.microsoft.com/office/drawing/2010/main"/>
-              </a:ext>
-            </a:extLst>
-          </a:blip>
-          <a:stretch>
-            <a:fillRect/>
-          </a:stretch>
-        </p:blipFill>
-        <p:spPr>
-          <a:xfrm>
-            <a:off x="5326821" y="102450"/>
-            <a:ext cx="3704574" cy="2258375"/>
-          </a:xfrm>
-          <a:prstGeom prst="rect">
-            <a:avLst/>
-          </a:prstGeom>
-          <a:noFill/>
-          <a:ln>
-            <a:noFill/>
-          </a:ln>
-        </p:spPr>
-      </p:pic>
-      <p:pic>
-        <p:nvPicPr>
-          <p:cNvPr id="233" name="Google Shape;233;p31"/>
-          <p:cNvPicPr preferRelativeResize="0"/>
-          <p:nvPr/>
-        </p:nvPicPr>
-        <p:blipFill>
-          <a:blip r:embed="rId6" cstate="email">
-            <a:alphaModFix/>
-            <a:extLst>
-              <a:ext uri="{28A0092B-C50C-407E-A947-70E740481C1C}">
-                <a14:useLocalDpi xmlns:a14="http://schemas.microsoft.com/office/drawing/2010/main"/>
-              </a:ext>
-            </a:extLst>
-          </a:blip>
-          <a:stretch>
-            <a:fillRect/>
-          </a:stretch>
-        </p:blipFill>
-        <p:spPr>
-          <a:xfrm>
-            <a:off x="5730250" y="2496125"/>
-            <a:ext cx="2820825" cy="1909625"/>
           </a:xfrm>
           <a:prstGeom prst="rect">
             <a:avLst/>
@@ -20664,9 +20920,21 @@
                 <a:cs typeface="Calibri"/>
                 <a:sym typeface="Calibri"/>
               </a:rPr>
-              <a:t>Cognition AI - Devin - Automating Software Engineering</a:t>
-            </a:r>
-            <a:endParaRPr sz="2000" b="1" i="0" u="none" strike="noStrike" cap="none">
+              <a:t>Cognition AI - Devin</a:t>
+            </a:r>
+            <a:r>
+              <a:rPr lang="en" sz="2000">
+                <a:solidFill>
+                  <a:schemeClr val="dk1"/>
+                </a:solidFill>
+                <a:latin typeface="Calibri"/>
+                <a:ea typeface="Calibri"/>
+                <a:cs typeface="Calibri"/>
+                <a:sym typeface="Calibri"/>
+              </a:rPr>
+              <a:t> - Automating Software Engineering</a:t>
+            </a:r>
+            <a:endParaRPr sz="2000" i="0" u="none" strike="noStrike" cap="none">
               <a:solidFill>
                 <a:schemeClr val="dk1"/>
               </a:solidFill>
@@ -20686,7 +20954,7 @@
         </p:nvSpPr>
         <p:spPr>
           <a:xfrm>
-            <a:off x="73600" y="371925"/>
+            <a:off x="73600" y="524325"/>
             <a:ext cx="4381500" cy="1293000"/>
           </a:xfrm>
           <a:prstGeom prst="rect">
@@ -21007,8 +21275,8 @@
         </p:blipFill>
         <p:spPr>
           <a:xfrm>
-            <a:off x="73588" y="1849200"/>
-            <a:ext cx="4491784" cy="3205675"/>
+            <a:off x="73600" y="1925400"/>
+            <a:ext cx="4381500" cy="3126975"/>
           </a:xfrm>
           <a:prstGeom prst="rect">
             <a:avLst/>
@@ -21027,7 +21295,7 @@
         </p:nvSpPr>
         <p:spPr>
           <a:xfrm>
-            <a:off x="4690800" y="371925"/>
+            <a:off x="4690800" y="524325"/>
             <a:ext cx="4381500" cy="554100"/>
           </a:xfrm>
           <a:prstGeom prst="rect">
@@ -21165,7 +21433,7 @@
         </p:blipFill>
         <p:spPr>
           <a:xfrm>
-            <a:off x="4929565" y="1207800"/>
+            <a:off x="5462965" y="1512600"/>
             <a:ext cx="910851" cy="1071450"/>
           </a:xfrm>
           <a:prstGeom prst="rect">
@@ -21185,7 +21453,7 @@
         </p:nvSpPr>
         <p:spPr>
           <a:xfrm>
-            <a:off x="6613675" y="2240850"/>
+            <a:off x="7147075" y="2545650"/>
             <a:ext cx="1504500" cy="569400"/>
           </a:xfrm>
           <a:prstGeom prst="rect">
@@ -21279,7 +21547,7 @@
         </p:nvSpPr>
         <p:spPr>
           <a:xfrm>
-            <a:off x="4650450" y="4329600"/>
+            <a:off x="4650450" y="4305256"/>
             <a:ext cx="4381500" cy="738900"/>
           </a:xfrm>
           <a:prstGeom prst="rect">
@@ -21401,7 +21669,7 @@
         </p:nvSpPr>
         <p:spPr>
           <a:xfrm>
-            <a:off x="4650450" y="2296913"/>
+            <a:off x="5183850" y="2601713"/>
             <a:ext cx="1504500" cy="661800"/>
           </a:xfrm>
           <a:prstGeom prst="rect">
@@ -21515,7 +21783,7 @@
         </p:blipFill>
         <p:spPr>
           <a:xfrm>
-            <a:off x="6889903" y="1199238"/>
+            <a:off x="7423303" y="1504038"/>
             <a:ext cx="910849" cy="1088575"/>
           </a:xfrm>
           <a:prstGeom prst="rect">
@@ -21540,7 +21808,7 @@
   <p:cSld>
     <p:spTree>
       <p:nvGrpSpPr>
-        <p:cNvPr id="1" name="Shape 237"/>
+        <p:cNvPr id="1" name="Shape 241"/>
         <p:cNvGrpSpPr/>
         <p:nvPr/>
       </p:nvGrpSpPr>
@@ -21554,14 +21822,14 @@
       </p:grpSpPr>
       <p:sp>
         <p:nvSpPr>
-          <p:cNvPr id="238" name="Google Shape;238;p32"/>
+          <p:cNvPr id="242" name="Google Shape;242;p32"/>
           <p:cNvSpPr txBox="1"/>
           <p:nvPr/>
         </p:nvSpPr>
         <p:spPr>
           <a:xfrm>
             <a:off x="72300" y="0"/>
-            <a:ext cx="3651300" cy="326400"/>
+            <a:ext cx="4133400" cy="326400"/>
           </a:xfrm>
           <a:prstGeom prst="rect">
             <a:avLst/>
@@ -21588,9 +21856,9 @@
                 <a:spcPts val="0"/>
               </a:spcAft>
               <a:buClr>
-                <a:srgbClr val="000000"/>
-              </a:buClr>
-              <a:buSzPts val="2000"/>
+                <a:schemeClr val="dk1"/>
+              </a:buClr>
+              <a:buSzPts val="1100"/>
               <a:buFont typeface="Arial"/>
               <a:buNone/>
             </a:pPr>
@@ -21604,11 +21872,11 @@
                 <a:cs typeface="Calibri"/>
                 <a:sym typeface="Calibri"/>
               </a:rPr>
-              <a:t>RAG, Embeddings, ...</a:t>
+              <a:t>MLC LLM</a:t>
             </a:r>
             <a:endParaRPr sz="2000" b="1" i="0" u="none" strike="noStrike" cap="none">
               <a:solidFill>
-                <a:srgbClr val="000000"/>
+                <a:schemeClr val="dk1"/>
               </a:solidFill>
               <a:latin typeface="Calibri"/>
               <a:ea typeface="Calibri"/>
@@ -21620,14 +21888,14 @@
       </p:sp>
       <p:sp>
         <p:nvSpPr>
-          <p:cNvPr id="239" name="Google Shape;239;p32"/>
+          <p:cNvPr id="243" name="Google Shape;243;p32"/>
           <p:cNvSpPr txBox="1"/>
           <p:nvPr/>
         </p:nvSpPr>
         <p:spPr>
           <a:xfrm>
-            <a:off x="72300" y="553750"/>
-            <a:ext cx="4133400" cy="384900"/>
+            <a:off x="72300" y="397425"/>
+            <a:ext cx="4381500" cy="2385900"/>
           </a:xfrm>
           <a:prstGeom prst="rect">
             <a:avLst/>
@@ -21671,14 +21939,27 @@
             <a:r>
               <a:rPr lang="en" sz="1300" b="0" i="0" u="none" strike="noStrike" cap="none">
                 <a:solidFill>
-                  <a:srgbClr val="000000"/>
-                </a:solidFill>
-                <a:latin typeface="Calibri"/>
-                <a:ea typeface="Calibri"/>
-                <a:cs typeface="Calibri"/>
-                <a:sym typeface="Calibri"/>
-              </a:rPr>
-              <a:t>RAG - from Sander</a:t>
+                  <a:schemeClr val="dk1"/>
+                </a:solidFill>
+                <a:latin typeface="Calibri"/>
+                <a:ea typeface="Calibri"/>
+                <a:cs typeface="Calibri"/>
+                <a:sym typeface="Calibri"/>
+              </a:rPr>
+              <a:t>Machine Learning Compilation for Large Language Models (MLC LLM) - </a:t>
+            </a:r>
+            <a:r>
+              <a:rPr lang="en" sz="1300" b="0" i="0" u="sng" strike="noStrike" cap="none">
+                <a:solidFill>
+                  <a:schemeClr val="hlink"/>
+                </a:solidFill>
+                <a:latin typeface="Calibri"/>
+                <a:ea typeface="Calibri"/>
+                <a:cs typeface="Calibri"/>
+                <a:sym typeface="Calibri"/>
+                <a:hlinkClick r:id="rId3"/>
+              </a:rPr>
+              <a:t>https://github.com/mlc-ai/mlc-llm</a:t>
             </a:r>
             <a:endParaRPr sz="1300" b="0" i="0" u="none" strike="noStrike" cap="none">
               <a:solidFill>
@@ -21690,11 +21971,637 @@
               <a:sym typeface="Calibri"/>
             </a:endParaRPr>
           </a:p>
+          <a:p>
+            <a:pPr marL="0" marR="0" lvl="0" indent="0" algn="l" rtl="0">
+              <a:lnSpc>
+                <a:spcPct val="100000"/>
+              </a:lnSpc>
+              <a:spcBef>
+                <a:spcPts val="0"/>
+              </a:spcBef>
+              <a:spcAft>
+                <a:spcPts val="0"/>
+              </a:spcAft>
+              <a:buClr>
+                <a:schemeClr val="dk1"/>
+              </a:buClr>
+              <a:buSzPts val="1100"/>
+              <a:buFont typeface="Arial"/>
+              <a:buNone/>
+            </a:pPr>
+            <a:r>
+              <a:rPr lang="en" sz="1300" b="0" i="0" u="sng" strike="noStrike" cap="none">
+                <a:solidFill>
+                  <a:schemeClr val="hlink"/>
+                </a:solidFill>
+                <a:latin typeface="Calibri"/>
+                <a:ea typeface="Calibri"/>
+                <a:cs typeface="Calibri"/>
+                <a:sym typeface="Calibri"/>
+                <a:hlinkClick r:id="rId4"/>
+              </a:rPr>
+              <a:t>https://llm.mlc.ai</a:t>
+            </a:r>
+            <a:endParaRPr sz="1300" b="0" i="0" u="none" strike="noStrike" cap="none">
+              <a:solidFill>
+                <a:srgbClr val="000000"/>
+              </a:solidFill>
+              <a:latin typeface="Calibri"/>
+              <a:ea typeface="Calibri"/>
+              <a:cs typeface="Calibri"/>
+              <a:sym typeface="Calibri"/>
+            </a:endParaRPr>
+          </a:p>
+          <a:p>
+            <a:pPr marL="0" marR="0" lvl="0" indent="0" algn="l" rtl="0">
+              <a:lnSpc>
+                <a:spcPct val="100000"/>
+              </a:lnSpc>
+              <a:spcBef>
+                <a:spcPts val="0"/>
+              </a:spcBef>
+              <a:spcAft>
+                <a:spcPts val="0"/>
+              </a:spcAft>
+              <a:buClr>
+                <a:schemeClr val="dk1"/>
+              </a:buClr>
+              <a:buSzPts val="1100"/>
+              <a:buFont typeface="Arial"/>
+              <a:buNone/>
+            </a:pPr>
+            <a:endParaRPr sz="1300" b="0" i="0" u="none" strike="noStrike" cap="none">
+              <a:solidFill>
+                <a:srgbClr val="000000"/>
+              </a:solidFill>
+              <a:latin typeface="Calibri"/>
+              <a:ea typeface="Calibri"/>
+              <a:cs typeface="Calibri"/>
+              <a:sym typeface="Calibri"/>
+            </a:endParaRPr>
+          </a:p>
+          <a:p>
+            <a:pPr marL="0" marR="0" lvl="0" indent="0" algn="l" rtl="0">
+              <a:lnSpc>
+                <a:spcPct val="100000"/>
+              </a:lnSpc>
+              <a:spcBef>
+                <a:spcPts val="0"/>
+              </a:spcBef>
+              <a:spcAft>
+                <a:spcPts val="0"/>
+              </a:spcAft>
+              <a:buClr>
+                <a:schemeClr val="dk1"/>
+              </a:buClr>
+              <a:buSzPts val="1100"/>
+              <a:buFont typeface="Arial"/>
+              <a:buNone/>
+            </a:pPr>
+            <a:r>
+              <a:rPr lang="en" sz="1300" b="0" i="0" u="none" strike="noStrike" cap="none">
+                <a:solidFill>
+                  <a:srgbClr val="000000"/>
+                </a:solidFill>
+                <a:latin typeface="Calibri"/>
+                <a:ea typeface="Calibri"/>
+                <a:cs typeface="Calibri"/>
+                <a:sym typeface="Calibri"/>
+              </a:rPr>
+              <a:t>MLC LLM is a high-performance universal deployment solution that allows native deployment of any LLM with native APIs with compiler acceleration. </a:t>
+            </a:r>
+            <a:endParaRPr sz="1300" b="0" i="0" u="none" strike="noStrike" cap="none">
+              <a:solidFill>
+                <a:srgbClr val="000000"/>
+              </a:solidFill>
+              <a:latin typeface="Calibri"/>
+              <a:ea typeface="Calibri"/>
+              <a:cs typeface="Calibri"/>
+              <a:sym typeface="Calibri"/>
+            </a:endParaRPr>
+          </a:p>
+          <a:p>
+            <a:pPr marL="0" marR="0" lvl="0" indent="0" algn="l" rtl="0">
+              <a:lnSpc>
+                <a:spcPct val="100000"/>
+              </a:lnSpc>
+              <a:spcBef>
+                <a:spcPts val="0"/>
+              </a:spcBef>
+              <a:spcAft>
+                <a:spcPts val="0"/>
+              </a:spcAft>
+              <a:buClr>
+                <a:schemeClr val="dk1"/>
+              </a:buClr>
+              <a:buSzPts val="1100"/>
+              <a:buFont typeface="Arial"/>
+              <a:buNone/>
+            </a:pPr>
+            <a:endParaRPr sz="1300" b="0" i="0" u="none" strike="noStrike" cap="none">
+              <a:solidFill>
+                <a:srgbClr val="000000"/>
+              </a:solidFill>
+              <a:latin typeface="Calibri"/>
+              <a:ea typeface="Calibri"/>
+              <a:cs typeface="Calibri"/>
+              <a:sym typeface="Calibri"/>
+            </a:endParaRPr>
+          </a:p>
+          <a:p>
+            <a:pPr marL="0" marR="0" lvl="0" indent="0" algn="l" rtl="0">
+              <a:lnSpc>
+                <a:spcPct val="100000"/>
+              </a:lnSpc>
+              <a:spcBef>
+                <a:spcPts val="0"/>
+              </a:spcBef>
+              <a:spcAft>
+                <a:spcPts val="0"/>
+              </a:spcAft>
+              <a:buClr>
+                <a:schemeClr val="dk1"/>
+              </a:buClr>
+              <a:buSzPts val="1100"/>
+              <a:buFont typeface="Arial"/>
+              <a:buNone/>
+            </a:pPr>
+            <a:r>
+              <a:rPr lang="en" sz="1300" b="0" i="0" u="none" strike="noStrike" cap="none">
+                <a:solidFill>
+                  <a:srgbClr val="000000"/>
+                </a:solidFill>
+                <a:latin typeface="Calibri"/>
+                <a:ea typeface="Calibri"/>
+                <a:cs typeface="Calibri"/>
+                <a:sym typeface="Calibri"/>
+              </a:rPr>
+              <a:t>The mission of this project is to enable everyone to develop, optimize and deploy AI models natively on everyone's devices with ML compilation techniques.</a:t>
+            </a:r>
+            <a:endParaRPr sz="1300" b="0" i="0" u="none" strike="noStrike" cap="none">
+              <a:solidFill>
+                <a:srgbClr val="000000"/>
+              </a:solidFill>
+              <a:latin typeface="Calibri"/>
+              <a:ea typeface="Calibri"/>
+              <a:cs typeface="Calibri"/>
+              <a:sym typeface="Calibri"/>
+            </a:endParaRPr>
+          </a:p>
         </p:txBody>
       </p:sp>
       <p:pic>
         <p:nvPicPr>
-          <p:cNvPr id="240" name="Google Shape;240;p32"/>
+          <p:cNvPr id="244" name="Google Shape;244;p32"/>
+          <p:cNvPicPr preferRelativeResize="0"/>
+          <p:nvPr/>
+        </p:nvPicPr>
+        <p:blipFill rotWithShape="1">
+          <a:blip r:embed="rId5">
+            <a:alphaModFix/>
+          </a:blip>
+          <a:srcRect/>
+          <a:stretch/>
+        </p:blipFill>
+        <p:spPr>
+          <a:xfrm>
+            <a:off x="39100" y="2850925"/>
+            <a:ext cx="5726726" cy="2255475"/>
+          </a:xfrm>
+          <a:prstGeom prst="rect">
+            <a:avLst/>
+          </a:prstGeom>
+          <a:noFill/>
+          <a:ln>
+            <a:noFill/>
+          </a:ln>
+        </p:spPr>
+      </p:pic>
+      <p:pic>
+        <p:nvPicPr>
+          <p:cNvPr id="245" name="Google Shape;245;p32"/>
+          <p:cNvPicPr preferRelativeResize="0"/>
+          <p:nvPr/>
+        </p:nvPicPr>
+        <p:blipFill rotWithShape="1">
+          <a:blip r:embed="rId6">
+            <a:alphaModFix/>
+          </a:blip>
+          <a:srcRect/>
+          <a:stretch/>
+        </p:blipFill>
+        <p:spPr>
+          <a:xfrm>
+            <a:off x="6785275" y="-7"/>
+            <a:ext cx="2358724" cy="769725"/>
+          </a:xfrm>
+          <a:prstGeom prst="rect">
+            <a:avLst/>
+          </a:prstGeom>
+          <a:noFill/>
+          <a:ln>
+            <a:noFill/>
+          </a:ln>
+        </p:spPr>
+      </p:pic>
+    </p:spTree>
+  </p:cSld>
+  <p:clrMapOvr>
+    <a:masterClrMapping/>
+  </p:clrMapOvr>
+</p:sld>
+</file>
+
+<file path=ppt/slides/slide21.xml><?xml version="1.0" encoding="utf-8"?>
+<p:sld xmlns:a="http://schemas.openxmlformats.org/drawingml/2006/main" xmlns:r="http://schemas.openxmlformats.org/officeDocument/2006/relationships" xmlns:p="http://schemas.openxmlformats.org/presentationml/2006/main">
+  <p:cSld>
+    <p:spTree>
+      <p:nvGrpSpPr>
+        <p:cNvPr id="1" name="Shape 249"/>
+        <p:cNvGrpSpPr/>
+        <p:nvPr/>
+      </p:nvGrpSpPr>
+      <p:grpSpPr>
+        <a:xfrm>
+          <a:off x="0" y="0"/>
+          <a:ext cx="0" cy="0"/>
+          <a:chOff x="0" y="0"/>
+          <a:chExt cx="0" cy="0"/>
+        </a:xfrm>
+      </p:grpSpPr>
+      <p:sp>
+        <p:nvSpPr>
+          <p:cNvPr id="250" name="Google Shape;250;p33"/>
+          <p:cNvSpPr txBox="1"/>
+          <p:nvPr/>
+        </p:nvSpPr>
+        <p:spPr>
+          <a:xfrm>
+            <a:off x="72300" y="0"/>
+            <a:ext cx="3651300" cy="326400"/>
+          </a:xfrm>
+          <a:prstGeom prst="rect">
+            <a:avLst/>
+          </a:prstGeom>
+          <a:noFill/>
+          <a:ln>
+            <a:noFill/>
+          </a:ln>
+        </p:spPr>
+        <p:txBody>
+          <a:bodyPr spcFirstLastPara="1" wrap="square" lIns="9125" tIns="9125" rIns="9125" bIns="9125" anchor="t" anchorCtr="0">
+            <a:spAutoFit/>
+          </a:bodyPr>
+          <a:lstStyle/>
+          <a:p>
+            <a:pPr marL="0" marR="0" lvl="0" indent="0" algn="l" rtl="0">
+              <a:lnSpc>
+                <a:spcPct val="100000"/>
+              </a:lnSpc>
+              <a:spcBef>
+                <a:spcPts val="0"/>
+              </a:spcBef>
+              <a:spcAft>
+                <a:spcPts val="0"/>
+              </a:spcAft>
+              <a:buClr>
+                <a:srgbClr val="000000"/>
+              </a:buClr>
+              <a:buSzPts val="2000"/>
+              <a:buFont typeface="Arial"/>
+              <a:buNone/>
+            </a:pPr>
+            <a:r>
+              <a:rPr lang="en" sz="2000" b="1">
+                <a:solidFill>
+                  <a:schemeClr val="dk1"/>
+                </a:solidFill>
+                <a:latin typeface="Calibri"/>
+                <a:ea typeface="Calibri"/>
+                <a:cs typeface="Calibri"/>
+                <a:sym typeface="Calibri"/>
+              </a:rPr>
+              <a:t>Figure 01 - Robot Breakthrough</a:t>
+            </a:r>
+            <a:endParaRPr sz="2000" b="1" i="0" u="none" strike="noStrike" cap="none">
+              <a:solidFill>
+                <a:srgbClr val="000000"/>
+              </a:solidFill>
+              <a:latin typeface="Calibri"/>
+              <a:ea typeface="Calibri"/>
+              <a:cs typeface="Calibri"/>
+              <a:sym typeface="Calibri"/>
+            </a:endParaRPr>
+          </a:p>
+        </p:txBody>
+      </p:sp>
+      <p:sp>
+        <p:nvSpPr>
+          <p:cNvPr id="251" name="Google Shape;251;p33"/>
+          <p:cNvSpPr txBox="1"/>
+          <p:nvPr/>
+        </p:nvSpPr>
+        <p:spPr>
+          <a:xfrm>
+            <a:off x="72300" y="553750"/>
+            <a:ext cx="4133400" cy="692700"/>
+          </a:xfrm>
+          <a:prstGeom prst="rect">
+            <a:avLst/>
+          </a:prstGeom>
+          <a:solidFill>
+            <a:srgbClr val="FFF2CC"/>
+          </a:solidFill>
+          <a:ln w="9525" cap="flat" cmpd="sng">
+            <a:solidFill>
+              <a:srgbClr val="FF0000"/>
+            </a:solidFill>
+            <a:prstDash val="solid"/>
+            <a:round/>
+            <a:headEnd type="none" w="sm" len="sm"/>
+            <a:tailEnd type="none" w="sm" len="sm"/>
+          </a:ln>
+        </p:spPr>
+        <p:txBody>
+          <a:bodyPr spcFirstLastPara="1" wrap="square" lIns="91425" tIns="91425" rIns="91425" bIns="91425" anchor="t" anchorCtr="0">
+            <a:spAutoFit/>
+          </a:bodyPr>
+          <a:lstStyle/>
+          <a:p>
+            <a:pPr marL="0" marR="0" lvl="0" indent="0" algn="l" rtl="0">
+              <a:lnSpc>
+                <a:spcPct val="100000"/>
+              </a:lnSpc>
+              <a:spcBef>
+                <a:spcPts val="0"/>
+              </a:spcBef>
+              <a:spcAft>
+                <a:spcPts val="0"/>
+              </a:spcAft>
+              <a:buClr>
+                <a:schemeClr val="dk1"/>
+              </a:buClr>
+              <a:buSzPts val="1100"/>
+              <a:buFont typeface="Arial"/>
+              <a:buNone/>
+            </a:pPr>
+            <a:r>
+              <a:rPr lang="en" sz="1300">
+                <a:latin typeface="Calibri"/>
+                <a:ea typeface="Calibri"/>
+                <a:cs typeface="Calibri"/>
+                <a:sym typeface="Calibri"/>
+              </a:rPr>
+              <a:t>Robot talks to you and executes commands</a:t>
+            </a:r>
+            <a:endParaRPr sz="1300">
+              <a:latin typeface="Calibri"/>
+              <a:ea typeface="Calibri"/>
+              <a:cs typeface="Calibri"/>
+              <a:sym typeface="Calibri"/>
+            </a:endParaRPr>
+          </a:p>
+          <a:p>
+            <a:pPr marL="457200" marR="0" lvl="0" indent="-292100" algn="l" rtl="0">
+              <a:lnSpc>
+                <a:spcPct val="100000"/>
+              </a:lnSpc>
+              <a:spcBef>
+                <a:spcPts val="0"/>
+              </a:spcBef>
+              <a:spcAft>
+                <a:spcPts val="0"/>
+              </a:spcAft>
+              <a:buSzPts val="1000"/>
+              <a:buFont typeface="Calibri"/>
+              <a:buChar char="●"/>
+            </a:pPr>
+            <a:r>
+              <a:rPr lang="en" sz="1000" u="sng">
+                <a:solidFill>
+                  <a:schemeClr val="hlink"/>
+                </a:solidFill>
+                <a:latin typeface="Calibri"/>
+                <a:ea typeface="Calibri"/>
+                <a:cs typeface="Calibri"/>
+                <a:sym typeface="Calibri"/>
+                <a:hlinkClick r:id="rId3"/>
+              </a:rPr>
+              <a:t>https://www.youtube.com/watch?v=Sq1QZB5baNw</a:t>
+            </a:r>
+            <a:endParaRPr sz="1000">
+              <a:latin typeface="Calibri"/>
+              <a:ea typeface="Calibri"/>
+              <a:cs typeface="Calibri"/>
+              <a:sym typeface="Calibri"/>
+            </a:endParaRPr>
+          </a:p>
+          <a:p>
+            <a:pPr marL="457200" marR="0" lvl="0" indent="-292100" algn="l" rtl="0">
+              <a:lnSpc>
+                <a:spcPct val="100000"/>
+              </a:lnSpc>
+              <a:spcBef>
+                <a:spcPts val="0"/>
+              </a:spcBef>
+              <a:spcAft>
+                <a:spcPts val="0"/>
+              </a:spcAft>
+              <a:buSzPts val="1000"/>
+              <a:buFont typeface="Calibri"/>
+              <a:buChar char="●"/>
+            </a:pPr>
+            <a:r>
+              <a:rPr lang="en" sz="1000" u="sng">
+                <a:solidFill>
+                  <a:schemeClr val="hlink"/>
+                </a:solidFill>
+                <a:latin typeface="Calibri"/>
+                <a:ea typeface="Calibri"/>
+                <a:cs typeface="Calibri"/>
+                <a:sym typeface="Calibri"/>
+                <a:hlinkClick r:id="rId4"/>
+              </a:rPr>
+              <a:t>https://www.youtube.com/watch?v=GiKvPJSOUmE</a:t>
+            </a:r>
+            <a:r>
+              <a:rPr lang="en" sz="1000">
+                <a:latin typeface="Calibri"/>
+                <a:ea typeface="Calibri"/>
+                <a:cs typeface="Calibri"/>
+                <a:sym typeface="Calibri"/>
+              </a:rPr>
+              <a:t>  </a:t>
+            </a:r>
+            <a:endParaRPr sz="1000">
+              <a:latin typeface="Calibri"/>
+              <a:ea typeface="Calibri"/>
+              <a:cs typeface="Calibri"/>
+              <a:sym typeface="Calibri"/>
+            </a:endParaRPr>
+          </a:p>
+        </p:txBody>
+      </p:sp>
+      <p:pic>
+        <p:nvPicPr>
+          <p:cNvPr id="252" name="Google Shape;252;p33"/>
+          <p:cNvPicPr preferRelativeResize="0"/>
+          <p:nvPr/>
+        </p:nvPicPr>
+        <p:blipFill>
+          <a:blip r:embed="rId5" cstate="email">
+            <a:alphaModFix/>
+            <a:extLst>
+              <a:ext uri="{28A0092B-C50C-407E-A947-70E740481C1C}">
+                <a14:useLocalDpi xmlns:a14="http://schemas.microsoft.com/office/drawing/2010/main"/>
+              </a:ext>
+            </a:extLst>
+          </a:blip>
+          <a:stretch>
+            <a:fillRect/>
+          </a:stretch>
+        </p:blipFill>
+        <p:spPr>
+          <a:xfrm>
+            <a:off x="5326821" y="102450"/>
+            <a:ext cx="3704574" cy="2258375"/>
+          </a:xfrm>
+          <a:prstGeom prst="rect">
+            <a:avLst/>
+          </a:prstGeom>
+          <a:noFill/>
+          <a:ln>
+            <a:noFill/>
+          </a:ln>
+        </p:spPr>
+      </p:pic>
+      <p:pic>
+        <p:nvPicPr>
+          <p:cNvPr id="253" name="Google Shape;253;p33"/>
+          <p:cNvPicPr preferRelativeResize="0"/>
+          <p:nvPr/>
+        </p:nvPicPr>
+        <p:blipFill>
+          <a:blip r:embed="rId6" cstate="email">
+            <a:alphaModFix/>
+            <a:extLst>
+              <a:ext uri="{28A0092B-C50C-407E-A947-70E740481C1C}">
+                <a14:useLocalDpi xmlns:a14="http://schemas.microsoft.com/office/drawing/2010/main"/>
+              </a:ext>
+            </a:extLst>
+          </a:blip>
+          <a:stretch>
+            <a:fillRect/>
+          </a:stretch>
+        </p:blipFill>
+        <p:spPr>
+          <a:xfrm>
+            <a:off x="5730250" y="2496125"/>
+            <a:ext cx="2820825" cy="1909625"/>
+          </a:xfrm>
+          <a:prstGeom prst="rect">
+            <a:avLst/>
+          </a:prstGeom>
+          <a:noFill/>
+          <a:ln>
+            <a:noFill/>
+          </a:ln>
+        </p:spPr>
+      </p:pic>
+    </p:spTree>
+  </p:cSld>
+  <p:clrMapOvr>
+    <a:masterClrMapping/>
+  </p:clrMapOvr>
+</p:sld>
+</file>
+
+<file path=ppt/slides/slide22.xml><?xml version="1.0" encoding="utf-8"?>
+<p:sld xmlns:a="http://schemas.openxmlformats.org/drawingml/2006/main" xmlns:r="http://schemas.openxmlformats.org/officeDocument/2006/relationships" xmlns:p="http://schemas.openxmlformats.org/presentationml/2006/main">
+  <p:cSld>
+    <p:spTree>
+      <p:nvGrpSpPr>
+        <p:cNvPr id="1" name="Shape 257"/>
+        <p:cNvGrpSpPr/>
+        <p:nvPr/>
+      </p:nvGrpSpPr>
+      <p:grpSpPr>
+        <a:xfrm>
+          <a:off x="0" y="0"/>
+          <a:ext cx="0" cy="0"/>
+          <a:chOff x="0" y="0"/>
+          <a:chExt cx="0" cy="0"/>
+        </a:xfrm>
+      </p:grpSpPr>
+      <p:sp>
+        <p:nvSpPr>
+          <p:cNvPr id="258" name="Google Shape;258;p34"/>
+          <p:cNvSpPr txBox="1"/>
+          <p:nvPr/>
+        </p:nvSpPr>
+        <p:spPr>
+          <a:xfrm>
+            <a:off x="72300" y="0"/>
+            <a:ext cx="3651300" cy="326400"/>
+          </a:xfrm>
+          <a:prstGeom prst="rect">
+            <a:avLst/>
+          </a:prstGeom>
+          <a:noFill/>
+          <a:ln>
+            <a:noFill/>
+          </a:ln>
+        </p:spPr>
+        <p:txBody>
+          <a:bodyPr spcFirstLastPara="1" wrap="square" lIns="9125" tIns="9125" rIns="9125" bIns="9125" anchor="t" anchorCtr="0">
+            <a:spAutoFit/>
+          </a:bodyPr>
+          <a:lstStyle/>
+          <a:p>
+            <a:pPr marL="0" marR="0" lvl="0" indent="0" algn="l" rtl="0">
+              <a:lnSpc>
+                <a:spcPct val="100000"/>
+              </a:lnSpc>
+              <a:spcBef>
+                <a:spcPts val="0"/>
+              </a:spcBef>
+              <a:spcAft>
+                <a:spcPts val="0"/>
+              </a:spcAft>
+              <a:buClr>
+                <a:srgbClr val="000000"/>
+              </a:buClr>
+              <a:buSzPts val="2000"/>
+              <a:buFont typeface="Arial"/>
+              <a:buNone/>
+            </a:pPr>
+            <a:r>
+              <a:rPr lang="en" sz="2000" b="1" i="0" u="none" strike="noStrike" cap="none">
+                <a:solidFill>
+                  <a:schemeClr val="dk1"/>
+                </a:solidFill>
+                <a:latin typeface="Calibri"/>
+                <a:ea typeface="Calibri"/>
+                <a:cs typeface="Calibri"/>
+                <a:sym typeface="Calibri"/>
+              </a:rPr>
+              <a:t>RAG, Embeddings, ...</a:t>
+            </a:r>
+            <a:endParaRPr sz="2000" b="1" i="0" u="none" strike="noStrike" cap="none">
+              <a:solidFill>
+                <a:srgbClr val="000000"/>
+              </a:solidFill>
+              <a:latin typeface="Calibri"/>
+              <a:ea typeface="Calibri"/>
+              <a:cs typeface="Calibri"/>
+              <a:sym typeface="Calibri"/>
+            </a:endParaRPr>
+          </a:p>
+        </p:txBody>
+      </p:sp>
+      <p:pic>
+        <p:nvPicPr>
+          <p:cNvPr id="259" name="Google Shape;259;p34"/>
           <p:cNvPicPr preferRelativeResize="0"/>
           <p:nvPr/>
         </p:nvPicPr>
@@ -21707,8 +22614,8 @@
         </p:blipFill>
         <p:spPr>
           <a:xfrm>
-            <a:off x="4795775" y="1423925"/>
-            <a:ext cx="4290124" cy="2702276"/>
+            <a:off x="687725" y="1736350"/>
+            <a:ext cx="4290125" cy="2702276"/>
           </a:xfrm>
           <a:prstGeom prst="rect">
             <a:avLst/>
@@ -21727,13 +22634,13 @@
       </p:pic>
       <p:sp>
         <p:nvSpPr>
-          <p:cNvPr id="241" name="Google Shape;241;p32"/>
+          <p:cNvPr id="260" name="Google Shape;260;p34"/>
           <p:cNvSpPr txBox="1"/>
           <p:nvPr/>
         </p:nvSpPr>
         <p:spPr>
           <a:xfrm>
-            <a:off x="4952500" y="380900"/>
+            <a:off x="313000" y="638825"/>
             <a:ext cx="4133400" cy="785100"/>
           </a:xfrm>
           <a:prstGeom prst="rect">
@@ -21835,39 +22742,6 @@
           </a:p>
         </p:txBody>
       </p:sp>
-      <p:pic>
-        <p:nvPicPr>
-          <p:cNvPr id="242" name="Google Shape;242;p32"/>
-          <p:cNvPicPr preferRelativeResize="0"/>
-          <p:nvPr/>
-        </p:nvPicPr>
-        <p:blipFill rotWithShape="1">
-          <a:blip r:embed="rId5">
-            <a:alphaModFix/>
-          </a:blip>
-          <a:srcRect/>
-          <a:stretch/>
-        </p:blipFill>
-        <p:spPr>
-          <a:xfrm>
-            <a:off x="72301" y="1434227"/>
-            <a:ext cx="4572001" cy="2082850"/>
-          </a:xfrm>
-          <a:prstGeom prst="rect">
-            <a:avLst/>
-          </a:prstGeom>
-          <a:noFill/>
-          <a:ln w="9525" cap="flat" cmpd="sng">
-            <a:solidFill>
-              <a:srgbClr val="FF0000"/>
-            </a:solidFill>
-            <a:prstDash val="solid"/>
-            <a:round/>
-            <a:headEnd type="none" w="sm" len="sm"/>
-            <a:tailEnd type="none" w="sm" len="sm"/>
-          </a:ln>
-        </p:spPr>
-      </p:pic>
     </p:spTree>
   </p:cSld>
   <p:clrMapOvr>
@@ -21876,12 +22750,12 @@
 </p:sld>
 </file>
 
-<file path=ppt/slides/slide21.xml><?xml version="1.0" encoding="utf-8"?>
+<file path=ppt/slides/slide23.xml><?xml version="1.0" encoding="utf-8"?>
 <p:sld xmlns:a="http://schemas.openxmlformats.org/drawingml/2006/main" xmlns:r="http://schemas.openxmlformats.org/officeDocument/2006/relationships" xmlns:p="http://schemas.openxmlformats.org/presentationml/2006/main">
   <p:cSld>
     <p:spTree>
       <p:nvGrpSpPr>
-        <p:cNvPr id="1" name="Shape 246"/>
+        <p:cNvPr id="1" name="Shape 264"/>
         <p:cNvGrpSpPr/>
         <p:nvPr/>
       </p:nvGrpSpPr>
@@ -21895,476 +22769,7 @@
       </p:grpSpPr>
       <p:sp>
         <p:nvSpPr>
-          <p:cNvPr id="247" name="Google Shape;247;p33"/>
-          <p:cNvSpPr txBox="1"/>
-          <p:nvPr/>
-        </p:nvSpPr>
-        <p:spPr>
-          <a:xfrm>
-            <a:off x="7484600" y="998050"/>
-            <a:ext cx="1567200" cy="618600"/>
-          </a:xfrm>
-          <a:prstGeom prst="rect">
-            <a:avLst/>
-          </a:prstGeom>
-          <a:noFill/>
-          <a:ln>
-            <a:noFill/>
-          </a:ln>
-        </p:spPr>
-        <p:txBody>
-          <a:bodyPr spcFirstLastPara="1" wrap="square" lIns="9125" tIns="9125" rIns="9125" bIns="9125" anchor="t" anchorCtr="0">
-            <a:spAutoFit/>
-          </a:bodyPr>
-          <a:lstStyle/>
-          <a:p>
-            <a:pPr marL="0" marR="0" lvl="0" indent="0" algn="l" rtl="0">
-              <a:lnSpc>
-                <a:spcPct val="100000"/>
-              </a:lnSpc>
-              <a:spcBef>
-                <a:spcPts val="0"/>
-              </a:spcBef>
-              <a:spcAft>
-                <a:spcPts val="0"/>
-              </a:spcAft>
-              <a:buClr>
-                <a:schemeClr val="dk1"/>
-              </a:buClr>
-              <a:buSzPts val="1100"/>
-              <a:buFont typeface="Arial"/>
-              <a:buNone/>
-            </a:pPr>
-            <a:r>
-              <a:rPr lang="en" sz="1300" b="1">
-                <a:solidFill>
-                  <a:srgbClr val="FF0000"/>
-                </a:solidFill>
-                <a:latin typeface="Calibri"/>
-                <a:ea typeface="Calibri"/>
-                <a:cs typeface="Calibri"/>
-                <a:sym typeface="Calibri"/>
-              </a:rPr>
-              <a:t>models: 73 </a:t>
-            </a:r>
-            <a:endParaRPr sz="1300" b="1">
-              <a:solidFill>
-                <a:srgbClr val="FF0000"/>
-              </a:solidFill>
-              <a:latin typeface="Calibri"/>
-              <a:ea typeface="Calibri"/>
-              <a:cs typeface="Calibri"/>
-              <a:sym typeface="Calibri"/>
-            </a:endParaRPr>
-          </a:p>
-          <a:p>
-            <a:pPr marL="0" marR="0" lvl="0" indent="0" algn="l" rtl="0">
-              <a:lnSpc>
-                <a:spcPct val="100000"/>
-              </a:lnSpc>
-              <a:spcBef>
-                <a:spcPts val="0"/>
-              </a:spcBef>
-              <a:spcAft>
-                <a:spcPts val="0"/>
-              </a:spcAft>
-              <a:buClr>
-                <a:schemeClr val="dk1"/>
-              </a:buClr>
-              <a:buSzPts val="1100"/>
-              <a:buFont typeface="Arial"/>
-              <a:buNone/>
-            </a:pPr>
-            <a:r>
-              <a:rPr lang="en" sz="1300" b="1">
-                <a:solidFill>
-                  <a:srgbClr val="FF0000"/>
-                </a:solidFill>
-                <a:latin typeface="Calibri"/>
-                <a:ea typeface="Calibri"/>
-                <a:cs typeface="Calibri"/>
-                <a:sym typeface="Calibri"/>
-              </a:rPr>
-              <a:t>votes: 408,144</a:t>
-            </a:r>
-            <a:endParaRPr sz="1300" b="1">
-              <a:solidFill>
-                <a:srgbClr val="FF0000"/>
-              </a:solidFill>
-              <a:latin typeface="Calibri"/>
-              <a:ea typeface="Calibri"/>
-              <a:cs typeface="Calibri"/>
-              <a:sym typeface="Calibri"/>
-            </a:endParaRPr>
-          </a:p>
-          <a:p>
-            <a:pPr marL="0" marR="0" lvl="0" indent="0" algn="l" rtl="0">
-              <a:lnSpc>
-                <a:spcPct val="100000"/>
-              </a:lnSpc>
-              <a:spcBef>
-                <a:spcPts val="0"/>
-              </a:spcBef>
-              <a:spcAft>
-                <a:spcPts val="0"/>
-              </a:spcAft>
-              <a:buClr>
-                <a:schemeClr val="dk1"/>
-              </a:buClr>
-              <a:buSzPts val="1100"/>
-              <a:buFont typeface="Arial"/>
-              <a:buNone/>
-            </a:pPr>
-            <a:r>
-              <a:rPr lang="en" sz="1300" b="1">
-                <a:solidFill>
-                  <a:srgbClr val="FF0000"/>
-                </a:solidFill>
-                <a:latin typeface="Calibri"/>
-                <a:ea typeface="Calibri"/>
-                <a:cs typeface="Calibri"/>
-                <a:sym typeface="Calibri"/>
-              </a:rPr>
-              <a:t>March 13, 2024</a:t>
-            </a:r>
-            <a:endParaRPr sz="1300" b="0" i="0" u="none" strike="noStrike" cap="none">
-              <a:solidFill>
-                <a:schemeClr val="dk1"/>
-              </a:solidFill>
-              <a:latin typeface="Calibri"/>
-              <a:ea typeface="Calibri"/>
-              <a:cs typeface="Calibri"/>
-              <a:sym typeface="Calibri"/>
-            </a:endParaRPr>
-          </a:p>
-        </p:txBody>
-      </p:sp>
-      <p:sp>
-        <p:nvSpPr>
-          <p:cNvPr id="248" name="Google Shape;248;p33"/>
-          <p:cNvSpPr txBox="1"/>
-          <p:nvPr/>
-        </p:nvSpPr>
-        <p:spPr>
-          <a:xfrm>
-            <a:off x="7254050" y="421150"/>
-            <a:ext cx="1831500" cy="387900"/>
-          </a:xfrm>
-          <a:prstGeom prst="rect">
-            <a:avLst/>
-          </a:prstGeom>
-          <a:solidFill>
-            <a:srgbClr val="FFF2CC"/>
-          </a:solidFill>
-          <a:ln w="9525" cap="flat" cmpd="sng">
-            <a:solidFill>
-              <a:srgbClr val="FF0000"/>
-            </a:solidFill>
-            <a:prstDash val="solid"/>
-            <a:round/>
-            <a:headEnd type="none" w="sm" len="sm"/>
-            <a:tailEnd type="none" w="sm" len="sm"/>
-          </a:ln>
-        </p:spPr>
-        <p:txBody>
-          <a:bodyPr spcFirstLastPara="1" wrap="square" lIns="9125" tIns="9125" rIns="9125" bIns="9125" anchor="t" anchorCtr="0">
-            <a:spAutoFit/>
-          </a:bodyPr>
-          <a:lstStyle/>
-          <a:p>
-            <a:pPr marL="0" marR="0" lvl="0" indent="0" algn="l" rtl="0">
-              <a:lnSpc>
-                <a:spcPct val="100000"/>
-              </a:lnSpc>
-              <a:spcBef>
-                <a:spcPts val="0"/>
-              </a:spcBef>
-              <a:spcAft>
-                <a:spcPts val="0"/>
-              </a:spcAft>
-              <a:buClr>
-                <a:schemeClr val="dk1"/>
-              </a:buClr>
-              <a:buSzPts val="1100"/>
-              <a:buFont typeface="Arial"/>
-              <a:buNone/>
-            </a:pPr>
-            <a:r>
-              <a:rPr lang="en" sz="1200" b="0" i="0" u="none" strike="noStrike" cap="none">
-                <a:solidFill>
-                  <a:schemeClr val="dk1"/>
-                </a:solidFill>
-                <a:latin typeface="Calibri"/>
-                <a:ea typeface="Calibri"/>
-                <a:cs typeface="Calibri"/>
-                <a:sym typeface="Calibri"/>
-              </a:rPr>
-              <a:t>Starting Elo rating = 1000</a:t>
-            </a:r>
-            <a:endParaRPr sz="1200" b="0" i="0" u="none" strike="noStrike" cap="none">
-              <a:solidFill>
-                <a:schemeClr val="dk1"/>
-              </a:solidFill>
-              <a:latin typeface="Calibri"/>
-              <a:ea typeface="Calibri"/>
-              <a:cs typeface="Calibri"/>
-              <a:sym typeface="Calibri"/>
-            </a:endParaRPr>
-          </a:p>
-          <a:p>
-            <a:pPr marL="0" marR="0" lvl="0" indent="0" algn="l" rtl="0">
-              <a:lnSpc>
-                <a:spcPct val="100000"/>
-              </a:lnSpc>
-              <a:spcBef>
-                <a:spcPts val="0"/>
-              </a:spcBef>
-              <a:spcAft>
-                <a:spcPts val="0"/>
-              </a:spcAft>
-              <a:buClr>
-                <a:schemeClr val="dk1"/>
-              </a:buClr>
-              <a:buSzPts val="1100"/>
-              <a:buFont typeface="Arial"/>
-              <a:buNone/>
-            </a:pPr>
-            <a:r>
-              <a:rPr lang="en" sz="1200" b="0" i="0" u="none" strike="noStrike" cap="none">
-                <a:solidFill>
-                  <a:schemeClr val="dk1"/>
-                </a:solidFill>
-                <a:latin typeface="Calibri"/>
-                <a:ea typeface="Calibri"/>
-                <a:cs typeface="Calibri"/>
-                <a:sym typeface="Calibri"/>
-              </a:rPr>
-              <a:t>95% CI = Confidence Interval</a:t>
-            </a:r>
-            <a:endParaRPr sz="1200" b="0" i="0" u="none" strike="noStrike" cap="none">
-              <a:solidFill>
-                <a:schemeClr val="dk1"/>
-              </a:solidFill>
-              <a:latin typeface="Calibri"/>
-              <a:ea typeface="Calibri"/>
-              <a:cs typeface="Calibri"/>
-              <a:sym typeface="Calibri"/>
-            </a:endParaRPr>
-          </a:p>
-        </p:txBody>
-      </p:sp>
-      <p:sp>
-        <p:nvSpPr>
-          <p:cNvPr id="249" name="Google Shape;249;p33"/>
-          <p:cNvSpPr txBox="1"/>
-          <p:nvPr/>
-        </p:nvSpPr>
-        <p:spPr>
-          <a:xfrm>
-            <a:off x="-38048" y="-108050"/>
-            <a:ext cx="4151700" cy="492600"/>
-          </a:xfrm>
-          <a:prstGeom prst="rect">
-            <a:avLst/>
-          </a:prstGeom>
-          <a:noFill/>
-          <a:ln>
-            <a:noFill/>
-          </a:ln>
-        </p:spPr>
-        <p:txBody>
-          <a:bodyPr spcFirstLastPara="1" wrap="square" lIns="91425" tIns="91425" rIns="91425" bIns="91425" anchor="t" anchorCtr="0">
-            <a:spAutoFit/>
-          </a:bodyPr>
-          <a:lstStyle/>
-          <a:p>
-            <a:pPr marL="0" marR="0" lvl="0" indent="0" algn="l" rtl="0">
-              <a:lnSpc>
-                <a:spcPct val="100000"/>
-              </a:lnSpc>
-              <a:spcBef>
-                <a:spcPts val="0"/>
-              </a:spcBef>
-              <a:spcAft>
-                <a:spcPts val="0"/>
-              </a:spcAft>
-              <a:buClr>
-                <a:srgbClr val="000000"/>
-              </a:buClr>
-              <a:buSzPts val="2000"/>
-              <a:buFont typeface="Arial"/>
-              <a:buNone/>
-            </a:pPr>
-            <a:r>
-              <a:rPr lang="en" sz="2000" b="1" i="0" u="none" strike="noStrike" cap="none">
-                <a:solidFill>
-                  <a:schemeClr val="dk1"/>
-                </a:solidFill>
-                <a:latin typeface="Calibri"/>
-                <a:ea typeface="Calibri"/>
-                <a:cs typeface="Calibri"/>
-                <a:sym typeface="Calibri"/>
-              </a:rPr>
-              <a:t>Crowd-sourced "Arena" Leaderboard</a:t>
-            </a:r>
-            <a:endParaRPr sz="2000" b="1" i="0" u="none" strike="noStrike" cap="none">
-              <a:solidFill>
-                <a:srgbClr val="000000"/>
-              </a:solidFill>
-              <a:latin typeface="Calibri"/>
-              <a:ea typeface="Calibri"/>
-              <a:cs typeface="Calibri"/>
-              <a:sym typeface="Calibri"/>
-            </a:endParaRPr>
-          </a:p>
-        </p:txBody>
-      </p:sp>
-      <p:sp>
-        <p:nvSpPr>
-          <p:cNvPr id="250" name="Google Shape;250;p33"/>
-          <p:cNvSpPr txBox="1"/>
-          <p:nvPr/>
-        </p:nvSpPr>
-        <p:spPr>
-          <a:xfrm>
-            <a:off x="5535876" y="45850"/>
-            <a:ext cx="3549600" cy="338700"/>
-          </a:xfrm>
-          <a:prstGeom prst="rect">
-            <a:avLst/>
-          </a:prstGeom>
-          <a:noFill/>
-          <a:ln>
-            <a:noFill/>
-          </a:ln>
-        </p:spPr>
-        <p:txBody>
-          <a:bodyPr spcFirstLastPara="1" wrap="square" lIns="91425" tIns="91425" rIns="91425" bIns="91425" anchor="t" anchorCtr="0">
-            <a:spAutoFit/>
-          </a:bodyPr>
-          <a:lstStyle/>
-          <a:p>
-            <a:pPr marL="0" marR="0" lvl="0" indent="0" algn="l" rtl="0">
-              <a:lnSpc>
-                <a:spcPct val="100000"/>
-              </a:lnSpc>
-              <a:spcBef>
-                <a:spcPts val="0"/>
-              </a:spcBef>
-              <a:spcAft>
-                <a:spcPts val="0"/>
-              </a:spcAft>
-              <a:buClr>
-                <a:schemeClr val="dk1"/>
-              </a:buClr>
-              <a:buSzPts val="1100"/>
-              <a:buFont typeface="Arial"/>
-              <a:buNone/>
-            </a:pPr>
-            <a:r>
-              <a:rPr lang="en" sz="1000" b="0" i="0" u="sng" strike="noStrike" cap="none">
-                <a:solidFill>
-                  <a:schemeClr val="hlink"/>
-                </a:solidFill>
-                <a:latin typeface="Calibri"/>
-                <a:ea typeface="Calibri"/>
-                <a:cs typeface="Calibri"/>
-                <a:sym typeface="Calibri"/>
-                <a:hlinkClick r:id="rId3"/>
-              </a:rPr>
-              <a:t>https://huggingface.co/spaces/lmsys/chatbot-arena-leaderboard</a:t>
-            </a:r>
-            <a:r>
-              <a:rPr lang="en" sz="1000" b="0" i="0" u="none" strike="noStrike" cap="none">
-                <a:solidFill>
-                  <a:schemeClr val="dk1"/>
-                </a:solidFill>
-                <a:latin typeface="Calibri"/>
-                <a:ea typeface="Calibri"/>
-                <a:cs typeface="Calibri"/>
-                <a:sym typeface="Calibri"/>
-              </a:rPr>
-              <a:t> </a:t>
-            </a:r>
-            <a:endParaRPr sz="1300" b="0" i="0" u="none" strike="noStrike" cap="none">
-              <a:solidFill>
-                <a:schemeClr val="dk1"/>
-              </a:solidFill>
-              <a:latin typeface="Calibri"/>
-              <a:ea typeface="Calibri"/>
-              <a:cs typeface="Calibri"/>
-              <a:sym typeface="Calibri"/>
-            </a:endParaRPr>
-          </a:p>
-        </p:txBody>
-      </p:sp>
-      <p:pic>
-        <p:nvPicPr>
-          <p:cNvPr id="251" name="Google Shape;251;p33"/>
-          <p:cNvPicPr preferRelativeResize="0"/>
-          <p:nvPr/>
-        </p:nvPicPr>
-        <p:blipFill>
-          <a:blip r:embed="rId4" cstate="email">
-            <a:alphaModFix/>
-            <a:extLst>
-              <a:ext uri="{28A0092B-C50C-407E-A947-70E740481C1C}">
-                <a14:useLocalDpi xmlns:a14="http://schemas.microsoft.com/office/drawing/2010/main"/>
-              </a:ext>
-            </a:extLst>
-          </a:blip>
-          <a:stretch>
-            <a:fillRect/>
-          </a:stretch>
-        </p:blipFill>
-        <p:spPr>
-          <a:xfrm>
-            <a:off x="152400" y="536950"/>
-            <a:ext cx="6710474" cy="4454150"/>
-          </a:xfrm>
-          <a:prstGeom prst="rect">
-            <a:avLst/>
-          </a:prstGeom>
-          <a:noFill/>
-          <a:ln w="9525" cap="flat" cmpd="sng">
-            <a:solidFill>
-              <a:srgbClr val="FF0000"/>
-            </a:solidFill>
-            <a:prstDash val="solid"/>
-            <a:round/>
-            <a:headEnd type="none" w="sm" len="sm"/>
-            <a:tailEnd type="none" w="sm" len="sm"/>
-          </a:ln>
-        </p:spPr>
-      </p:pic>
-    </p:spTree>
-  </p:cSld>
-  <p:clrMapOvr>
-    <a:masterClrMapping/>
-  </p:clrMapOvr>
-</p:sld>
-</file>
-
-<file path=ppt/slides/slide22.xml><?xml version="1.0" encoding="utf-8"?>
-<p:sld xmlns:a="http://schemas.openxmlformats.org/drawingml/2006/main" xmlns:r="http://schemas.openxmlformats.org/officeDocument/2006/relationships" xmlns:p="http://schemas.openxmlformats.org/presentationml/2006/main">
-  <p:cSld>
-    <p:spTree>
-      <p:nvGrpSpPr>
-        <p:cNvPr id="1" name="Shape 255"/>
-        <p:cNvGrpSpPr/>
-        <p:nvPr/>
-      </p:nvGrpSpPr>
-      <p:grpSpPr>
-        <a:xfrm>
-          <a:off x="0" y="0"/>
-          <a:ext cx="0" cy="0"/>
-          <a:chOff x="0" y="0"/>
-          <a:chExt cx="0" cy="0"/>
-        </a:xfrm>
-      </p:grpSpPr>
-      <p:sp>
-        <p:nvSpPr>
-          <p:cNvPr id="256" name="Google Shape;256;p34"/>
+          <p:cNvPr id="265" name="Google Shape;265;p35"/>
           <p:cNvSpPr txBox="1"/>
           <p:nvPr/>
         </p:nvSpPr>
@@ -22442,7 +22847,7 @@
       </p:sp>
       <p:sp>
         <p:nvSpPr>
-          <p:cNvPr id="257" name="Google Shape;257;p34"/>
+          <p:cNvPr id="266" name="Google Shape;266;p35"/>
           <p:cNvSpPr txBox="1"/>
           <p:nvPr/>
         </p:nvSpPr>
@@ -22533,7 +22938,7 @@
       </p:sp>
       <p:pic>
         <p:nvPicPr>
-          <p:cNvPr id="258" name="Google Shape;258;p34"/>
+          <p:cNvPr id="267" name="Google Shape;267;p35"/>
           <p:cNvPicPr preferRelativeResize="0"/>
           <p:nvPr/>
         </p:nvPicPr>
@@ -22572,12 +22977,12 @@
 </p:sld>
 </file>
 
-<file path=ppt/slides/slide23.xml><?xml version="1.0" encoding="utf-8"?>
+<file path=ppt/slides/slide24.xml><?xml version="1.0" encoding="utf-8"?>
 <p:sld xmlns:a="http://schemas.openxmlformats.org/drawingml/2006/main" xmlns:r="http://schemas.openxmlformats.org/officeDocument/2006/relationships" xmlns:p="http://schemas.openxmlformats.org/presentationml/2006/main">
   <p:cSld>
     <p:spTree>
       <p:nvGrpSpPr>
-        <p:cNvPr id="1" name="Shape 262"/>
+        <p:cNvPr id="1" name="Shape 271"/>
         <p:cNvGrpSpPr/>
         <p:nvPr/>
       </p:nvGrpSpPr>
@@ -22591,7 +22996,7 @@
       </p:grpSpPr>
       <p:pic>
         <p:nvPicPr>
-          <p:cNvPr id="263" name="Google Shape;263;p35"/>
+          <p:cNvPr id="272" name="Google Shape;272;p36"/>
           <p:cNvPicPr preferRelativeResize="0"/>
           <p:nvPr/>
         </p:nvPicPr>
@@ -22618,7 +23023,7 @@
       </p:pic>
       <p:sp>
         <p:nvSpPr>
-          <p:cNvPr id="264" name="Google Shape;264;p35"/>
+          <p:cNvPr id="273" name="Google Shape;273;p36"/>
           <p:cNvSpPr txBox="1"/>
           <p:nvPr/>
         </p:nvSpPr>
@@ -22684,7 +23089,7 @@
       </p:sp>
       <p:sp>
         <p:nvSpPr>
-          <p:cNvPr id="265" name="Google Shape;265;p35"/>
+          <p:cNvPr id="274" name="Google Shape;274;p36"/>
           <p:cNvSpPr txBox="1"/>
           <p:nvPr/>
         </p:nvSpPr>
@@ -23114,7 +23519,7 @@
       </p:sp>
       <p:pic>
         <p:nvPicPr>
-          <p:cNvPr id="266" name="Google Shape;266;p35"/>
+          <p:cNvPr id="275" name="Google Shape;275;p36"/>
           <p:cNvPicPr preferRelativeResize="0"/>
           <p:nvPr/>
         </p:nvPicPr>
@@ -23146,7 +23551,7 @@
       </p:pic>
       <p:sp>
         <p:nvSpPr>
-          <p:cNvPr id="267" name="Google Shape;267;p35"/>
+          <p:cNvPr id="276" name="Google Shape;276;p36"/>
           <p:cNvSpPr txBox="1"/>
           <p:nvPr/>
         </p:nvSpPr>
@@ -23225,7 +23630,7 @@
       </p:sp>
       <p:sp>
         <p:nvSpPr>
-          <p:cNvPr id="268" name="Google Shape;268;p35"/>
+          <p:cNvPr id="277" name="Google Shape;277;p36"/>
           <p:cNvSpPr txBox="1"/>
           <p:nvPr/>
         </p:nvSpPr>
@@ -23297,12 +23702,12 @@
 </p:sld>
 </file>
 
-<file path=ppt/slides/slide24.xml><?xml version="1.0" encoding="utf-8"?>
+<file path=ppt/slides/slide25.xml><?xml version="1.0" encoding="utf-8"?>
 <p:sld xmlns:a="http://schemas.openxmlformats.org/drawingml/2006/main" xmlns:r="http://schemas.openxmlformats.org/officeDocument/2006/relationships" xmlns:p="http://schemas.openxmlformats.org/presentationml/2006/main">
   <p:cSld>
     <p:spTree>
       <p:nvGrpSpPr>
-        <p:cNvPr id="1" name="Shape 272"/>
+        <p:cNvPr id="1" name="Shape 281"/>
         <p:cNvGrpSpPr/>
         <p:nvPr/>
       </p:nvGrpSpPr>
@@ -23316,7 +23721,7 @@
       </p:grpSpPr>
       <p:sp>
         <p:nvSpPr>
-          <p:cNvPr id="273" name="Google Shape;273;p36"/>
+          <p:cNvPr id="282" name="Google Shape;282;p37"/>
           <p:cNvSpPr txBox="1"/>
           <p:nvPr/>
         </p:nvSpPr>
@@ -24457,6 +24862,1328 @@
         </p:nvSpPr>
         <p:spPr>
           <a:xfrm>
+            <a:off x="119325" y="0"/>
+            <a:ext cx="6276300" cy="326400"/>
+          </a:xfrm>
+          <a:prstGeom prst="rect">
+            <a:avLst/>
+          </a:prstGeom>
+          <a:noFill/>
+          <a:ln>
+            <a:noFill/>
+          </a:ln>
+        </p:spPr>
+        <p:txBody>
+          <a:bodyPr spcFirstLastPara="1" wrap="square" lIns="9125" tIns="9125" rIns="9125" bIns="9125" anchor="t" anchorCtr="0">
+            <a:spAutoFit/>
+          </a:bodyPr>
+          <a:lstStyle/>
+          <a:p>
+            <a:pPr marL="0" marR="0" lvl="0" indent="0" algn="l" rtl="0">
+              <a:lnSpc>
+                <a:spcPct val="100000"/>
+              </a:lnSpc>
+              <a:spcBef>
+                <a:spcPts val="0"/>
+              </a:spcBef>
+              <a:spcAft>
+                <a:spcPts val="0"/>
+              </a:spcAft>
+              <a:buClr>
+                <a:srgbClr val="000000"/>
+              </a:buClr>
+              <a:buSzPts val="2000"/>
+              <a:buFont typeface="Arial"/>
+              <a:buNone/>
+            </a:pPr>
+            <a:r>
+              <a:rPr lang="en" sz="2000" b="1">
+                <a:solidFill>
+                  <a:schemeClr val="dk1"/>
+                </a:solidFill>
+                <a:latin typeface="Calibri"/>
+                <a:ea typeface="Calibri"/>
+                <a:cs typeface="Calibri"/>
+                <a:sym typeface="Calibri"/>
+              </a:rPr>
+              <a:t>Gen AI is the biggest star hyperinflation in GitHub history </a:t>
+            </a:r>
+            <a:endParaRPr sz="2000" b="1" i="0" u="none" strike="noStrike" cap="none">
+              <a:solidFill>
+                <a:srgbClr val="000000"/>
+              </a:solidFill>
+              <a:latin typeface="Calibri"/>
+              <a:ea typeface="Calibri"/>
+              <a:cs typeface="Calibri"/>
+              <a:sym typeface="Calibri"/>
+            </a:endParaRPr>
+          </a:p>
+        </p:txBody>
+      </p:sp>
+      <p:sp>
+        <p:nvSpPr>
+          <p:cNvPr id="83" name="Google Shape;83;p16"/>
+          <p:cNvSpPr txBox="1"/>
+          <p:nvPr/>
+        </p:nvSpPr>
+        <p:spPr>
+          <a:xfrm>
+            <a:off x="2236812" y="3921681"/>
+            <a:ext cx="4381500" cy="621900"/>
+          </a:xfrm>
+          <a:prstGeom prst="rect">
+            <a:avLst/>
+          </a:prstGeom>
+          <a:noFill/>
+          <a:ln>
+            <a:noFill/>
+          </a:ln>
+        </p:spPr>
+        <p:txBody>
+          <a:bodyPr spcFirstLastPara="1" wrap="square" lIns="18275" tIns="18275" rIns="18275" bIns="18275" anchor="t" anchorCtr="0">
+            <a:spAutoFit/>
+          </a:bodyPr>
+          <a:lstStyle/>
+          <a:p>
+            <a:pPr marL="0" marR="0" lvl="0" indent="0" algn="ctr" rtl="0">
+              <a:lnSpc>
+                <a:spcPct val="100000"/>
+              </a:lnSpc>
+              <a:spcBef>
+                <a:spcPts val="0"/>
+              </a:spcBef>
+              <a:spcAft>
+                <a:spcPts val="0"/>
+              </a:spcAft>
+              <a:buClr>
+                <a:schemeClr val="dk1"/>
+              </a:buClr>
+              <a:buSzPts val="1100"/>
+              <a:buFont typeface="Arial"/>
+              <a:buNone/>
+            </a:pPr>
+            <a:r>
+              <a:rPr lang="en">
+                <a:solidFill>
+                  <a:schemeClr val="dk1"/>
+                </a:solidFill>
+                <a:latin typeface="Calibri"/>
+                <a:ea typeface="Calibri"/>
+                <a:cs typeface="Calibri"/>
+                <a:sym typeface="Calibri"/>
+              </a:rPr>
+              <a:t>A new LLM a day keeps the GPUs away !</a:t>
+            </a:r>
+            <a:endParaRPr>
+              <a:solidFill>
+                <a:schemeClr val="dk1"/>
+              </a:solidFill>
+              <a:latin typeface="Calibri"/>
+              <a:ea typeface="Calibri"/>
+              <a:cs typeface="Calibri"/>
+              <a:sym typeface="Calibri"/>
+            </a:endParaRPr>
+          </a:p>
+          <a:p>
+            <a:pPr marL="0" marR="0" lvl="0" indent="0" algn="ctr" rtl="0">
+              <a:lnSpc>
+                <a:spcPct val="100000"/>
+              </a:lnSpc>
+              <a:spcBef>
+                <a:spcPts val="0"/>
+              </a:spcBef>
+              <a:spcAft>
+                <a:spcPts val="0"/>
+              </a:spcAft>
+              <a:buClr>
+                <a:schemeClr val="dk1"/>
+              </a:buClr>
+              <a:buSzPts val="1100"/>
+              <a:buFont typeface="Arial"/>
+              <a:buNone/>
+            </a:pPr>
+            <a:r>
+              <a:rPr lang="en">
+                <a:solidFill>
+                  <a:schemeClr val="dk1"/>
+                </a:solidFill>
+                <a:latin typeface="Calibri"/>
+                <a:ea typeface="Calibri"/>
+                <a:cs typeface="Calibri"/>
+                <a:sym typeface="Calibri"/>
+              </a:rPr>
+              <a:t>A TPU keeps GPU away !</a:t>
+            </a:r>
+            <a:endParaRPr>
+              <a:solidFill>
+                <a:schemeClr val="dk1"/>
+              </a:solidFill>
+              <a:latin typeface="Calibri"/>
+              <a:ea typeface="Calibri"/>
+              <a:cs typeface="Calibri"/>
+              <a:sym typeface="Calibri"/>
+            </a:endParaRPr>
+          </a:p>
+          <a:p>
+            <a:pPr marL="0" marR="0" lvl="0" indent="0" algn="ctr" rtl="0">
+              <a:lnSpc>
+                <a:spcPct val="100000"/>
+              </a:lnSpc>
+              <a:spcBef>
+                <a:spcPts val="0"/>
+              </a:spcBef>
+              <a:spcAft>
+                <a:spcPts val="0"/>
+              </a:spcAft>
+              <a:buClr>
+                <a:schemeClr val="dk1"/>
+              </a:buClr>
+              <a:buSzPts val="1100"/>
+              <a:buFont typeface="Arial"/>
+              <a:buNone/>
+            </a:pPr>
+            <a:r>
+              <a:rPr lang="en" sz="1000" u="sng">
+                <a:solidFill>
+                  <a:schemeClr val="hlink"/>
+                </a:solidFill>
+                <a:latin typeface="Calibri"/>
+                <a:ea typeface="Calibri"/>
+                <a:cs typeface="Calibri"/>
+                <a:sym typeface="Calibri"/>
+                <a:hlinkClick r:id="rId3"/>
+              </a:rPr>
+              <a:t>https://twitter.com/OriolVinyalsML/status/1767643472893276510</a:t>
+            </a:r>
+            <a:r>
+              <a:rPr lang="en" sz="1000">
+                <a:solidFill>
+                  <a:schemeClr val="dk1"/>
+                </a:solidFill>
+                <a:latin typeface="Calibri"/>
+                <a:ea typeface="Calibri"/>
+                <a:cs typeface="Calibri"/>
+                <a:sym typeface="Calibri"/>
+              </a:rPr>
+              <a:t> </a:t>
+            </a:r>
+            <a:endParaRPr sz="1000">
+              <a:solidFill>
+                <a:schemeClr val="dk1"/>
+              </a:solidFill>
+              <a:latin typeface="Calibri"/>
+              <a:ea typeface="Calibri"/>
+              <a:cs typeface="Calibri"/>
+              <a:sym typeface="Calibri"/>
+            </a:endParaRPr>
+          </a:p>
+        </p:txBody>
+      </p:sp>
+      <p:sp>
+        <p:nvSpPr>
+          <p:cNvPr id="84" name="Google Shape;84;p16"/>
+          <p:cNvSpPr txBox="1"/>
+          <p:nvPr/>
+        </p:nvSpPr>
+        <p:spPr>
+          <a:xfrm>
+            <a:off x="119337" y="525106"/>
+            <a:ext cx="4381500" cy="2838300"/>
+          </a:xfrm>
+          <a:prstGeom prst="rect">
+            <a:avLst/>
+          </a:prstGeom>
+          <a:solidFill>
+            <a:srgbClr val="FFF2CC"/>
+          </a:solidFill>
+          <a:ln w="9525" cap="flat" cmpd="sng">
+            <a:solidFill>
+              <a:srgbClr val="FF0000"/>
+            </a:solidFill>
+            <a:prstDash val="solid"/>
+            <a:round/>
+            <a:headEnd type="none" w="sm" len="sm"/>
+            <a:tailEnd type="none" w="sm" len="sm"/>
+          </a:ln>
+        </p:spPr>
+        <p:txBody>
+          <a:bodyPr spcFirstLastPara="1" wrap="square" lIns="18275" tIns="18275" rIns="18275" bIns="18275" anchor="t" anchorCtr="0">
+            <a:spAutoFit/>
+          </a:bodyPr>
+          <a:lstStyle/>
+          <a:p>
+            <a:pPr marL="0" lvl="0" indent="0" algn="l" rtl="0">
+              <a:spcBef>
+                <a:spcPts val="0"/>
+              </a:spcBef>
+              <a:spcAft>
+                <a:spcPts val="0"/>
+              </a:spcAft>
+              <a:buNone/>
+            </a:pPr>
+            <a:r>
+              <a:rPr lang="en" sz="1300">
+                <a:latin typeface="Calibri"/>
+                <a:ea typeface="Calibri"/>
+                <a:cs typeface="Calibri"/>
+                <a:sym typeface="Calibri"/>
+              </a:rPr>
+              <a:t>845 GenAI repos 500+ stars on GitHub</a:t>
+            </a:r>
+            <a:endParaRPr sz="1300">
+              <a:latin typeface="Calibri"/>
+              <a:ea typeface="Calibri"/>
+              <a:cs typeface="Calibri"/>
+              <a:sym typeface="Calibri"/>
+            </a:endParaRPr>
+          </a:p>
+          <a:p>
+            <a:pPr marL="0" lvl="0" indent="0" algn="l" rtl="0">
+              <a:spcBef>
+                <a:spcPts val="0"/>
+              </a:spcBef>
+              <a:spcAft>
+                <a:spcPts val="0"/>
+              </a:spcAft>
+              <a:buNone/>
+            </a:pPr>
+            <a:r>
+              <a:rPr lang="en" sz="1300">
+                <a:latin typeface="Calibri"/>
+                <a:ea typeface="Calibri"/>
+                <a:cs typeface="Calibri"/>
+                <a:sym typeface="Calibri"/>
+              </a:rPr>
+              <a:t>20K+ developers, ~ 1 Mln commits.</a:t>
+            </a:r>
+            <a:endParaRPr sz="1300">
+              <a:latin typeface="Calibri"/>
+              <a:ea typeface="Calibri"/>
+              <a:cs typeface="Calibri"/>
+              <a:sym typeface="Calibri"/>
+            </a:endParaRPr>
+          </a:p>
+          <a:p>
+            <a:pPr marL="0" lvl="0" indent="0" algn="l" rtl="0">
+              <a:spcBef>
+                <a:spcPts val="0"/>
+              </a:spcBef>
+              <a:spcAft>
+                <a:spcPts val="0"/>
+              </a:spcAft>
+              <a:buNone/>
+            </a:pPr>
+            <a:r>
+              <a:rPr lang="en" sz="1300" u="sng">
+                <a:solidFill>
+                  <a:schemeClr val="hlink"/>
+                </a:solidFill>
+                <a:latin typeface="Calibri"/>
+                <a:ea typeface="Calibri"/>
+                <a:cs typeface="Calibri"/>
+                <a:sym typeface="Calibri"/>
+                <a:hlinkClick r:id="rId4"/>
+              </a:rPr>
+              <a:t>https://twitter.com/chipro/status/1768388213008445837</a:t>
+            </a:r>
+            <a:endParaRPr sz="1300">
+              <a:solidFill>
+                <a:schemeClr val="dk1"/>
+              </a:solidFill>
+              <a:latin typeface="Calibri"/>
+              <a:ea typeface="Calibri"/>
+              <a:cs typeface="Calibri"/>
+              <a:sym typeface="Calibri"/>
+            </a:endParaRPr>
+          </a:p>
+          <a:p>
+            <a:pPr marL="0" lvl="0" indent="0" algn="l" rtl="0">
+              <a:spcBef>
+                <a:spcPts val="0"/>
+              </a:spcBef>
+              <a:spcAft>
+                <a:spcPts val="0"/>
+              </a:spcAft>
+              <a:buNone/>
+            </a:pPr>
+            <a:endParaRPr sz="1300">
+              <a:solidFill>
+                <a:schemeClr val="dk1"/>
+              </a:solidFill>
+              <a:latin typeface="Calibri"/>
+              <a:ea typeface="Calibri"/>
+              <a:cs typeface="Calibri"/>
+              <a:sym typeface="Calibri"/>
+            </a:endParaRPr>
+          </a:p>
+          <a:p>
+            <a:pPr marL="0" lvl="0" indent="0" algn="l" rtl="0">
+              <a:spcBef>
+                <a:spcPts val="0"/>
+              </a:spcBef>
+              <a:spcAft>
+                <a:spcPts val="0"/>
+              </a:spcAft>
+              <a:buClr>
+                <a:schemeClr val="dk1"/>
+              </a:buClr>
+              <a:buSzPts val="1100"/>
+              <a:buFont typeface="Arial"/>
+              <a:buNone/>
+            </a:pPr>
+            <a:r>
+              <a:rPr lang="en" sz="1300">
+                <a:solidFill>
+                  <a:schemeClr val="dk1"/>
+                </a:solidFill>
+                <a:latin typeface="Calibri"/>
+                <a:ea typeface="Calibri"/>
+                <a:cs typeface="Calibri"/>
+                <a:sym typeface="Calibri"/>
+              </a:rPr>
+              <a:t>The landscape exploded in late 2022 but seems to have calmed down since September 2023.</a:t>
+            </a:r>
+            <a:endParaRPr sz="1300">
+              <a:solidFill>
+                <a:schemeClr val="dk1"/>
+              </a:solidFill>
+              <a:latin typeface="Calibri"/>
+              <a:ea typeface="Calibri"/>
+              <a:cs typeface="Calibri"/>
+              <a:sym typeface="Calibri"/>
+            </a:endParaRPr>
+          </a:p>
+          <a:p>
+            <a:pPr marL="0" lvl="0" indent="0" algn="l" rtl="0">
+              <a:spcBef>
+                <a:spcPts val="0"/>
+              </a:spcBef>
+              <a:spcAft>
+                <a:spcPts val="0"/>
+              </a:spcAft>
+              <a:buClr>
+                <a:schemeClr val="dk1"/>
+              </a:buClr>
+              <a:buSzPts val="1100"/>
+              <a:buFont typeface="Arial"/>
+              <a:buNone/>
+            </a:pPr>
+            <a:endParaRPr sz="1300">
+              <a:solidFill>
+                <a:schemeClr val="dk1"/>
+              </a:solidFill>
+              <a:latin typeface="Calibri"/>
+              <a:ea typeface="Calibri"/>
+              <a:cs typeface="Calibri"/>
+              <a:sym typeface="Calibri"/>
+            </a:endParaRPr>
+          </a:p>
+          <a:p>
+            <a:pPr marL="0" lvl="0" indent="0" algn="l" rtl="0">
+              <a:spcBef>
+                <a:spcPts val="0"/>
+              </a:spcBef>
+              <a:spcAft>
+                <a:spcPts val="0"/>
+              </a:spcAft>
+              <a:buClr>
+                <a:schemeClr val="dk1"/>
+              </a:buClr>
+              <a:buSzPts val="1100"/>
+              <a:buFont typeface="Arial"/>
+              <a:buNone/>
+            </a:pPr>
+            <a:r>
+              <a:rPr lang="en" sz="1300">
+                <a:solidFill>
+                  <a:schemeClr val="dk1"/>
+                </a:solidFill>
+                <a:latin typeface="Calibri"/>
+                <a:ea typeface="Calibri"/>
+                <a:cs typeface="Calibri"/>
+                <a:sym typeface="Calibri"/>
+              </a:rPr>
+              <a:t>While big companies still dominate the landscape, there’s a rise in massively popular software hosted by individuals.</a:t>
+            </a:r>
+            <a:endParaRPr sz="1300">
+              <a:solidFill>
+                <a:schemeClr val="dk1"/>
+              </a:solidFill>
+              <a:latin typeface="Calibri"/>
+              <a:ea typeface="Calibri"/>
+              <a:cs typeface="Calibri"/>
+              <a:sym typeface="Calibri"/>
+            </a:endParaRPr>
+          </a:p>
+          <a:p>
+            <a:pPr marL="0" lvl="0" indent="0" algn="l" rtl="0">
+              <a:spcBef>
+                <a:spcPts val="0"/>
+              </a:spcBef>
+              <a:spcAft>
+                <a:spcPts val="0"/>
+              </a:spcAft>
+              <a:buNone/>
+            </a:pPr>
+            <a:endParaRPr sz="1300">
+              <a:solidFill>
+                <a:schemeClr val="dk1"/>
+              </a:solidFill>
+              <a:latin typeface="Calibri"/>
+              <a:ea typeface="Calibri"/>
+              <a:cs typeface="Calibri"/>
+              <a:sym typeface="Calibri"/>
+            </a:endParaRPr>
+          </a:p>
+          <a:p>
+            <a:pPr marL="0" lvl="0" indent="0" algn="l" rtl="0">
+              <a:spcBef>
+                <a:spcPts val="0"/>
+              </a:spcBef>
+              <a:spcAft>
+                <a:spcPts val="0"/>
+              </a:spcAft>
+              <a:buNone/>
+            </a:pPr>
+            <a:r>
+              <a:rPr lang="en" sz="1300">
+                <a:solidFill>
+                  <a:schemeClr val="dk1"/>
+                </a:solidFill>
+                <a:latin typeface="Calibri"/>
+                <a:ea typeface="Calibri"/>
+                <a:cs typeface="Calibri"/>
+                <a:sym typeface="Calibri"/>
+              </a:rPr>
+              <a:t>The Chinese’s open source ecosystem is rapidly growing. </a:t>
+            </a:r>
+            <a:endParaRPr sz="1300">
+              <a:solidFill>
+                <a:schemeClr val="dk1"/>
+              </a:solidFill>
+              <a:latin typeface="Calibri"/>
+              <a:ea typeface="Calibri"/>
+              <a:cs typeface="Calibri"/>
+              <a:sym typeface="Calibri"/>
+            </a:endParaRPr>
+          </a:p>
+          <a:p>
+            <a:pPr marL="0" lvl="0" indent="0" algn="l" rtl="0">
+              <a:spcBef>
+                <a:spcPts val="0"/>
+              </a:spcBef>
+              <a:spcAft>
+                <a:spcPts val="0"/>
+              </a:spcAft>
+              <a:buNone/>
+            </a:pPr>
+            <a:r>
+              <a:rPr lang="en" sz="1300">
+                <a:solidFill>
+                  <a:schemeClr val="dk1"/>
+                </a:solidFill>
+                <a:latin typeface="Calibri"/>
+                <a:ea typeface="Calibri"/>
+                <a:cs typeface="Calibri"/>
+                <a:sym typeface="Calibri"/>
+              </a:rPr>
+              <a:t>6 out of 20 GitHub accounts with the most popular AI repos originate in China, with two from Tsinghua University and two from Shanghai AI Lab.</a:t>
+            </a:r>
+            <a:endParaRPr sz="1300">
+              <a:solidFill>
+                <a:schemeClr val="dk1"/>
+              </a:solidFill>
+              <a:latin typeface="Calibri"/>
+              <a:ea typeface="Calibri"/>
+              <a:cs typeface="Calibri"/>
+              <a:sym typeface="Calibri"/>
+            </a:endParaRPr>
+          </a:p>
+        </p:txBody>
+      </p:sp>
+      <p:pic>
+        <p:nvPicPr>
+          <p:cNvPr id="85" name="Google Shape;85;p16"/>
+          <p:cNvPicPr preferRelativeResize="0"/>
+          <p:nvPr/>
+        </p:nvPicPr>
+        <p:blipFill>
+          <a:blip r:embed="rId5" cstate="email">
+            <a:alphaModFix/>
+            <a:extLst>
+              <a:ext uri="{28A0092B-C50C-407E-A947-70E740481C1C}">
+                <a14:useLocalDpi xmlns:a14="http://schemas.microsoft.com/office/drawing/2010/main"/>
+              </a:ext>
+            </a:extLst>
+          </a:blip>
+          <a:stretch>
+            <a:fillRect/>
+          </a:stretch>
+        </p:blipFill>
+        <p:spPr>
+          <a:xfrm>
+            <a:off x="4653237" y="525100"/>
+            <a:ext cx="4338363" cy="2442364"/>
+          </a:xfrm>
+          <a:prstGeom prst="rect">
+            <a:avLst/>
+          </a:prstGeom>
+          <a:noFill/>
+          <a:ln>
+            <a:noFill/>
+          </a:ln>
+        </p:spPr>
+      </p:pic>
+    </p:spTree>
+  </p:cSld>
+  <p:clrMapOvr>
+    <a:masterClrMapping/>
+  </p:clrMapOvr>
+</p:sld>
+</file>
+
+<file path=ppt/slides/slide5.xml><?xml version="1.0" encoding="utf-8"?>
+<p:sld xmlns:a="http://schemas.openxmlformats.org/drawingml/2006/main" xmlns:r="http://schemas.openxmlformats.org/officeDocument/2006/relationships" xmlns:p="http://schemas.openxmlformats.org/presentationml/2006/main">
+  <p:cSld>
+    <p:spTree>
+      <p:nvGrpSpPr>
+        <p:cNvPr id="1" name="Shape 89"/>
+        <p:cNvGrpSpPr/>
+        <p:nvPr/>
+      </p:nvGrpSpPr>
+      <p:grpSpPr>
+        <a:xfrm>
+          <a:off x="0" y="0"/>
+          <a:ext cx="0" cy="0"/>
+          <a:chOff x="0" y="0"/>
+          <a:chExt cx="0" cy="0"/>
+        </a:xfrm>
+      </p:grpSpPr>
+      <p:sp>
+        <p:nvSpPr>
+          <p:cNvPr id="90" name="Google Shape;90;p17"/>
+          <p:cNvSpPr txBox="1"/>
+          <p:nvPr/>
+        </p:nvSpPr>
+        <p:spPr>
+          <a:xfrm>
+            <a:off x="7484600" y="998050"/>
+            <a:ext cx="1567200" cy="618600"/>
+          </a:xfrm>
+          <a:prstGeom prst="rect">
+            <a:avLst/>
+          </a:prstGeom>
+          <a:noFill/>
+          <a:ln>
+            <a:noFill/>
+          </a:ln>
+        </p:spPr>
+        <p:txBody>
+          <a:bodyPr spcFirstLastPara="1" wrap="square" lIns="9125" tIns="9125" rIns="9125" bIns="9125" anchor="t" anchorCtr="0">
+            <a:spAutoFit/>
+          </a:bodyPr>
+          <a:lstStyle/>
+          <a:p>
+            <a:pPr marL="0" marR="0" lvl="0" indent="0" algn="l" rtl="0">
+              <a:lnSpc>
+                <a:spcPct val="100000"/>
+              </a:lnSpc>
+              <a:spcBef>
+                <a:spcPts val="0"/>
+              </a:spcBef>
+              <a:spcAft>
+                <a:spcPts val="0"/>
+              </a:spcAft>
+              <a:buClr>
+                <a:schemeClr val="dk1"/>
+              </a:buClr>
+              <a:buSzPts val="1100"/>
+              <a:buFont typeface="Arial"/>
+              <a:buNone/>
+            </a:pPr>
+            <a:r>
+              <a:rPr lang="en" sz="1300" b="1">
+                <a:solidFill>
+                  <a:srgbClr val="FF0000"/>
+                </a:solidFill>
+                <a:latin typeface="Calibri"/>
+                <a:ea typeface="Calibri"/>
+                <a:cs typeface="Calibri"/>
+                <a:sym typeface="Calibri"/>
+              </a:rPr>
+              <a:t>models: 73 </a:t>
+            </a:r>
+            <a:endParaRPr sz="1300" b="1">
+              <a:solidFill>
+                <a:srgbClr val="FF0000"/>
+              </a:solidFill>
+              <a:latin typeface="Calibri"/>
+              <a:ea typeface="Calibri"/>
+              <a:cs typeface="Calibri"/>
+              <a:sym typeface="Calibri"/>
+            </a:endParaRPr>
+          </a:p>
+          <a:p>
+            <a:pPr marL="0" marR="0" lvl="0" indent="0" algn="l" rtl="0">
+              <a:lnSpc>
+                <a:spcPct val="100000"/>
+              </a:lnSpc>
+              <a:spcBef>
+                <a:spcPts val="0"/>
+              </a:spcBef>
+              <a:spcAft>
+                <a:spcPts val="0"/>
+              </a:spcAft>
+              <a:buClr>
+                <a:schemeClr val="dk1"/>
+              </a:buClr>
+              <a:buSzPts val="1100"/>
+              <a:buFont typeface="Arial"/>
+              <a:buNone/>
+            </a:pPr>
+            <a:r>
+              <a:rPr lang="en" sz="1300" b="1">
+                <a:solidFill>
+                  <a:srgbClr val="FF0000"/>
+                </a:solidFill>
+                <a:latin typeface="Calibri"/>
+                <a:ea typeface="Calibri"/>
+                <a:cs typeface="Calibri"/>
+                <a:sym typeface="Calibri"/>
+              </a:rPr>
+              <a:t>votes: 408,144</a:t>
+            </a:r>
+            <a:endParaRPr sz="1300" b="1">
+              <a:solidFill>
+                <a:srgbClr val="FF0000"/>
+              </a:solidFill>
+              <a:latin typeface="Calibri"/>
+              <a:ea typeface="Calibri"/>
+              <a:cs typeface="Calibri"/>
+              <a:sym typeface="Calibri"/>
+            </a:endParaRPr>
+          </a:p>
+          <a:p>
+            <a:pPr marL="0" marR="0" lvl="0" indent="0" algn="l" rtl="0">
+              <a:lnSpc>
+                <a:spcPct val="100000"/>
+              </a:lnSpc>
+              <a:spcBef>
+                <a:spcPts val="0"/>
+              </a:spcBef>
+              <a:spcAft>
+                <a:spcPts val="0"/>
+              </a:spcAft>
+              <a:buClr>
+                <a:schemeClr val="dk1"/>
+              </a:buClr>
+              <a:buSzPts val="1100"/>
+              <a:buFont typeface="Arial"/>
+              <a:buNone/>
+            </a:pPr>
+            <a:r>
+              <a:rPr lang="en" sz="1300" b="1">
+                <a:solidFill>
+                  <a:srgbClr val="FF0000"/>
+                </a:solidFill>
+                <a:latin typeface="Calibri"/>
+                <a:ea typeface="Calibri"/>
+                <a:cs typeface="Calibri"/>
+                <a:sym typeface="Calibri"/>
+              </a:rPr>
+              <a:t>March 13, 2024</a:t>
+            </a:r>
+            <a:endParaRPr sz="1300" b="0" i="0" u="none" strike="noStrike" cap="none">
+              <a:solidFill>
+                <a:schemeClr val="dk1"/>
+              </a:solidFill>
+              <a:latin typeface="Calibri"/>
+              <a:ea typeface="Calibri"/>
+              <a:cs typeface="Calibri"/>
+              <a:sym typeface="Calibri"/>
+            </a:endParaRPr>
+          </a:p>
+        </p:txBody>
+      </p:sp>
+      <p:sp>
+        <p:nvSpPr>
+          <p:cNvPr id="91" name="Google Shape;91;p17"/>
+          <p:cNvSpPr txBox="1"/>
+          <p:nvPr/>
+        </p:nvSpPr>
+        <p:spPr>
+          <a:xfrm>
+            <a:off x="7254050" y="421150"/>
+            <a:ext cx="1831500" cy="387900"/>
+          </a:xfrm>
+          <a:prstGeom prst="rect">
+            <a:avLst/>
+          </a:prstGeom>
+          <a:solidFill>
+            <a:srgbClr val="FFF2CC"/>
+          </a:solidFill>
+          <a:ln w="9525" cap="flat" cmpd="sng">
+            <a:solidFill>
+              <a:srgbClr val="FF0000"/>
+            </a:solidFill>
+            <a:prstDash val="solid"/>
+            <a:round/>
+            <a:headEnd type="none" w="sm" len="sm"/>
+            <a:tailEnd type="none" w="sm" len="sm"/>
+          </a:ln>
+        </p:spPr>
+        <p:txBody>
+          <a:bodyPr spcFirstLastPara="1" wrap="square" lIns="9125" tIns="9125" rIns="9125" bIns="9125" anchor="t" anchorCtr="0">
+            <a:spAutoFit/>
+          </a:bodyPr>
+          <a:lstStyle/>
+          <a:p>
+            <a:pPr marL="0" marR="0" lvl="0" indent="0" algn="l" rtl="0">
+              <a:lnSpc>
+                <a:spcPct val="100000"/>
+              </a:lnSpc>
+              <a:spcBef>
+                <a:spcPts val="0"/>
+              </a:spcBef>
+              <a:spcAft>
+                <a:spcPts val="0"/>
+              </a:spcAft>
+              <a:buClr>
+                <a:schemeClr val="dk1"/>
+              </a:buClr>
+              <a:buSzPts val="1100"/>
+              <a:buFont typeface="Arial"/>
+              <a:buNone/>
+            </a:pPr>
+            <a:r>
+              <a:rPr lang="en" sz="1200" b="0" i="0" u="none" strike="noStrike" cap="none">
+                <a:solidFill>
+                  <a:schemeClr val="dk1"/>
+                </a:solidFill>
+                <a:latin typeface="Calibri"/>
+                <a:ea typeface="Calibri"/>
+                <a:cs typeface="Calibri"/>
+                <a:sym typeface="Calibri"/>
+              </a:rPr>
+              <a:t>Starting Elo rating = 1000</a:t>
+            </a:r>
+            <a:endParaRPr sz="1200" b="0" i="0" u="none" strike="noStrike" cap="none">
+              <a:solidFill>
+                <a:schemeClr val="dk1"/>
+              </a:solidFill>
+              <a:latin typeface="Calibri"/>
+              <a:ea typeface="Calibri"/>
+              <a:cs typeface="Calibri"/>
+              <a:sym typeface="Calibri"/>
+            </a:endParaRPr>
+          </a:p>
+          <a:p>
+            <a:pPr marL="0" marR="0" lvl="0" indent="0" algn="l" rtl="0">
+              <a:lnSpc>
+                <a:spcPct val="100000"/>
+              </a:lnSpc>
+              <a:spcBef>
+                <a:spcPts val="0"/>
+              </a:spcBef>
+              <a:spcAft>
+                <a:spcPts val="0"/>
+              </a:spcAft>
+              <a:buClr>
+                <a:schemeClr val="dk1"/>
+              </a:buClr>
+              <a:buSzPts val="1100"/>
+              <a:buFont typeface="Arial"/>
+              <a:buNone/>
+            </a:pPr>
+            <a:r>
+              <a:rPr lang="en" sz="1200" b="0" i="0" u="none" strike="noStrike" cap="none">
+                <a:solidFill>
+                  <a:schemeClr val="dk1"/>
+                </a:solidFill>
+                <a:latin typeface="Calibri"/>
+                <a:ea typeface="Calibri"/>
+                <a:cs typeface="Calibri"/>
+                <a:sym typeface="Calibri"/>
+              </a:rPr>
+              <a:t>95% CI = Confidence Interval</a:t>
+            </a:r>
+            <a:endParaRPr sz="1200" b="0" i="0" u="none" strike="noStrike" cap="none">
+              <a:solidFill>
+                <a:schemeClr val="dk1"/>
+              </a:solidFill>
+              <a:latin typeface="Calibri"/>
+              <a:ea typeface="Calibri"/>
+              <a:cs typeface="Calibri"/>
+              <a:sym typeface="Calibri"/>
+            </a:endParaRPr>
+          </a:p>
+        </p:txBody>
+      </p:sp>
+      <p:sp>
+        <p:nvSpPr>
+          <p:cNvPr id="92" name="Google Shape;92;p17"/>
+          <p:cNvSpPr txBox="1"/>
+          <p:nvPr/>
+        </p:nvSpPr>
+        <p:spPr>
+          <a:xfrm>
+            <a:off x="-38048" y="-108050"/>
+            <a:ext cx="4151700" cy="492600"/>
+          </a:xfrm>
+          <a:prstGeom prst="rect">
+            <a:avLst/>
+          </a:prstGeom>
+          <a:noFill/>
+          <a:ln>
+            <a:noFill/>
+          </a:ln>
+        </p:spPr>
+        <p:txBody>
+          <a:bodyPr spcFirstLastPara="1" wrap="square" lIns="91425" tIns="91425" rIns="91425" bIns="91425" anchor="t" anchorCtr="0">
+            <a:spAutoFit/>
+          </a:bodyPr>
+          <a:lstStyle/>
+          <a:p>
+            <a:pPr marL="0" marR="0" lvl="0" indent="0" algn="l" rtl="0">
+              <a:lnSpc>
+                <a:spcPct val="100000"/>
+              </a:lnSpc>
+              <a:spcBef>
+                <a:spcPts val="0"/>
+              </a:spcBef>
+              <a:spcAft>
+                <a:spcPts val="0"/>
+              </a:spcAft>
+              <a:buClr>
+                <a:srgbClr val="000000"/>
+              </a:buClr>
+              <a:buSzPts val="2000"/>
+              <a:buFont typeface="Arial"/>
+              <a:buNone/>
+            </a:pPr>
+            <a:r>
+              <a:rPr lang="en" sz="2000" b="1" i="0" u="none" strike="noStrike" cap="none">
+                <a:solidFill>
+                  <a:schemeClr val="dk1"/>
+                </a:solidFill>
+                <a:latin typeface="Calibri"/>
+                <a:ea typeface="Calibri"/>
+                <a:cs typeface="Calibri"/>
+                <a:sym typeface="Calibri"/>
+              </a:rPr>
+              <a:t>Crowd-sourced "Arena" Leaderboard</a:t>
+            </a:r>
+            <a:endParaRPr sz="2000" b="1" i="0" u="none" strike="noStrike" cap="none">
+              <a:solidFill>
+                <a:srgbClr val="000000"/>
+              </a:solidFill>
+              <a:latin typeface="Calibri"/>
+              <a:ea typeface="Calibri"/>
+              <a:cs typeface="Calibri"/>
+              <a:sym typeface="Calibri"/>
+            </a:endParaRPr>
+          </a:p>
+        </p:txBody>
+      </p:sp>
+      <p:sp>
+        <p:nvSpPr>
+          <p:cNvPr id="93" name="Google Shape;93;p17"/>
+          <p:cNvSpPr txBox="1"/>
+          <p:nvPr/>
+        </p:nvSpPr>
+        <p:spPr>
+          <a:xfrm>
+            <a:off x="5535876" y="45850"/>
+            <a:ext cx="3549600" cy="338700"/>
+          </a:xfrm>
+          <a:prstGeom prst="rect">
+            <a:avLst/>
+          </a:prstGeom>
+          <a:noFill/>
+          <a:ln>
+            <a:noFill/>
+          </a:ln>
+        </p:spPr>
+        <p:txBody>
+          <a:bodyPr spcFirstLastPara="1" wrap="square" lIns="91425" tIns="91425" rIns="91425" bIns="91425" anchor="t" anchorCtr="0">
+            <a:spAutoFit/>
+          </a:bodyPr>
+          <a:lstStyle/>
+          <a:p>
+            <a:pPr marL="0" marR="0" lvl="0" indent="0" algn="l" rtl="0">
+              <a:lnSpc>
+                <a:spcPct val="100000"/>
+              </a:lnSpc>
+              <a:spcBef>
+                <a:spcPts val="0"/>
+              </a:spcBef>
+              <a:spcAft>
+                <a:spcPts val="0"/>
+              </a:spcAft>
+              <a:buClr>
+                <a:schemeClr val="dk1"/>
+              </a:buClr>
+              <a:buSzPts val="1100"/>
+              <a:buFont typeface="Arial"/>
+              <a:buNone/>
+            </a:pPr>
+            <a:r>
+              <a:rPr lang="en" sz="1000" b="0" i="0" u="sng" strike="noStrike" cap="none">
+                <a:solidFill>
+                  <a:schemeClr val="hlink"/>
+                </a:solidFill>
+                <a:latin typeface="Calibri"/>
+                <a:ea typeface="Calibri"/>
+                <a:cs typeface="Calibri"/>
+                <a:sym typeface="Calibri"/>
+                <a:hlinkClick r:id="rId3"/>
+              </a:rPr>
+              <a:t>https://huggingface.co/spaces/lmsys/chatbot-arena-leaderboard</a:t>
+            </a:r>
+            <a:r>
+              <a:rPr lang="en" sz="1000" b="0" i="0" u="none" strike="noStrike" cap="none">
+                <a:solidFill>
+                  <a:schemeClr val="dk1"/>
+                </a:solidFill>
+                <a:latin typeface="Calibri"/>
+                <a:ea typeface="Calibri"/>
+                <a:cs typeface="Calibri"/>
+                <a:sym typeface="Calibri"/>
+              </a:rPr>
+              <a:t> </a:t>
+            </a:r>
+            <a:endParaRPr sz="1300" b="0" i="0" u="none" strike="noStrike" cap="none">
+              <a:solidFill>
+                <a:schemeClr val="dk1"/>
+              </a:solidFill>
+              <a:latin typeface="Calibri"/>
+              <a:ea typeface="Calibri"/>
+              <a:cs typeface="Calibri"/>
+              <a:sym typeface="Calibri"/>
+            </a:endParaRPr>
+          </a:p>
+        </p:txBody>
+      </p:sp>
+      <p:pic>
+        <p:nvPicPr>
+          <p:cNvPr id="94" name="Google Shape;94;p17"/>
+          <p:cNvPicPr preferRelativeResize="0"/>
+          <p:nvPr/>
+        </p:nvPicPr>
+        <p:blipFill>
+          <a:blip r:embed="rId4" cstate="email">
+            <a:alphaModFix/>
+            <a:extLst>
+              <a:ext uri="{28A0092B-C50C-407E-A947-70E740481C1C}">
+                <a14:useLocalDpi xmlns:a14="http://schemas.microsoft.com/office/drawing/2010/main"/>
+              </a:ext>
+            </a:extLst>
+          </a:blip>
+          <a:stretch>
+            <a:fillRect/>
+          </a:stretch>
+        </p:blipFill>
+        <p:spPr>
+          <a:xfrm>
+            <a:off x="228600" y="460750"/>
+            <a:ext cx="5249295" cy="3352837"/>
+          </a:xfrm>
+          <a:prstGeom prst="rect">
+            <a:avLst/>
+          </a:prstGeom>
+          <a:noFill/>
+          <a:ln>
+            <a:noFill/>
+          </a:ln>
+        </p:spPr>
+      </p:pic>
+      <p:pic>
+        <p:nvPicPr>
+          <p:cNvPr id="95" name="Google Shape;95;p17"/>
+          <p:cNvPicPr preferRelativeResize="0"/>
+          <p:nvPr/>
+        </p:nvPicPr>
+        <p:blipFill rotWithShape="1">
+          <a:blip r:embed="rId5" cstate="email">
+            <a:alphaModFix/>
+            <a:extLst>
+              <a:ext uri="{28A0092B-C50C-407E-A947-70E740481C1C}">
+                <a14:useLocalDpi xmlns:a14="http://schemas.microsoft.com/office/drawing/2010/main"/>
+              </a:ext>
+            </a:extLst>
+          </a:blip>
+          <a:srcRect/>
+          <a:stretch/>
+        </p:blipFill>
+        <p:spPr>
+          <a:xfrm>
+            <a:off x="228600" y="3781002"/>
+            <a:ext cx="5249300" cy="1286298"/>
+          </a:xfrm>
+          <a:prstGeom prst="rect">
+            <a:avLst/>
+          </a:prstGeom>
+          <a:noFill/>
+          <a:ln>
+            <a:noFill/>
+          </a:ln>
+        </p:spPr>
+      </p:pic>
+      <p:sp>
+        <p:nvSpPr>
+          <p:cNvPr id="96" name="Google Shape;96;p17"/>
+          <p:cNvSpPr txBox="1"/>
+          <p:nvPr/>
+        </p:nvSpPr>
+        <p:spPr>
+          <a:xfrm>
+            <a:off x="5421775" y="2365750"/>
+            <a:ext cx="887400" cy="203100"/>
+          </a:xfrm>
+          <a:prstGeom prst="rect">
+            <a:avLst/>
+          </a:prstGeom>
+          <a:solidFill>
+            <a:srgbClr val="FFF2CC"/>
+          </a:solidFill>
+          <a:ln w="9525" cap="flat" cmpd="sng">
+            <a:solidFill>
+              <a:srgbClr val="FF0000"/>
+            </a:solidFill>
+            <a:prstDash val="solid"/>
+            <a:round/>
+            <a:headEnd type="none" w="sm" len="sm"/>
+            <a:tailEnd type="none" w="sm" len="sm"/>
+          </a:ln>
+        </p:spPr>
+        <p:txBody>
+          <a:bodyPr spcFirstLastPara="1" wrap="square" lIns="9125" tIns="9125" rIns="9125" bIns="9125" anchor="t" anchorCtr="0">
+            <a:spAutoFit/>
+          </a:bodyPr>
+          <a:lstStyle/>
+          <a:p>
+            <a:pPr marL="0" marR="0" lvl="0" indent="0" algn="ctr" rtl="0">
+              <a:lnSpc>
+                <a:spcPct val="100000"/>
+              </a:lnSpc>
+              <a:spcBef>
+                <a:spcPts val="0"/>
+              </a:spcBef>
+              <a:spcAft>
+                <a:spcPts val="0"/>
+              </a:spcAft>
+              <a:buClr>
+                <a:schemeClr val="dk1"/>
+              </a:buClr>
+              <a:buSzPts val="1100"/>
+              <a:buFont typeface="Arial"/>
+              <a:buNone/>
+            </a:pPr>
+            <a:r>
+              <a:rPr lang="en" sz="1200">
+                <a:solidFill>
+                  <a:schemeClr val="dk1"/>
+                </a:solidFill>
+                <a:latin typeface="Calibri"/>
+                <a:ea typeface="Calibri"/>
+                <a:cs typeface="Calibri"/>
+                <a:sym typeface="Calibri"/>
+              </a:rPr>
+              <a:t>open source</a:t>
+            </a:r>
+            <a:endParaRPr sz="1200" b="0" i="0" u="none" strike="noStrike" cap="none">
+              <a:solidFill>
+                <a:schemeClr val="dk1"/>
+              </a:solidFill>
+              <a:latin typeface="Calibri"/>
+              <a:ea typeface="Calibri"/>
+              <a:cs typeface="Calibri"/>
+              <a:sym typeface="Calibri"/>
+            </a:endParaRPr>
+          </a:p>
+        </p:txBody>
+      </p:sp>
+      <p:sp>
+        <p:nvSpPr>
+          <p:cNvPr id="97" name="Google Shape;97;p17"/>
+          <p:cNvSpPr txBox="1"/>
+          <p:nvPr/>
+        </p:nvSpPr>
+        <p:spPr>
+          <a:xfrm>
+            <a:off x="5421775" y="3796290"/>
+            <a:ext cx="887400" cy="203100"/>
+          </a:xfrm>
+          <a:prstGeom prst="rect">
+            <a:avLst/>
+          </a:prstGeom>
+          <a:solidFill>
+            <a:srgbClr val="FFF2CC"/>
+          </a:solidFill>
+          <a:ln w="9525" cap="flat" cmpd="sng">
+            <a:solidFill>
+              <a:srgbClr val="FF0000"/>
+            </a:solidFill>
+            <a:prstDash val="solid"/>
+            <a:round/>
+            <a:headEnd type="none" w="sm" len="sm"/>
+            <a:tailEnd type="none" w="sm" len="sm"/>
+          </a:ln>
+        </p:spPr>
+        <p:txBody>
+          <a:bodyPr spcFirstLastPara="1" wrap="square" lIns="9125" tIns="9125" rIns="9125" bIns="9125" anchor="t" anchorCtr="0">
+            <a:spAutoFit/>
+          </a:bodyPr>
+          <a:lstStyle/>
+          <a:p>
+            <a:pPr marL="0" marR="0" lvl="0" indent="0" algn="ctr" rtl="0">
+              <a:lnSpc>
+                <a:spcPct val="100000"/>
+              </a:lnSpc>
+              <a:spcBef>
+                <a:spcPts val="0"/>
+              </a:spcBef>
+              <a:spcAft>
+                <a:spcPts val="0"/>
+              </a:spcAft>
+              <a:buClr>
+                <a:schemeClr val="dk1"/>
+              </a:buClr>
+              <a:buSzPts val="1100"/>
+              <a:buFont typeface="Arial"/>
+              <a:buNone/>
+            </a:pPr>
+            <a:r>
+              <a:rPr lang="en" sz="1200">
+                <a:solidFill>
+                  <a:schemeClr val="dk1"/>
+                </a:solidFill>
+                <a:latin typeface="Calibri"/>
+                <a:ea typeface="Calibri"/>
+                <a:cs typeface="Calibri"/>
+                <a:sym typeface="Calibri"/>
+              </a:rPr>
+              <a:t>open source</a:t>
+            </a:r>
+            <a:endParaRPr sz="1200" b="0" i="0" u="none" strike="noStrike" cap="none">
+              <a:solidFill>
+                <a:schemeClr val="dk1"/>
+              </a:solidFill>
+              <a:latin typeface="Calibri"/>
+              <a:ea typeface="Calibri"/>
+              <a:cs typeface="Calibri"/>
+              <a:sym typeface="Calibri"/>
+            </a:endParaRPr>
+          </a:p>
+        </p:txBody>
+      </p:sp>
+      <p:sp>
+        <p:nvSpPr>
+          <p:cNvPr id="98" name="Google Shape;98;p17"/>
+          <p:cNvSpPr txBox="1"/>
+          <p:nvPr/>
+        </p:nvSpPr>
+        <p:spPr>
+          <a:xfrm>
+            <a:off x="5421775" y="4592860"/>
+            <a:ext cx="887400" cy="203100"/>
+          </a:xfrm>
+          <a:prstGeom prst="rect">
+            <a:avLst/>
+          </a:prstGeom>
+          <a:solidFill>
+            <a:srgbClr val="FFF2CC"/>
+          </a:solidFill>
+          <a:ln w="9525" cap="flat" cmpd="sng">
+            <a:solidFill>
+              <a:srgbClr val="FF0000"/>
+            </a:solidFill>
+            <a:prstDash val="solid"/>
+            <a:round/>
+            <a:headEnd type="none" w="sm" len="sm"/>
+            <a:tailEnd type="none" w="sm" len="sm"/>
+          </a:ln>
+        </p:spPr>
+        <p:txBody>
+          <a:bodyPr spcFirstLastPara="1" wrap="square" lIns="9125" tIns="9125" rIns="9125" bIns="9125" anchor="t" anchorCtr="0">
+            <a:spAutoFit/>
+          </a:bodyPr>
+          <a:lstStyle/>
+          <a:p>
+            <a:pPr marL="0" marR="0" lvl="0" indent="0" algn="ctr" rtl="0">
+              <a:lnSpc>
+                <a:spcPct val="100000"/>
+              </a:lnSpc>
+              <a:spcBef>
+                <a:spcPts val="0"/>
+              </a:spcBef>
+              <a:spcAft>
+                <a:spcPts val="0"/>
+              </a:spcAft>
+              <a:buClr>
+                <a:schemeClr val="dk1"/>
+              </a:buClr>
+              <a:buSzPts val="1100"/>
+              <a:buFont typeface="Arial"/>
+              <a:buNone/>
+            </a:pPr>
+            <a:r>
+              <a:rPr lang="en" sz="1200">
+                <a:solidFill>
+                  <a:schemeClr val="dk1"/>
+                </a:solidFill>
+                <a:latin typeface="Calibri"/>
+                <a:ea typeface="Calibri"/>
+                <a:cs typeface="Calibri"/>
+                <a:sym typeface="Calibri"/>
+              </a:rPr>
+              <a:t>open source</a:t>
+            </a:r>
+            <a:endParaRPr sz="1200" b="0" i="0" u="none" strike="noStrike" cap="none">
+              <a:solidFill>
+                <a:schemeClr val="dk1"/>
+              </a:solidFill>
+              <a:latin typeface="Calibri"/>
+              <a:ea typeface="Calibri"/>
+              <a:cs typeface="Calibri"/>
+              <a:sym typeface="Calibri"/>
+            </a:endParaRPr>
+          </a:p>
+        </p:txBody>
+      </p:sp>
+    </p:spTree>
+  </p:cSld>
+  <p:clrMapOvr>
+    <a:masterClrMapping/>
+  </p:clrMapOvr>
+</p:sld>
+</file>
+
+<file path=ppt/slides/slide6.xml><?xml version="1.0" encoding="utf-8"?>
+<p:sld xmlns:a="http://schemas.openxmlformats.org/drawingml/2006/main" xmlns:r="http://schemas.openxmlformats.org/officeDocument/2006/relationships" xmlns:p="http://schemas.openxmlformats.org/presentationml/2006/main">
+  <p:cSld>
+    <p:spTree>
+      <p:nvGrpSpPr>
+        <p:cNvPr id="1" name="Shape 102"/>
+        <p:cNvGrpSpPr/>
+        <p:nvPr/>
+      </p:nvGrpSpPr>
+      <p:grpSpPr>
+        <a:xfrm>
+          <a:off x="0" y="0"/>
+          <a:ext cx="0" cy="0"/>
+          <a:chOff x="0" y="0"/>
+          <a:chExt cx="0" cy="0"/>
+        </a:xfrm>
+      </p:grpSpPr>
+      <p:sp>
+        <p:nvSpPr>
+          <p:cNvPr id="103" name="Google Shape;103;p18"/>
+          <p:cNvSpPr txBox="1"/>
+          <p:nvPr/>
+        </p:nvSpPr>
+        <p:spPr>
+          <a:xfrm>
             <a:off x="72300" y="0"/>
             <a:ext cx="4133400" cy="326400"/>
           </a:xfrm>
@@ -24517,7 +26244,7 @@
       </p:sp>
       <p:sp>
         <p:nvSpPr>
-          <p:cNvPr id="83" name="Google Shape;83;p16"/>
+          <p:cNvPr id="104" name="Google Shape;104;p18"/>
           <p:cNvSpPr txBox="1"/>
           <p:nvPr/>
         </p:nvSpPr>
@@ -24956,13 +26683,13 @@
       </p:sp>
       <p:sp>
         <p:nvSpPr>
-          <p:cNvPr id="84" name="Google Shape;84;p16"/>
+          <p:cNvPr id="105" name="Google Shape;105;p18"/>
           <p:cNvSpPr txBox="1"/>
           <p:nvPr/>
         </p:nvSpPr>
         <p:spPr>
           <a:xfrm>
-            <a:off x="4689250" y="111425"/>
+            <a:off x="4689250" y="344779"/>
             <a:ext cx="4381500" cy="2539800"/>
           </a:xfrm>
           <a:prstGeom prst="rect">
@@ -25175,13 +26902,13 @@
       </p:sp>
       <p:sp>
         <p:nvSpPr>
-          <p:cNvPr id="85" name="Google Shape;85;p16"/>
+          <p:cNvPr id="106" name="Google Shape;106;p18"/>
           <p:cNvSpPr txBox="1"/>
           <p:nvPr/>
         </p:nvSpPr>
         <p:spPr>
           <a:xfrm>
-            <a:off x="4689250" y="2908025"/>
+            <a:off x="4689250" y="2966940"/>
             <a:ext cx="4381500" cy="1985700"/>
           </a:xfrm>
           <a:prstGeom prst="rect">
@@ -25514,7 +27241,7 @@
       </p:sp>
       <p:sp>
         <p:nvSpPr>
-          <p:cNvPr id="86" name="Google Shape;86;p16"/>
+          <p:cNvPr id="107" name="Google Shape;107;p18"/>
           <p:cNvSpPr txBox="1"/>
           <p:nvPr/>
         </p:nvSpPr>
@@ -25676,12 +27403,12 @@
 </p:sld>
 </file>
 
-<file path=ppt/slides/slide5.xml><?xml version="1.0" encoding="utf-8"?>
+<file path=ppt/slides/slide7.xml><?xml version="1.0" encoding="utf-8"?>
 <p:sld xmlns:a="http://schemas.openxmlformats.org/drawingml/2006/main" xmlns:r="http://schemas.openxmlformats.org/officeDocument/2006/relationships" xmlns:p="http://schemas.openxmlformats.org/presentationml/2006/main">
   <p:cSld>
     <p:spTree>
       <p:nvGrpSpPr>
-        <p:cNvPr id="1" name="Shape 90"/>
+        <p:cNvPr id="1" name="Shape 111"/>
         <p:cNvGrpSpPr/>
         <p:nvPr/>
       </p:nvGrpSpPr>
@@ -25695,7 +27422,7 @@
       </p:grpSpPr>
       <p:sp>
         <p:nvSpPr>
-          <p:cNvPr id="91" name="Google Shape;91;p17"/>
+          <p:cNvPr id="112" name="Google Shape;112;p19"/>
           <p:cNvSpPr txBox="1"/>
           <p:nvPr/>
         </p:nvSpPr>
@@ -25761,7 +27488,7 @@
       </p:sp>
       <p:sp>
         <p:nvSpPr>
-          <p:cNvPr id="92" name="Google Shape;92;p17"/>
+          <p:cNvPr id="113" name="Google Shape;113;p19"/>
           <p:cNvSpPr txBox="1"/>
           <p:nvPr/>
         </p:nvSpPr>
@@ -26044,7 +27771,7 @@
       </p:sp>
       <p:sp>
         <p:nvSpPr>
-          <p:cNvPr id="93" name="Google Shape;93;p17"/>
+          <p:cNvPr id="114" name="Google Shape;114;p19"/>
           <p:cNvSpPr txBox="1"/>
           <p:nvPr/>
         </p:nvSpPr>
@@ -26171,7 +27898,7 @@
       </p:sp>
       <p:sp>
         <p:nvSpPr>
-          <p:cNvPr id="94" name="Google Shape;94;p17"/>
+          <p:cNvPr id="115" name="Google Shape;115;p19"/>
           <p:cNvSpPr txBox="1"/>
           <p:nvPr/>
         </p:nvSpPr>
@@ -26220,6 +27947,18 @@
               <a:buNone/>
             </a:pPr>
             <a:r>
+              <a:rPr lang="en" sz="1300" b="1" i="0" u="none" strike="noStrike" cap="none">
+                <a:solidFill>
+                  <a:srgbClr val="FF0000"/>
+                </a:solidFill>
+                <a:latin typeface="Calibri"/>
+                <a:ea typeface="Calibri"/>
+                <a:cs typeface="Calibri"/>
+                <a:sym typeface="Calibri"/>
+              </a:rPr>
+              <a:t>LLM Jailbreaking</a:t>
+            </a:r>
+            <a:r>
               <a:rPr lang="en" sz="1300" b="0" i="0" u="none" strike="noStrike" cap="none">
                 <a:solidFill>
                   <a:srgbClr val="000000"/>
@@ -26229,7 +27968,7 @@
                 <a:cs typeface="Calibri"/>
                 <a:sym typeface="Calibri"/>
               </a:rPr>
-              <a:t>LLM Jailbreaking using </a:t>
+              <a:t> using </a:t>
             </a:r>
             <a:r>
               <a:rPr lang="en" sz="1300" b="1" i="0" u="none" strike="noStrike" cap="none">
@@ -26431,7 +28170,7 @@
       </p:sp>
       <p:pic>
         <p:nvPicPr>
-          <p:cNvPr id="95" name="Google Shape;95;p17"/>
+          <p:cNvPr id="116" name="Google Shape;116;p19"/>
           <p:cNvPicPr preferRelativeResize="0"/>
           <p:nvPr/>
         </p:nvPicPr>
@@ -26464,7 +28203,7 @@
       </p:pic>
       <p:sp>
         <p:nvSpPr>
-          <p:cNvPr id="96" name="Google Shape;96;p17"/>
+          <p:cNvPr id="117" name="Google Shape;117;p19"/>
           <p:cNvSpPr txBox="1"/>
           <p:nvPr/>
         </p:nvSpPr>
@@ -26551,7 +28290,7 @@
       </p:sp>
       <p:pic>
         <p:nvPicPr>
-          <p:cNvPr id="97" name="Google Shape;97;p17"/>
+          <p:cNvPr id="118" name="Google Shape;118;p19"/>
           <p:cNvPicPr preferRelativeResize="0"/>
           <p:nvPr/>
         </p:nvPicPr>
@@ -26584,14 +28323,14 @@
       </p:pic>
       <p:sp>
         <p:nvSpPr>
-          <p:cNvPr id="98" name="Google Shape;98;p17"/>
+          <p:cNvPr id="119" name="Google Shape;119;p19"/>
           <p:cNvSpPr txBox="1"/>
           <p:nvPr/>
         </p:nvSpPr>
         <p:spPr>
           <a:xfrm>
-            <a:off x="5566644" y="3022125"/>
-            <a:ext cx="3461100" cy="2031900"/>
+            <a:off x="5031726" y="2869725"/>
+            <a:ext cx="3996000" cy="2154900"/>
           </a:xfrm>
           <a:prstGeom prst="rect">
             <a:avLst/>
@@ -26633,7 +28372,7 @@
               <a:buNone/>
             </a:pPr>
             <a:r>
-              <a:rPr lang="en" sz="1200" b="1" i="0" u="none" strike="noStrike" cap="none">
+              <a:rPr lang="en" sz="1200" b="1">
                 <a:solidFill>
                   <a:srgbClr val="FF0000"/>
                 </a:solidFill>
@@ -26642,9 +28381,9 @@
                 <a:cs typeface="Calibri"/>
                 <a:sym typeface="Calibri"/>
               </a:rPr>
-              <a:t>New OpenAI Board:</a:t>
-            </a:r>
-            <a:endParaRPr sz="1200" b="1" i="0" u="none" strike="noStrike" cap="none">
+              <a:t>Google extracted ChatGPT’s Training Data using a silly trick.</a:t>
+            </a:r>
+            <a:endParaRPr sz="1200" b="1">
               <a:solidFill>
                 <a:srgbClr val="FF0000"/>
               </a:solidFill>
@@ -26655,38 +28394,39 @@
             </a:endParaRPr>
           </a:p>
           <a:p>
-            <a:pPr marL="457200" marR="0" lvl="0" indent="-304800" algn="l" rtl="0">
-              <a:lnSpc>
-                <a:spcPct val="100000"/>
-              </a:lnSpc>
-              <a:spcBef>
-                <a:spcPts val="0"/>
-              </a:spcBef>
-              <a:spcAft>
-                <a:spcPts val="0"/>
-              </a:spcAft>
-              <a:buClr>
-                <a:schemeClr val="dk1"/>
-              </a:buClr>
-              <a:buSzPts val="1200"/>
-              <a:buFont typeface="Calibri"/>
-              <a:buChar char="●"/>
-            </a:pPr>
-            <a:r>
-              <a:rPr lang="en" sz="1200" b="0" i="0" u="none" strike="noStrike" cap="none">
-                <a:solidFill>
-                  <a:schemeClr val="dk1"/>
-                </a:solidFill>
-                <a:latin typeface="Calibri"/>
-                <a:ea typeface="Calibri"/>
-                <a:cs typeface="Calibri"/>
-                <a:sym typeface="Calibri"/>
-              </a:rPr>
-              <a:t>Sam Altman (CEO)</a:t>
-            </a:r>
-            <a:endParaRPr sz="1200" b="0" i="0" u="none" strike="noStrike" cap="none">
-              <a:solidFill>
-                <a:schemeClr val="dk1"/>
+            <a:pPr marL="0" marR="0" lvl="0" indent="0" algn="l" rtl="0">
+              <a:lnSpc>
+                <a:spcPct val="100000"/>
+              </a:lnSpc>
+              <a:spcBef>
+                <a:spcPts val="0"/>
+              </a:spcBef>
+              <a:spcAft>
+                <a:spcPts val="0"/>
+              </a:spcAft>
+              <a:buClr>
+                <a:schemeClr val="dk1"/>
+              </a:buClr>
+              <a:buSzPts val="1100"/>
+              <a:buFont typeface="Arial"/>
+              <a:buNone/>
+            </a:pPr>
+            <a:r>
+              <a:rPr lang="en" sz="1000" u="sng">
+                <a:solidFill>
+                  <a:schemeClr val="hlink"/>
+                </a:solidFill>
+                <a:latin typeface="Calibri"/>
+                <a:ea typeface="Calibri"/>
+                <a:cs typeface="Calibri"/>
+                <a:sym typeface="Calibri"/>
+                <a:hlinkClick r:id="rId12"/>
+              </a:rPr>
+              <a:t>https://medium.datadriveninvestor.com/google-extracted-chatgpts-training-data-using-a-silly-trick-5544b1dada71</a:t>
+            </a:r>
+            <a:endParaRPr sz="1000">
+              <a:solidFill>
+                <a:srgbClr val="FF0000"/>
               </a:solidFill>
               <a:latin typeface="Calibri"/>
               <a:ea typeface="Calibri"/>
@@ -26695,25 +28435,25 @@
             </a:endParaRPr>
           </a:p>
           <a:p>
-            <a:pPr marL="457200" marR="0" lvl="0" indent="-304800" algn="l" rtl="0">
-              <a:lnSpc>
-                <a:spcPct val="100000"/>
-              </a:lnSpc>
-              <a:spcBef>
-                <a:spcPts val="0"/>
-              </a:spcBef>
-              <a:spcAft>
-                <a:spcPts val="0"/>
-              </a:spcAft>
-              <a:buClr>
-                <a:schemeClr val="dk1"/>
-              </a:buClr>
-              <a:buSzPts val="1200"/>
-              <a:buFont typeface="Calibri"/>
-              <a:buChar char="●"/>
-            </a:pPr>
-            <a:r>
-              <a:rPr lang="en" sz="1200" b="0" i="0" u="none" strike="noStrike" cap="none">
+            <a:pPr marL="0" marR="0" lvl="0" indent="0" algn="l" rtl="0">
+              <a:lnSpc>
+                <a:spcPct val="100000"/>
+              </a:lnSpc>
+              <a:spcBef>
+                <a:spcPts val="0"/>
+              </a:spcBef>
+              <a:spcAft>
+                <a:spcPts val="0"/>
+              </a:spcAft>
+              <a:buClr>
+                <a:schemeClr val="dk1"/>
+              </a:buClr>
+              <a:buSzPts val="1100"/>
+              <a:buFont typeface="Arial"/>
+              <a:buNone/>
+            </a:pPr>
+            <a:r>
+              <a:rPr lang="en" sz="1200">
                 <a:solidFill>
                   <a:schemeClr val="dk1"/>
                 </a:solidFill>
@@ -26722,9 +28462,33 @@
                 <a:cs typeface="Calibri"/>
                 <a:sym typeface="Calibri"/>
               </a:rPr>
-              <a:t>Sue Desmond-Hellmann (Gates foundation)</a:t>
-            </a:r>
-            <a:endParaRPr sz="1200" b="0" i="0" u="none" strike="noStrike" cap="none">
+              <a:t>The authors ask the model to </a:t>
+            </a:r>
+            <a:r>
+              <a:rPr lang="en" sz="1200">
+                <a:solidFill>
+                  <a:srgbClr val="FF0000"/>
+                </a:solidFill>
+                <a:latin typeface="Calibri"/>
+                <a:ea typeface="Calibri"/>
+                <a:cs typeface="Calibri"/>
+                <a:sym typeface="Calibri"/>
+              </a:rPr>
+              <a:t>“Repeat the word “poem” forever”</a:t>
+            </a:r>
+            <a:r>
+              <a:rPr lang="en" sz="1200">
+                <a:solidFill>
+                  <a:schemeClr val="dk1"/>
+                </a:solidFill>
+                <a:latin typeface="Calibri"/>
+                <a:ea typeface="Calibri"/>
+                <a:cs typeface="Calibri"/>
+                <a:sym typeface="Calibri"/>
+              </a:rPr>
+              <a:t> and sit back and watch as the model responds… </a:t>
+            </a:r>
+            <a:endParaRPr sz="1200">
               <a:solidFill>
                 <a:schemeClr val="dk1"/>
               </a:solidFill>
@@ -26735,25 +28499,25 @@
             </a:endParaRPr>
           </a:p>
           <a:p>
-            <a:pPr marL="457200" marR="0" lvl="0" indent="-304800" algn="l" rtl="0">
-              <a:lnSpc>
-                <a:spcPct val="100000"/>
-              </a:lnSpc>
-              <a:spcBef>
-                <a:spcPts val="0"/>
-              </a:spcBef>
-              <a:spcAft>
-                <a:spcPts val="0"/>
-              </a:spcAft>
-              <a:buClr>
-                <a:schemeClr val="dk1"/>
-              </a:buClr>
-              <a:buSzPts val="1200"/>
-              <a:buFont typeface="Calibri"/>
-              <a:buChar char="●"/>
-            </a:pPr>
-            <a:r>
-              <a:rPr lang="en" sz="1200" b="0" i="0" u="none" strike="noStrike" cap="none">
+            <a:pPr marL="0" marR="0" lvl="0" indent="0" algn="l" rtl="0">
+              <a:lnSpc>
+                <a:spcPct val="100000"/>
+              </a:lnSpc>
+              <a:spcBef>
+                <a:spcPts val="0"/>
+              </a:spcBef>
+              <a:spcAft>
+                <a:spcPts val="0"/>
+              </a:spcAft>
+              <a:buClr>
+                <a:schemeClr val="dk1"/>
+              </a:buClr>
+              <a:buSzPts val="1100"/>
+              <a:buFont typeface="Arial"/>
+              <a:buNone/>
+            </a:pPr>
+            <a:r>
+              <a:rPr lang="en" sz="1200">
                 <a:solidFill>
                   <a:schemeClr val="dk1"/>
                 </a:solidFill>
@@ -26762,9 +28526,9 @@
                 <a:cs typeface="Calibri"/>
                 <a:sym typeface="Calibri"/>
               </a:rPr>
-              <a:t>Nicole Seligman (Sony Entertainment)</a:t>
-            </a:r>
-            <a:endParaRPr sz="1200" b="0" i="0" u="none" strike="noStrike" cap="none">
+              <a:t>... the model emits a real email address and phone number of some unsuspecting entity. </a:t>
+            </a:r>
+            <a:endParaRPr sz="1200">
               <a:solidFill>
                 <a:schemeClr val="dk1"/>
               </a:solidFill>
@@ -26775,25 +28539,25 @@
             </a:endParaRPr>
           </a:p>
           <a:p>
-            <a:pPr marL="457200" marR="0" lvl="0" indent="-304800" algn="l" rtl="0">
-              <a:lnSpc>
-                <a:spcPct val="100000"/>
-              </a:lnSpc>
-              <a:spcBef>
-                <a:spcPts val="0"/>
-              </a:spcBef>
-              <a:spcAft>
-                <a:spcPts val="0"/>
-              </a:spcAft>
-              <a:buClr>
-                <a:schemeClr val="dk1"/>
-              </a:buClr>
-              <a:buSzPts val="1200"/>
-              <a:buFont typeface="Calibri"/>
-              <a:buChar char="●"/>
-            </a:pPr>
-            <a:r>
-              <a:rPr lang="en" sz="1200" b="0" i="0" u="none" strike="noStrike" cap="none">
+            <a:pPr marL="0" marR="0" lvl="0" indent="0" algn="l" rtl="0">
+              <a:lnSpc>
+                <a:spcPct val="100000"/>
+              </a:lnSpc>
+              <a:spcBef>
+                <a:spcPts val="0"/>
+              </a:spcBef>
+              <a:spcAft>
+                <a:spcPts val="0"/>
+              </a:spcAft>
+              <a:buClr>
+                <a:schemeClr val="dk1"/>
+              </a:buClr>
+              <a:buSzPts val="1100"/>
+              <a:buFont typeface="Arial"/>
+              <a:buNone/>
+            </a:pPr>
+            <a:r>
+              <a:rPr lang="en" sz="1200">
                 <a:solidFill>
                   <a:schemeClr val="dk1"/>
                 </a:solidFill>
@@ -26802,9 +28566,33 @@
                 <a:cs typeface="Calibri"/>
                 <a:sym typeface="Calibri"/>
               </a:rPr>
-              <a:t>Fidji Simo (Metrodora Institute)</a:t>
-            </a:r>
-            <a:endParaRPr sz="1200" b="0" i="0" u="none" strike="noStrike" cap="none">
+              <a:t>This happens rather often when running our attack. And in our strongest configuration, </a:t>
+            </a:r>
+            <a:r>
+              <a:rPr lang="en" sz="1200">
+                <a:solidFill>
+                  <a:srgbClr val="FF0000"/>
+                </a:solidFill>
+                <a:latin typeface="Calibri"/>
+                <a:ea typeface="Calibri"/>
+                <a:cs typeface="Calibri"/>
+                <a:sym typeface="Calibri"/>
+              </a:rPr>
+              <a:t>over five percent of the output ChatGPT emits is a direct verbatim 50-token-in-a-row copy from its training dataset</a:t>
+            </a:r>
+            <a:r>
+              <a:rPr lang="en" sz="1200">
+                <a:solidFill>
+                  <a:schemeClr val="dk1"/>
+                </a:solidFill>
+                <a:latin typeface="Calibri"/>
+                <a:ea typeface="Calibri"/>
+                <a:cs typeface="Calibri"/>
+                <a:sym typeface="Calibri"/>
+              </a:rPr>
+              <a:t>.”</a:t>
+            </a:r>
+            <a:endParaRPr sz="1200">
               <a:solidFill>
                 <a:schemeClr val="dk1"/>
               </a:solidFill>
@@ -26814,171 +28602,11 @@
               <a:sym typeface="Calibri"/>
             </a:endParaRPr>
           </a:p>
-          <a:p>
-            <a:pPr marL="457200" marR="0" lvl="0" indent="-304800" algn="l" rtl="0">
-              <a:lnSpc>
-                <a:spcPct val="100000"/>
-              </a:lnSpc>
-              <a:spcBef>
-                <a:spcPts val="0"/>
-              </a:spcBef>
-              <a:spcAft>
-                <a:spcPts val="0"/>
-              </a:spcAft>
-              <a:buClr>
-                <a:schemeClr val="dk1"/>
-              </a:buClr>
-              <a:buSzPts val="1200"/>
-              <a:buFont typeface="Calibri"/>
-              <a:buChar char="●"/>
-            </a:pPr>
-            <a:r>
-              <a:rPr lang="en" sz="1200" b="0" i="0" u="none" strike="noStrike" cap="none">
-                <a:solidFill>
-                  <a:schemeClr val="dk1"/>
-                </a:solidFill>
-                <a:latin typeface="Calibri"/>
-                <a:ea typeface="Calibri"/>
-                <a:cs typeface="Calibri"/>
-                <a:sym typeface="Calibri"/>
-              </a:rPr>
-              <a:t>Bret Taylor (Chairman, Salesforce)</a:t>
-            </a:r>
-            <a:endParaRPr sz="1200" b="0" i="0" u="none" strike="noStrike" cap="none">
-              <a:solidFill>
-                <a:schemeClr val="dk1"/>
-              </a:solidFill>
-              <a:latin typeface="Calibri"/>
-              <a:ea typeface="Calibri"/>
-              <a:cs typeface="Calibri"/>
-              <a:sym typeface="Calibri"/>
-            </a:endParaRPr>
-          </a:p>
-          <a:p>
-            <a:pPr marL="457200" marR="0" lvl="0" indent="-304800" algn="l" rtl="0">
-              <a:lnSpc>
-                <a:spcPct val="100000"/>
-              </a:lnSpc>
-              <a:spcBef>
-                <a:spcPts val="0"/>
-              </a:spcBef>
-              <a:spcAft>
-                <a:spcPts val="0"/>
-              </a:spcAft>
-              <a:buClr>
-                <a:schemeClr val="dk1"/>
-              </a:buClr>
-              <a:buSzPts val="1200"/>
-              <a:buFont typeface="Calibri"/>
-              <a:buChar char="●"/>
-            </a:pPr>
-            <a:r>
-              <a:rPr lang="en" sz="1200" b="0" i="0" u="none" strike="noStrike" cap="none">
-                <a:solidFill>
-                  <a:schemeClr val="dk1"/>
-                </a:solidFill>
-                <a:latin typeface="Calibri"/>
-                <a:ea typeface="Calibri"/>
-                <a:cs typeface="Calibri"/>
-                <a:sym typeface="Calibri"/>
-              </a:rPr>
-              <a:t>Adam D'Angelo: CEO of Quora</a:t>
-            </a:r>
-            <a:endParaRPr sz="1200" b="0" i="0" u="none" strike="noStrike" cap="none">
-              <a:solidFill>
-                <a:schemeClr val="dk1"/>
-              </a:solidFill>
-              <a:latin typeface="Calibri"/>
-              <a:ea typeface="Calibri"/>
-              <a:cs typeface="Calibri"/>
-              <a:sym typeface="Calibri"/>
-            </a:endParaRPr>
-          </a:p>
-          <a:p>
-            <a:pPr marL="457200" marR="0" lvl="0" indent="-304800" algn="l" rtl="0">
-              <a:lnSpc>
-                <a:spcPct val="100000"/>
-              </a:lnSpc>
-              <a:spcBef>
-                <a:spcPts val="0"/>
-              </a:spcBef>
-              <a:spcAft>
-                <a:spcPts val="0"/>
-              </a:spcAft>
-              <a:buClr>
-                <a:schemeClr val="dk1"/>
-              </a:buClr>
-              <a:buSzPts val="1200"/>
-              <a:buFont typeface="Calibri"/>
-              <a:buChar char="●"/>
-            </a:pPr>
-            <a:r>
-              <a:rPr lang="en" sz="1200" b="0" i="0" u="none" strike="noStrike" cap="none">
-                <a:solidFill>
-                  <a:schemeClr val="dk1"/>
-                </a:solidFill>
-                <a:latin typeface="Calibri"/>
-                <a:ea typeface="Calibri"/>
-                <a:cs typeface="Calibri"/>
-                <a:sym typeface="Calibri"/>
-              </a:rPr>
-              <a:t>Larry Summers (Economist, former Harvard president, former US Treasury Secretary)</a:t>
-            </a:r>
-            <a:endParaRPr sz="1200" b="0" i="0" u="none" strike="noStrike" cap="none">
-              <a:solidFill>
-                <a:schemeClr val="dk1"/>
-              </a:solidFill>
-              <a:latin typeface="Calibri"/>
-              <a:ea typeface="Calibri"/>
-              <a:cs typeface="Calibri"/>
-              <a:sym typeface="Calibri"/>
-            </a:endParaRPr>
-          </a:p>
-          <a:p>
-            <a:pPr marL="457200" marR="0" lvl="0" indent="-304800" algn="l" rtl="0">
-              <a:lnSpc>
-                <a:spcPct val="100000"/>
-              </a:lnSpc>
-              <a:spcBef>
-                <a:spcPts val="0"/>
-              </a:spcBef>
-              <a:spcAft>
-                <a:spcPts val="0"/>
-              </a:spcAft>
-              <a:buClr>
-                <a:schemeClr val="dk1"/>
-              </a:buClr>
-              <a:buSzPts val="1200"/>
-              <a:buFont typeface="Calibri"/>
-              <a:buChar char="●"/>
-            </a:pPr>
-            <a:r>
-              <a:rPr lang="en" sz="1200" b="0" i="0" u="none" strike="noStrike" cap="none">
-                <a:solidFill>
-                  <a:schemeClr val="dk1"/>
-                </a:solidFill>
-                <a:latin typeface="Calibri"/>
-                <a:ea typeface="Calibri"/>
-                <a:cs typeface="Calibri"/>
-                <a:sym typeface="Calibri"/>
-              </a:rPr>
-              <a:t>Microsoft observer seat</a:t>
-            </a:r>
-            <a:endParaRPr sz="1200" b="0" i="0" u="none" strike="noStrike" cap="none">
-              <a:solidFill>
-                <a:schemeClr val="dk1"/>
-              </a:solidFill>
-              <a:latin typeface="Calibri"/>
-              <a:ea typeface="Calibri"/>
-              <a:cs typeface="Calibri"/>
-              <a:sym typeface="Calibri"/>
-            </a:endParaRPr>
-          </a:p>
         </p:txBody>
       </p:sp>
       <p:sp>
         <p:nvSpPr>
-          <p:cNvPr id="99" name="Google Shape;99;p17"/>
+          <p:cNvPr id="120" name="Google Shape;120;p19"/>
           <p:cNvSpPr txBox="1"/>
           <p:nvPr/>
         </p:nvSpPr>
@@ -27338,12 +28966,12 @@
 </p:sld>
 </file>
 
-<file path=ppt/slides/slide6.xml><?xml version="1.0" encoding="utf-8"?>
+<file path=ppt/slides/slide8.xml><?xml version="1.0" encoding="utf-8"?>
 <p:sld xmlns:a="http://schemas.openxmlformats.org/drawingml/2006/main" xmlns:r="http://schemas.openxmlformats.org/officeDocument/2006/relationships" xmlns:p="http://schemas.openxmlformats.org/presentationml/2006/main">
   <p:cSld>
     <p:spTree>
       <p:nvGrpSpPr>
-        <p:cNvPr id="1" name="Shape 103"/>
+        <p:cNvPr id="1" name="Shape 124"/>
         <p:cNvGrpSpPr/>
         <p:nvPr/>
       </p:nvGrpSpPr>
@@ -27357,7 +28985,7 @@
       </p:grpSpPr>
       <p:sp>
         <p:nvSpPr>
-          <p:cNvPr id="104" name="Google Shape;104;p18"/>
+          <p:cNvPr id="125" name="Google Shape;125;p20"/>
           <p:cNvSpPr txBox="1"/>
           <p:nvPr/>
         </p:nvSpPr>
@@ -27423,7 +29051,7 @@
       </p:sp>
       <p:sp>
         <p:nvSpPr>
-          <p:cNvPr id="105" name="Google Shape;105;p18"/>
+          <p:cNvPr id="126" name="Google Shape;126;p20"/>
           <p:cNvSpPr txBox="1"/>
           <p:nvPr/>
         </p:nvSpPr>
@@ -27533,7 +29161,7 @@
       </p:sp>
       <p:sp>
         <p:nvSpPr>
-          <p:cNvPr id="106" name="Google Shape;106;p18"/>
+          <p:cNvPr id="127" name="Google Shape;127;p20"/>
           <p:cNvSpPr txBox="1"/>
           <p:nvPr/>
         </p:nvSpPr>
@@ -27655,7 +29283,7 @@
       </p:sp>
       <p:sp>
         <p:nvSpPr>
-          <p:cNvPr id="107" name="Google Shape;107;p18"/>
+          <p:cNvPr id="128" name="Google Shape;128;p20"/>
           <p:cNvSpPr txBox="1"/>
           <p:nvPr/>
         </p:nvSpPr>
@@ -27753,13 +29381,737 @@
       </p:sp>
       <p:sp>
         <p:nvSpPr>
-          <p:cNvPr id="108" name="Google Shape;108;p18"/>
+          <p:cNvPr id="129" name="Google Shape;129;p20"/>
           <p:cNvSpPr txBox="1"/>
           <p:nvPr/>
         </p:nvSpPr>
         <p:spPr>
           <a:xfrm>
-            <a:off x="119337" y="2678842"/>
+            <a:off x="4629350" y="4284925"/>
+            <a:ext cx="2760300" cy="390900"/>
+          </a:xfrm>
+          <a:prstGeom prst="rect">
+            <a:avLst/>
+          </a:prstGeom>
+          <a:solidFill>
+            <a:srgbClr val="FFF2CC"/>
+          </a:solidFill>
+          <a:ln w="9525" cap="flat" cmpd="sng">
+            <a:solidFill>
+              <a:srgbClr val="FF0000"/>
+            </a:solidFill>
+            <a:prstDash val="solid"/>
+            <a:round/>
+            <a:headEnd type="none" w="sm" len="sm"/>
+            <a:tailEnd type="none" w="sm" len="sm"/>
+          </a:ln>
+        </p:spPr>
+        <p:txBody>
+          <a:bodyPr spcFirstLastPara="1" wrap="square" lIns="18275" tIns="18275" rIns="18275" bIns="18275" anchor="t" anchorCtr="0">
+            <a:spAutoFit/>
+          </a:bodyPr>
+          <a:lstStyle/>
+          <a:p>
+            <a:pPr marL="0" marR="0" lvl="0" indent="0" algn="l" rtl="0">
+              <a:lnSpc>
+                <a:spcPct val="100000"/>
+              </a:lnSpc>
+              <a:spcBef>
+                <a:spcPts val="0"/>
+              </a:spcBef>
+              <a:spcAft>
+                <a:spcPts val="0"/>
+              </a:spcAft>
+              <a:buClr>
+                <a:schemeClr val="dk1"/>
+              </a:buClr>
+              <a:buSzPts val="1100"/>
+              <a:buFont typeface="Arial"/>
+              <a:buNone/>
+            </a:pPr>
+            <a:r>
+              <a:rPr lang="en" sz="1300" b="1" i="0" u="none" strike="noStrike" cap="none">
+                <a:solidFill>
+                  <a:srgbClr val="FF0000"/>
+                </a:solidFill>
+                <a:latin typeface="Calibri"/>
+                <a:ea typeface="Calibri"/>
+                <a:cs typeface="Calibri"/>
+                <a:sym typeface="Calibri"/>
+              </a:rPr>
+              <a:t>Prompt library</a:t>
+            </a:r>
+            <a:r>
+              <a:rPr lang="en" sz="1300" b="0" i="0" u="none" strike="noStrike" cap="none">
+                <a:solidFill>
+                  <a:schemeClr val="dk1"/>
+                </a:solidFill>
+                <a:latin typeface="Calibri"/>
+                <a:ea typeface="Calibri"/>
+                <a:cs typeface="Calibri"/>
+                <a:sym typeface="Calibri"/>
+              </a:rPr>
+              <a:t> - </a:t>
+            </a:r>
+            <a:r>
+              <a:rPr lang="en" sz="1000" b="0" i="0" u="sng" strike="noStrike" cap="none">
+                <a:solidFill>
+                  <a:schemeClr val="hlink"/>
+                </a:solidFill>
+                <a:latin typeface="Calibri"/>
+                <a:ea typeface="Calibri"/>
+                <a:cs typeface="Calibri"/>
+                <a:sym typeface="Calibri"/>
+                <a:hlinkClick r:id="rId3"/>
+              </a:rPr>
+              <a:t>https://docs.anthropic.com/claude/prompt-library</a:t>
+            </a:r>
+            <a:r>
+              <a:rPr lang="en" sz="1000" b="0" i="0" u="none" strike="noStrike" cap="none">
+                <a:solidFill>
+                  <a:schemeClr val="dk1"/>
+                </a:solidFill>
+                <a:latin typeface="Calibri"/>
+                <a:ea typeface="Calibri"/>
+                <a:cs typeface="Calibri"/>
+                <a:sym typeface="Calibri"/>
+              </a:rPr>
+              <a:t> </a:t>
+            </a:r>
+            <a:endParaRPr sz="1000" b="0" i="0" u="none" strike="noStrike" cap="none">
+              <a:solidFill>
+                <a:schemeClr val="dk1"/>
+              </a:solidFill>
+              <a:latin typeface="Calibri"/>
+              <a:ea typeface="Calibri"/>
+              <a:cs typeface="Calibri"/>
+              <a:sym typeface="Calibri"/>
+            </a:endParaRPr>
+          </a:p>
+        </p:txBody>
+      </p:sp>
+      <p:pic>
+        <p:nvPicPr>
+          <p:cNvPr id="130" name="Google Shape;130;p20"/>
+          <p:cNvPicPr preferRelativeResize="0"/>
+          <p:nvPr/>
+        </p:nvPicPr>
+        <p:blipFill rotWithShape="1">
+          <a:blip r:embed="rId4" cstate="email">
+            <a:alphaModFix/>
+            <a:extLst>
+              <a:ext uri="{28A0092B-C50C-407E-A947-70E740481C1C}">
+                <a14:useLocalDpi xmlns:a14="http://schemas.microsoft.com/office/drawing/2010/main"/>
+              </a:ext>
+            </a:extLst>
+          </a:blip>
+          <a:srcRect/>
+          <a:stretch/>
+        </p:blipFill>
+        <p:spPr>
+          <a:xfrm>
+            <a:off x="7441075" y="3352882"/>
+            <a:ext cx="1629133" cy="1728375"/>
+          </a:xfrm>
+          <a:prstGeom prst="rect">
+            <a:avLst/>
+          </a:prstGeom>
+          <a:noFill/>
+          <a:ln w="9525" cap="flat" cmpd="sng">
+            <a:solidFill>
+              <a:srgbClr val="3C78D8"/>
+            </a:solidFill>
+            <a:prstDash val="solid"/>
+            <a:round/>
+            <a:headEnd type="none" w="sm" len="sm"/>
+            <a:tailEnd type="none" w="sm" len="sm"/>
+          </a:ln>
+        </p:spPr>
+      </p:pic>
+      <p:sp>
+        <p:nvSpPr>
+          <p:cNvPr id="131" name="Google Shape;131;p20"/>
+          <p:cNvSpPr txBox="1"/>
+          <p:nvPr/>
+        </p:nvSpPr>
+        <p:spPr>
+          <a:xfrm>
+            <a:off x="119337" y="2671151"/>
+            <a:ext cx="4381500" cy="544800"/>
+          </a:xfrm>
+          <a:prstGeom prst="rect">
+            <a:avLst/>
+          </a:prstGeom>
+          <a:solidFill>
+            <a:srgbClr val="FFF2CC"/>
+          </a:solidFill>
+          <a:ln w="9525" cap="flat" cmpd="sng">
+            <a:solidFill>
+              <a:srgbClr val="FF0000"/>
+            </a:solidFill>
+            <a:prstDash val="solid"/>
+            <a:round/>
+            <a:headEnd type="none" w="sm" len="sm"/>
+            <a:tailEnd type="none" w="sm" len="sm"/>
+          </a:ln>
+        </p:spPr>
+        <p:txBody>
+          <a:bodyPr spcFirstLastPara="1" wrap="square" lIns="18275" tIns="18275" rIns="18275" bIns="18275" anchor="t" anchorCtr="0">
+            <a:spAutoFit/>
+          </a:bodyPr>
+          <a:lstStyle/>
+          <a:p>
+            <a:pPr marL="0" marR="0" lvl="0" indent="0" algn="l" rtl="0">
+              <a:lnSpc>
+                <a:spcPct val="100000"/>
+              </a:lnSpc>
+              <a:spcBef>
+                <a:spcPts val="0"/>
+              </a:spcBef>
+              <a:spcAft>
+                <a:spcPts val="0"/>
+              </a:spcAft>
+              <a:buClr>
+                <a:schemeClr val="dk1"/>
+              </a:buClr>
+              <a:buSzPts val="1100"/>
+              <a:buFont typeface="Arial"/>
+              <a:buNone/>
+            </a:pPr>
+            <a:r>
+              <a:rPr lang="en" sz="1300" b="1" i="0" u="none" strike="noStrike" cap="none">
+                <a:solidFill>
+                  <a:srgbClr val="FF0000"/>
+                </a:solidFill>
+                <a:latin typeface="Calibri"/>
+                <a:ea typeface="Calibri"/>
+                <a:cs typeface="Calibri"/>
+                <a:sym typeface="Calibri"/>
+              </a:rPr>
+              <a:t>Train Mixtral on consumer hardware</a:t>
+            </a:r>
+            <a:r>
+              <a:rPr lang="en" sz="1300" b="0" i="0" u="none" strike="noStrike" cap="none">
+                <a:solidFill>
+                  <a:schemeClr val="dk1"/>
+                </a:solidFill>
+                <a:latin typeface="Calibri"/>
+                <a:ea typeface="Calibri"/>
+                <a:cs typeface="Calibri"/>
+                <a:sym typeface="Calibri"/>
+              </a:rPr>
+              <a:t>:</a:t>
+            </a:r>
+            <a:endParaRPr sz="1300" b="0" i="0" u="none" strike="noStrike" cap="none">
+              <a:solidFill>
+                <a:schemeClr val="dk1"/>
+              </a:solidFill>
+              <a:latin typeface="Calibri"/>
+              <a:ea typeface="Calibri"/>
+              <a:cs typeface="Calibri"/>
+              <a:sym typeface="Calibri"/>
+            </a:endParaRPr>
+          </a:p>
+          <a:p>
+            <a:pPr marL="0" marR="0" lvl="0" indent="0" algn="l" rtl="0">
+              <a:lnSpc>
+                <a:spcPct val="100000"/>
+              </a:lnSpc>
+              <a:spcBef>
+                <a:spcPts val="0"/>
+              </a:spcBef>
+              <a:spcAft>
+                <a:spcPts val="0"/>
+              </a:spcAft>
+              <a:buClr>
+                <a:schemeClr val="dk1"/>
+              </a:buClr>
+              <a:buSzPts val="1100"/>
+              <a:buFont typeface="Arial"/>
+              <a:buNone/>
+            </a:pPr>
+            <a:r>
+              <a:rPr lang="en" sz="1000" b="0" i="0" u="sng" strike="noStrike" cap="none">
+                <a:solidFill>
+                  <a:schemeClr val="hlink"/>
+                </a:solidFill>
+                <a:latin typeface="Calibri"/>
+                <a:ea typeface="Calibri"/>
+                <a:cs typeface="Calibri"/>
+                <a:sym typeface="Calibri"/>
+                <a:hlinkClick r:id="rId5"/>
+              </a:rPr>
+              <a:t>https://github.com/OpenAccess-AI-Collective/axolotl/blob/main/examples/mistral/mixtral-qlora-fsdp.yml</a:t>
+            </a:r>
+            <a:r>
+              <a:rPr lang="en" sz="1000" b="0" i="0" u="none" strike="noStrike" cap="none">
+                <a:solidFill>
+                  <a:schemeClr val="dk1"/>
+                </a:solidFill>
+                <a:latin typeface="Calibri"/>
+                <a:ea typeface="Calibri"/>
+                <a:cs typeface="Calibri"/>
+                <a:sym typeface="Calibri"/>
+              </a:rPr>
+              <a:t>  </a:t>
+            </a:r>
+            <a:endParaRPr sz="1000" b="0" i="0" u="none" strike="noStrike" cap="none">
+              <a:solidFill>
+                <a:schemeClr val="dk1"/>
+              </a:solidFill>
+              <a:latin typeface="Calibri"/>
+              <a:ea typeface="Calibri"/>
+              <a:cs typeface="Calibri"/>
+              <a:sym typeface="Calibri"/>
+            </a:endParaRPr>
+          </a:p>
+        </p:txBody>
+      </p:sp>
+      <p:sp>
+        <p:nvSpPr>
+          <p:cNvPr id="132" name="Google Shape;132;p20"/>
+          <p:cNvSpPr txBox="1"/>
+          <p:nvPr/>
+        </p:nvSpPr>
+        <p:spPr>
+          <a:xfrm>
+            <a:off x="119325" y="3276054"/>
+            <a:ext cx="4381500" cy="390900"/>
+          </a:xfrm>
+          <a:prstGeom prst="rect">
+            <a:avLst/>
+          </a:prstGeom>
+          <a:solidFill>
+            <a:srgbClr val="FFF2CC"/>
+          </a:solidFill>
+          <a:ln w="9525" cap="flat" cmpd="sng">
+            <a:solidFill>
+              <a:srgbClr val="FF0000"/>
+            </a:solidFill>
+            <a:prstDash val="solid"/>
+            <a:round/>
+            <a:headEnd type="none" w="sm" len="sm"/>
+            <a:tailEnd type="none" w="sm" len="sm"/>
+          </a:ln>
+        </p:spPr>
+        <p:txBody>
+          <a:bodyPr spcFirstLastPara="1" wrap="square" lIns="18275" tIns="18275" rIns="18275" bIns="18275" anchor="t" anchorCtr="0">
+            <a:spAutoFit/>
+          </a:bodyPr>
+          <a:lstStyle/>
+          <a:p>
+            <a:pPr marL="0" marR="0" lvl="0" indent="0" algn="l" rtl="0">
+              <a:lnSpc>
+                <a:spcPct val="100000"/>
+              </a:lnSpc>
+              <a:spcBef>
+                <a:spcPts val="0"/>
+              </a:spcBef>
+              <a:spcAft>
+                <a:spcPts val="0"/>
+              </a:spcAft>
+              <a:buClr>
+                <a:schemeClr val="dk1"/>
+              </a:buClr>
+              <a:buSzPts val="1100"/>
+              <a:buFont typeface="Arial"/>
+              <a:buNone/>
+            </a:pPr>
+            <a:r>
+              <a:rPr lang="en" sz="1300" b="1">
+                <a:solidFill>
+                  <a:srgbClr val="FF0000"/>
+                </a:solidFill>
+                <a:latin typeface="Calibri"/>
+                <a:ea typeface="Calibri"/>
+                <a:cs typeface="Calibri"/>
+                <a:sym typeface="Calibri"/>
+              </a:rPr>
+              <a:t>x.ai </a:t>
+            </a:r>
+            <a:r>
+              <a:rPr lang="en" sz="1300">
+                <a:solidFill>
+                  <a:schemeClr val="dk1"/>
+                </a:solidFill>
+                <a:latin typeface="Calibri"/>
+                <a:ea typeface="Calibri"/>
+                <a:cs typeface="Calibri"/>
+                <a:sym typeface="Calibri"/>
+              </a:rPr>
+              <a:t>- open-sourcing </a:t>
+            </a:r>
+            <a:r>
+              <a:rPr lang="en" sz="1300" b="1">
+                <a:solidFill>
+                  <a:srgbClr val="FF0000"/>
+                </a:solidFill>
+                <a:latin typeface="Calibri"/>
+                <a:ea typeface="Calibri"/>
+                <a:cs typeface="Calibri"/>
+                <a:sym typeface="Calibri"/>
+              </a:rPr>
+              <a:t>Grok</a:t>
+            </a:r>
+            <a:r>
+              <a:rPr lang="en" sz="1300">
+                <a:solidFill>
+                  <a:schemeClr val="dk1"/>
+                </a:solidFill>
+                <a:latin typeface="Calibri"/>
+                <a:ea typeface="Calibri"/>
+                <a:cs typeface="Calibri"/>
+                <a:sym typeface="Calibri"/>
+              </a:rPr>
+              <a:t> this week !</a:t>
+            </a:r>
+            <a:endParaRPr sz="1300">
+              <a:solidFill>
+                <a:schemeClr val="dk1"/>
+              </a:solidFill>
+              <a:latin typeface="Calibri"/>
+              <a:ea typeface="Calibri"/>
+              <a:cs typeface="Calibri"/>
+              <a:sym typeface="Calibri"/>
+            </a:endParaRPr>
+          </a:p>
+          <a:p>
+            <a:pPr marL="0" marR="0" lvl="0" indent="0" algn="l" rtl="0">
+              <a:lnSpc>
+                <a:spcPct val="100000"/>
+              </a:lnSpc>
+              <a:spcBef>
+                <a:spcPts val="0"/>
+              </a:spcBef>
+              <a:spcAft>
+                <a:spcPts val="0"/>
+              </a:spcAft>
+              <a:buClr>
+                <a:schemeClr val="dk1"/>
+              </a:buClr>
+              <a:buSzPts val="1100"/>
+              <a:buFont typeface="Arial"/>
+              <a:buNone/>
+            </a:pPr>
+            <a:r>
+              <a:rPr lang="en" sz="1000" u="sng">
+                <a:solidFill>
+                  <a:schemeClr val="hlink"/>
+                </a:solidFill>
+                <a:latin typeface="Calibri"/>
+                <a:ea typeface="Calibri"/>
+                <a:cs typeface="Calibri"/>
+                <a:sym typeface="Calibri"/>
+                <a:hlinkClick r:id="rId6"/>
+              </a:rPr>
+              <a:t>https://twitter.com/elonmusk/status/1767108624038449405</a:t>
+            </a:r>
+            <a:r>
+              <a:rPr lang="en" sz="1000">
+                <a:solidFill>
+                  <a:schemeClr val="dk1"/>
+                </a:solidFill>
+                <a:latin typeface="Calibri"/>
+                <a:ea typeface="Calibri"/>
+                <a:cs typeface="Calibri"/>
+                <a:sym typeface="Calibri"/>
+              </a:rPr>
+              <a:t> </a:t>
+            </a:r>
+            <a:endParaRPr sz="1000">
+              <a:solidFill>
+                <a:schemeClr val="dk1"/>
+              </a:solidFill>
+              <a:latin typeface="Calibri"/>
+              <a:ea typeface="Calibri"/>
+              <a:cs typeface="Calibri"/>
+              <a:sym typeface="Calibri"/>
+            </a:endParaRPr>
+          </a:p>
+        </p:txBody>
+      </p:sp>
+      <p:sp>
+        <p:nvSpPr>
+          <p:cNvPr id="133" name="Google Shape;133;p20"/>
+          <p:cNvSpPr txBox="1"/>
+          <p:nvPr/>
+        </p:nvSpPr>
+        <p:spPr>
+          <a:xfrm>
+            <a:off x="119325" y="3727054"/>
+            <a:ext cx="4381500" cy="437100"/>
+          </a:xfrm>
+          <a:prstGeom prst="rect">
+            <a:avLst/>
+          </a:prstGeom>
+          <a:solidFill>
+            <a:srgbClr val="FFF2CC"/>
+          </a:solidFill>
+          <a:ln w="9525" cap="flat" cmpd="sng">
+            <a:solidFill>
+              <a:srgbClr val="FF0000"/>
+            </a:solidFill>
+            <a:prstDash val="solid"/>
+            <a:round/>
+            <a:headEnd type="none" w="sm" len="sm"/>
+            <a:tailEnd type="none" w="sm" len="sm"/>
+          </a:ln>
+        </p:spPr>
+        <p:txBody>
+          <a:bodyPr spcFirstLastPara="1" wrap="square" lIns="18275" tIns="18275" rIns="18275" bIns="18275" anchor="t" anchorCtr="0">
+            <a:spAutoFit/>
+          </a:bodyPr>
+          <a:lstStyle/>
+          <a:p>
+            <a:pPr marL="0" marR="0" lvl="0" indent="0" algn="l" rtl="0">
+              <a:lnSpc>
+                <a:spcPct val="100000"/>
+              </a:lnSpc>
+              <a:spcBef>
+                <a:spcPts val="0"/>
+              </a:spcBef>
+              <a:spcAft>
+                <a:spcPts val="0"/>
+              </a:spcAft>
+              <a:buClr>
+                <a:schemeClr val="dk1"/>
+              </a:buClr>
+              <a:buSzPts val="1100"/>
+              <a:buFont typeface="Arial"/>
+              <a:buNone/>
+            </a:pPr>
+            <a:r>
+              <a:rPr lang="en" sz="1300">
+                <a:solidFill>
+                  <a:schemeClr val="dk1"/>
+                </a:solidFill>
+                <a:latin typeface="Calibri"/>
+                <a:ea typeface="Calibri"/>
+                <a:cs typeface="Calibri"/>
+                <a:sym typeface="Calibri"/>
+              </a:rPr>
+              <a:t>One year anniversary of </a:t>
+            </a:r>
+            <a:r>
+              <a:rPr lang="en" sz="1300" b="1">
+                <a:solidFill>
+                  <a:srgbClr val="FF0000"/>
+                </a:solidFill>
+                <a:latin typeface="Calibri"/>
+                <a:ea typeface="Calibri"/>
+                <a:cs typeface="Calibri"/>
+                <a:sym typeface="Calibri"/>
+              </a:rPr>
+              <a:t>llama.cpp</a:t>
+            </a:r>
+            <a:r>
+              <a:rPr lang="en" sz="1300">
+                <a:solidFill>
+                  <a:schemeClr val="dk1"/>
+                </a:solidFill>
+                <a:latin typeface="Calibri"/>
+                <a:ea typeface="Calibri"/>
+                <a:cs typeface="Calibri"/>
+                <a:sym typeface="Calibri"/>
+              </a:rPr>
+              <a:t> (March 9, 2023). </a:t>
+            </a:r>
+            <a:endParaRPr sz="1300">
+              <a:solidFill>
+                <a:schemeClr val="dk1"/>
+              </a:solidFill>
+              <a:latin typeface="Calibri"/>
+              <a:ea typeface="Calibri"/>
+              <a:cs typeface="Calibri"/>
+              <a:sym typeface="Calibri"/>
+            </a:endParaRPr>
+          </a:p>
+          <a:p>
+            <a:pPr marL="0" marR="0" lvl="0" indent="0" algn="l" rtl="0">
+              <a:lnSpc>
+                <a:spcPct val="100000"/>
+              </a:lnSpc>
+              <a:spcBef>
+                <a:spcPts val="0"/>
+              </a:spcBef>
+              <a:spcAft>
+                <a:spcPts val="0"/>
+              </a:spcAft>
+              <a:buClr>
+                <a:schemeClr val="dk1"/>
+              </a:buClr>
+              <a:buSzPts val="1100"/>
+              <a:buFont typeface="Arial"/>
+              <a:buNone/>
+            </a:pPr>
+            <a:r>
+              <a:rPr lang="en" sz="1300" u="sng">
+                <a:solidFill>
+                  <a:schemeClr val="hlink"/>
+                </a:solidFill>
+                <a:latin typeface="Calibri"/>
+                <a:ea typeface="Calibri"/>
+                <a:cs typeface="Calibri"/>
+                <a:sym typeface="Calibri"/>
+                <a:hlinkClick r:id="rId7"/>
+              </a:rPr>
+              <a:t>https://github.com/ggerganov/llama.cpp</a:t>
+            </a:r>
+            <a:r>
+              <a:rPr lang="en" sz="1300">
+                <a:solidFill>
+                  <a:schemeClr val="dk1"/>
+                </a:solidFill>
+                <a:latin typeface="Calibri"/>
+                <a:ea typeface="Calibri"/>
+                <a:cs typeface="Calibri"/>
+                <a:sym typeface="Calibri"/>
+              </a:rPr>
+              <a:t> </a:t>
+            </a:r>
+            <a:endParaRPr sz="1300">
+              <a:solidFill>
+                <a:schemeClr val="dk1"/>
+              </a:solidFill>
+              <a:latin typeface="Calibri"/>
+              <a:ea typeface="Calibri"/>
+              <a:cs typeface="Calibri"/>
+              <a:sym typeface="Calibri"/>
+            </a:endParaRPr>
+          </a:p>
+        </p:txBody>
+      </p:sp>
+      <p:sp>
+        <p:nvSpPr>
+          <p:cNvPr id="134" name="Google Shape;134;p20"/>
+          <p:cNvSpPr txBox="1"/>
+          <p:nvPr/>
+        </p:nvSpPr>
+        <p:spPr>
+          <a:xfrm>
+            <a:off x="119325" y="4261829"/>
+            <a:ext cx="4381500" cy="437100"/>
+          </a:xfrm>
+          <a:prstGeom prst="rect">
+            <a:avLst/>
+          </a:prstGeom>
+          <a:solidFill>
+            <a:srgbClr val="FFF2CC"/>
+          </a:solidFill>
+          <a:ln w="9525" cap="flat" cmpd="sng">
+            <a:solidFill>
+              <a:srgbClr val="FF0000"/>
+            </a:solidFill>
+            <a:prstDash val="solid"/>
+            <a:round/>
+            <a:headEnd type="none" w="sm" len="sm"/>
+            <a:tailEnd type="none" w="sm" len="sm"/>
+          </a:ln>
+        </p:spPr>
+        <p:txBody>
+          <a:bodyPr spcFirstLastPara="1" wrap="square" lIns="18275" tIns="18275" rIns="18275" bIns="18275" anchor="t" anchorCtr="0">
+            <a:spAutoFit/>
+          </a:bodyPr>
+          <a:lstStyle/>
+          <a:p>
+            <a:pPr marL="0" marR="0" lvl="0" indent="0" algn="l" rtl="0">
+              <a:lnSpc>
+                <a:spcPct val="100000"/>
+              </a:lnSpc>
+              <a:spcBef>
+                <a:spcPts val="0"/>
+              </a:spcBef>
+              <a:spcAft>
+                <a:spcPts val="0"/>
+              </a:spcAft>
+              <a:buClr>
+                <a:schemeClr val="dk1"/>
+              </a:buClr>
+              <a:buSzPts val="1100"/>
+              <a:buFont typeface="Arial"/>
+              <a:buNone/>
+            </a:pPr>
+            <a:r>
+              <a:rPr lang="en" sz="1300" b="1">
+                <a:solidFill>
+                  <a:srgbClr val="FF0000"/>
+                </a:solidFill>
+                <a:latin typeface="Calibri"/>
+                <a:ea typeface="Calibri"/>
+                <a:cs typeface="Calibri"/>
+                <a:sym typeface="Calibri"/>
+              </a:rPr>
+              <a:t>Fireworks.ai</a:t>
+            </a:r>
+            <a:r>
+              <a:rPr lang="en" sz="1300">
+                <a:solidFill>
+                  <a:schemeClr val="dk1"/>
+                </a:solidFill>
+                <a:latin typeface="Calibri"/>
+                <a:ea typeface="Calibri"/>
+                <a:cs typeface="Calibri"/>
+                <a:sym typeface="Calibri"/>
+              </a:rPr>
+              <a:t> - very fast and cheap AI service</a:t>
+            </a:r>
+            <a:br>
+              <a:rPr lang="en" sz="1300">
+                <a:solidFill>
+                  <a:schemeClr val="dk1"/>
+                </a:solidFill>
+                <a:latin typeface="Calibri"/>
+                <a:ea typeface="Calibri"/>
+                <a:cs typeface="Calibri"/>
+                <a:sym typeface="Calibri"/>
+              </a:rPr>
+            </a:br>
+            <a:r>
+              <a:rPr lang="en" sz="1300" u="sng">
+                <a:solidFill>
+                  <a:schemeClr val="hlink"/>
+                </a:solidFill>
+                <a:latin typeface="Calibri"/>
+                <a:ea typeface="Calibri"/>
+                <a:cs typeface="Calibri"/>
+                <a:sym typeface="Calibri"/>
+                <a:hlinkClick r:id="rId8"/>
+              </a:rPr>
+              <a:t>https://fireworks.ai</a:t>
+            </a:r>
+            <a:r>
+              <a:rPr lang="en" sz="1300">
+                <a:solidFill>
+                  <a:schemeClr val="dk1"/>
+                </a:solidFill>
+                <a:latin typeface="Calibri"/>
+                <a:ea typeface="Calibri"/>
+                <a:cs typeface="Calibri"/>
+                <a:sym typeface="Calibri"/>
+              </a:rPr>
+              <a:t> </a:t>
+            </a:r>
+            <a:endParaRPr sz="1300">
+              <a:solidFill>
+                <a:schemeClr val="dk1"/>
+              </a:solidFill>
+              <a:latin typeface="Calibri"/>
+              <a:ea typeface="Calibri"/>
+              <a:cs typeface="Calibri"/>
+              <a:sym typeface="Calibri"/>
+            </a:endParaRPr>
+          </a:p>
+        </p:txBody>
+      </p:sp>
+      <p:sp>
+        <p:nvSpPr>
+          <p:cNvPr id="135" name="Google Shape;135;p20"/>
+          <p:cNvSpPr txBox="1"/>
+          <p:nvPr/>
+        </p:nvSpPr>
+        <p:spPr>
+          <a:xfrm>
+            <a:off x="119325" y="4796604"/>
             <a:ext cx="4381500" cy="237000"/>
           </a:xfrm>
           <a:prstGeom prst="rect">
@@ -27802,7 +30154,7 @@
               <a:buNone/>
             </a:pPr>
             <a:r>
-              <a:rPr lang="en" sz="1300" b="1" i="0" u="none" strike="noStrike" cap="none">
+              <a:rPr lang="en" sz="1300" b="1">
                 <a:solidFill>
                   <a:srgbClr val="FF0000"/>
                 </a:solidFill>
@@ -27811,10 +30163,10 @@
                 <a:cs typeface="Calibri"/>
                 <a:sym typeface="Calibri"/>
               </a:rPr>
-              <a:t>Prompt library</a:t>
-            </a:r>
-            <a:r>
-              <a:rPr lang="en" sz="1300" b="0" i="0" u="none" strike="noStrike" cap="none">
+              <a:t>GroqCloud</a:t>
+            </a:r>
+            <a:r>
+              <a:rPr lang="en" sz="1300">
                 <a:solidFill>
                   <a:schemeClr val="dk1"/>
                 </a:solidFill>
@@ -27823,10 +30175,47 @@
                 <a:cs typeface="Calibri"/>
                 <a:sym typeface="Calibri"/>
               </a:rPr>
+              <a:t> - API for AI </a:t>
+            </a:r>
+            <a:r>
+              <a:rPr lang="en" sz="1000">
+                <a:solidFill>
+                  <a:schemeClr val="dk1"/>
+                </a:solidFill>
+                <a:latin typeface="Calibri"/>
+                <a:ea typeface="Calibri"/>
+                <a:cs typeface="Calibri"/>
+                <a:sym typeface="Calibri"/>
+              </a:rPr>
+              <a:t>- </a:t>
+            </a:r>
+            <a:r>
+              <a:rPr lang="en" sz="1000" u="sng">
+                <a:solidFill>
+                  <a:schemeClr val="hlink"/>
+                </a:solidFill>
+                <a:latin typeface="Calibri"/>
+                <a:ea typeface="Calibri"/>
+                <a:cs typeface="Calibri"/>
+                <a:sym typeface="Calibri"/>
+                <a:hlinkClick r:id="rId9"/>
+              </a:rPr>
+              <a:t>https://wow.groq.com</a:t>
+            </a:r>
+            <a:r>
+              <a:rPr lang="en" sz="1000">
+                <a:solidFill>
+                  <a:schemeClr val="dk1"/>
+                </a:solidFill>
+                <a:latin typeface="Calibri"/>
+                <a:ea typeface="Calibri"/>
+                <a:cs typeface="Calibri"/>
+                <a:sym typeface="Calibri"/>
+              </a:rPr>
               <a:t> - </a:t>
             </a:r>
             <a:r>
-              <a:rPr lang="en" sz="1000" b="0" i="0" u="sng" strike="noStrike" cap="none">
+              <a:rPr lang="en" sz="1000" u="sng">
                 <a:solidFill>
                   <a:schemeClr val="hlink"/>
                 </a:solidFill>
@@ -27834,12 +30223,12 @@
                 <a:ea typeface="Calibri"/>
                 <a:cs typeface="Calibri"/>
                 <a:sym typeface="Calibri"/>
-                <a:hlinkClick r:id="rId3"/>
-              </a:rPr>
-              <a:t>https://docs.anthropic.com/claude/prompt-library</a:t>
-            </a:r>
-            <a:r>
-              <a:rPr lang="en" sz="1000" b="0" i="0" u="none" strike="noStrike" cap="none">
+                <a:hlinkClick r:id="rId10"/>
+              </a:rPr>
+              <a:t>https://groq.com</a:t>
+            </a:r>
+            <a:r>
+              <a:rPr lang="en" sz="1000">
                 <a:solidFill>
                   <a:schemeClr val="dk1"/>
                 </a:solidFill>
@@ -27850,7 +30239,7 @@
               </a:rPr>
               <a:t> </a:t>
             </a:r>
-            <a:endParaRPr sz="1000" b="0" i="0" u="none" strike="noStrike" cap="none">
+            <a:endParaRPr sz="1000">
               <a:solidFill>
                 <a:schemeClr val="dk1"/>
               </a:solidFill>
@@ -27862,54 +30251,16 @@
           </a:p>
         </p:txBody>
       </p:sp>
-      <p:pic>
-        <p:nvPicPr>
-          <p:cNvPr id="109" name="Google Shape;109;p18"/>
-          <p:cNvPicPr preferRelativeResize="0"/>
-          <p:nvPr/>
-        </p:nvPicPr>
-        <p:blipFill rotWithShape="1">
-          <a:blip r:embed="rId4" cstate="email">
-            <a:alphaModFix/>
-            <a:extLst>
-              <a:ext uri="{28A0092B-C50C-407E-A947-70E740481C1C}">
-                <a14:useLocalDpi xmlns:a14="http://schemas.microsoft.com/office/drawing/2010/main"/>
-              </a:ext>
-            </a:extLst>
-          </a:blip>
-          <a:srcRect/>
-          <a:stretch/>
-        </p:blipFill>
-        <p:spPr>
-          <a:xfrm>
-            <a:off x="5608375" y="1187463"/>
-            <a:ext cx="3034875" cy="3219775"/>
-          </a:xfrm>
-          <a:prstGeom prst="rect">
-            <a:avLst/>
-          </a:prstGeom>
-          <a:noFill/>
-          <a:ln w="9525" cap="flat" cmpd="sng">
-            <a:solidFill>
-              <a:srgbClr val="3C78D8"/>
-            </a:solidFill>
-            <a:prstDash val="solid"/>
-            <a:round/>
-            <a:headEnd type="none" w="sm" len="sm"/>
-            <a:tailEnd type="none" w="sm" len="sm"/>
-          </a:ln>
-        </p:spPr>
-      </p:pic>
       <p:sp>
         <p:nvSpPr>
-          <p:cNvPr id="110" name="Google Shape;110;p18"/>
+          <p:cNvPr id="136" name="Google Shape;136;p20"/>
           <p:cNvSpPr txBox="1"/>
           <p:nvPr/>
         </p:nvSpPr>
         <p:spPr>
           <a:xfrm>
-            <a:off x="119337" y="2975951"/>
-            <a:ext cx="4381500" cy="544800"/>
+            <a:off x="5609094" y="426950"/>
+            <a:ext cx="3461100" cy="2031900"/>
           </a:xfrm>
           <a:prstGeom prst="rect">
             <a:avLst/>
@@ -27928,7 +30279,7 @@
           </a:ln>
         </p:spPr>
         <p:txBody>
-          <a:bodyPr spcFirstLastPara="1" wrap="square" lIns="18275" tIns="18275" rIns="18275" bIns="18275" anchor="t" anchorCtr="0">
+          <a:bodyPr spcFirstLastPara="1" wrap="square" lIns="91425" tIns="91425" rIns="91425" bIns="91425" anchor="t" anchorCtr="0">
             <a:spAutoFit/>
           </a:bodyPr>
           <a:lstStyle/>
@@ -27951,7 +30302,7 @@
               <a:buNone/>
             </a:pPr>
             <a:r>
-              <a:rPr lang="en" sz="1300" b="1" i="0" u="none" strike="noStrike" cap="none">
+              <a:rPr lang="en" sz="1200" b="1" i="0" u="none" strike="noStrike" cap="none">
                 <a:solidFill>
                   <a:srgbClr val="FF0000"/>
                 </a:solidFill>
@@ -27960,23 +30311,11 @@
                 <a:cs typeface="Calibri"/>
                 <a:sym typeface="Calibri"/>
               </a:rPr>
-              <a:t>Train Mixtral on consumer hardware</a:t>
-            </a:r>
-            <a:r>
-              <a:rPr lang="en" sz="1300" b="0" i="0" u="none" strike="noStrike" cap="none">
-                <a:solidFill>
-                  <a:schemeClr val="dk1"/>
-                </a:solidFill>
-                <a:latin typeface="Calibri"/>
-                <a:ea typeface="Calibri"/>
-                <a:cs typeface="Calibri"/>
-                <a:sym typeface="Calibri"/>
-              </a:rPr>
-              <a:t>:</a:t>
-            </a:r>
-            <a:endParaRPr sz="1300" b="0" i="0" u="none" strike="noStrike" cap="none">
-              <a:solidFill>
-                <a:schemeClr val="dk1"/>
+              <a:t>New OpenAI Board:</a:t>
+            </a:r>
+            <a:endParaRPr sz="1200" b="1" i="0" u="none" strike="noStrike" cap="none">
+              <a:solidFill>
+                <a:srgbClr val="FF0000"/>
               </a:solidFill>
               <a:latin typeface="Calibri"/>
               <a:ea typeface="Calibri"/>
@@ -27985,38 +30324,25 @@
             </a:endParaRPr>
           </a:p>
           <a:p>
-            <a:pPr marL="0" marR="0" lvl="0" indent="0" algn="l" rtl="0">
-              <a:lnSpc>
-                <a:spcPct val="100000"/>
-              </a:lnSpc>
-              <a:spcBef>
-                <a:spcPts val="0"/>
-              </a:spcBef>
-              <a:spcAft>
-                <a:spcPts val="0"/>
-              </a:spcAft>
-              <a:buClr>
-                <a:schemeClr val="dk1"/>
-              </a:buClr>
-              <a:buSzPts val="1100"/>
-              <a:buFont typeface="Arial"/>
-              <a:buNone/>
-            </a:pPr>
-            <a:r>
-              <a:rPr lang="en" sz="1000" b="0" i="0" u="sng" strike="noStrike" cap="none">
-                <a:solidFill>
-                  <a:schemeClr val="hlink"/>
-                </a:solidFill>
-                <a:latin typeface="Calibri"/>
-                <a:ea typeface="Calibri"/>
-                <a:cs typeface="Calibri"/>
-                <a:sym typeface="Calibri"/>
-                <a:hlinkClick r:id="rId5"/>
-              </a:rPr>
-              <a:t>https://github.com/OpenAccess-AI-Collective/axolotl/blob/main/examples/mistral/mixtral-qlora-fsdp.yml</a:t>
-            </a:r>
-            <a:r>
-              <a:rPr lang="en" sz="1000" b="0" i="0" u="none" strike="noStrike" cap="none">
+            <a:pPr marL="457200" marR="0" lvl="0" indent="-304800" algn="l" rtl="0">
+              <a:lnSpc>
+                <a:spcPct val="100000"/>
+              </a:lnSpc>
+              <a:spcBef>
+                <a:spcPts val="0"/>
+              </a:spcBef>
+              <a:spcAft>
+                <a:spcPts val="0"/>
+              </a:spcAft>
+              <a:buClr>
+                <a:schemeClr val="dk1"/>
+              </a:buClr>
+              <a:buSzPts val="1200"/>
+              <a:buFont typeface="Calibri"/>
+              <a:buChar char="●"/>
+            </a:pPr>
+            <a:r>
+              <a:rPr lang="en" sz="1200" b="0" i="0" u="none" strike="noStrike" cap="none">
                 <a:solidFill>
                   <a:schemeClr val="dk1"/>
                 </a:solidFill>
@@ -28025,9 +30351,9 @@
                 <a:cs typeface="Calibri"/>
                 <a:sym typeface="Calibri"/>
               </a:rPr>
-              <a:t>  </a:t>
-            </a:r>
-            <a:endParaRPr sz="1000" b="0" i="0" u="none" strike="noStrike" cap="none">
+              <a:t>Sam Altman (CEO)</a:t>
+            </a:r>
+            <a:endParaRPr sz="1200" b="0" i="0" u="none" strike="noStrike" cap="none">
               <a:solidFill>
                 <a:schemeClr val="dk1"/>
               </a:solidFill>
@@ -28037,72 +30363,26 @@
               <a:sym typeface="Calibri"/>
             </a:endParaRPr>
           </a:p>
-        </p:txBody>
-      </p:sp>
-      <p:sp>
-        <p:nvSpPr>
-          <p:cNvPr id="111" name="Google Shape;111;p18"/>
-          <p:cNvSpPr txBox="1"/>
-          <p:nvPr/>
-        </p:nvSpPr>
-        <p:spPr>
-          <a:xfrm>
-            <a:off x="119325" y="3580854"/>
-            <a:ext cx="4381500" cy="390900"/>
-          </a:xfrm>
-          <a:prstGeom prst="rect">
-            <a:avLst/>
-          </a:prstGeom>
-          <a:solidFill>
-            <a:srgbClr val="FFF2CC"/>
-          </a:solidFill>
-          <a:ln w="9525" cap="flat" cmpd="sng">
-            <a:solidFill>
-              <a:srgbClr val="FF0000"/>
-            </a:solidFill>
-            <a:prstDash val="solid"/>
-            <a:round/>
-            <a:headEnd type="none" w="sm" len="sm"/>
-            <a:tailEnd type="none" w="sm" len="sm"/>
-          </a:ln>
-        </p:spPr>
-        <p:txBody>
-          <a:bodyPr spcFirstLastPara="1" wrap="square" lIns="18275" tIns="18275" rIns="18275" bIns="18275" anchor="t" anchorCtr="0">
-            <a:spAutoFit/>
-          </a:bodyPr>
-          <a:lstStyle/>
-          <a:p>
-            <a:pPr marL="0" marR="0" lvl="0" indent="0" algn="l" rtl="0">
-              <a:lnSpc>
-                <a:spcPct val="100000"/>
-              </a:lnSpc>
-              <a:spcBef>
-                <a:spcPts val="0"/>
-              </a:spcBef>
-              <a:spcAft>
-                <a:spcPts val="0"/>
-              </a:spcAft>
-              <a:buClr>
-                <a:schemeClr val="dk1"/>
-              </a:buClr>
-              <a:buSzPts val="1100"/>
-              <a:buFont typeface="Arial"/>
-              <a:buNone/>
-            </a:pPr>
-            <a:r>
-              <a:rPr lang="en" sz="1300" b="1">
-                <a:solidFill>
-                  <a:srgbClr val="FF0000"/>
-                </a:solidFill>
-                <a:latin typeface="Calibri"/>
-                <a:ea typeface="Calibri"/>
-                <a:cs typeface="Calibri"/>
-                <a:sym typeface="Calibri"/>
-              </a:rPr>
-              <a:t>x.ai </a:t>
-            </a:r>
-            <a:r>
-              <a:rPr lang="en" sz="1300">
+          <a:p>
+            <a:pPr marL="457200" marR="0" lvl="0" indent="-304800" algn="l" rtl="0">
+              <a:lnSpc>
+                <a:spcPct val="100000"/>
+              </a:lnSpc>
+              <a:spcBef>
+                <a:spcPts val="0"/>
+              </a:spcBef>
+              <a:spcAft>
+                <a:spcPts val="0"/>
+              </a:spcAft>
+              <a:buClr>
+                <a:schemeClr val="dk1"/>
+              </a:buClr>
+              <a:buSzPts val="1200"/>
+              <a:buFont typeface="Calibri"/>
+              <a:buChar char="●"/>
+            </a:pPr>
+            <a:r>
+              <a:rPr lang="en" sz="1200" b="0" i="0" u="none" strike="noStrike" cap="none">
                 <a:solidFill>
                   <a:schemeClr val="dk1"/>
                 </a:solidFill>
@@ -28111,33 +30391,9 @@
                 <a:cs typeface="Calibri"/>
                 <a:sym typeface="Calibri"/>
               </a:rPr>
-              <a:t>- open-sourcing </a:t>
-            </a:r>
-            <a:r>
-              <a:rPr lang="en" sz="1300" b="1">
-                <a:solidFill>
-                  <a:srgbClr val="FF0000"/>
-                </a:solidFill>
-                <a:latin typeface="Calibri"/>
-                <a:ea typeface="Calibri"/>
-                <a:cs typeface="Calibri"/>
-                <a:sym typeface="Calibri"/>
-              </a:rPr>
-              <a:t>Grok</a:t>
-            </a:r>
-            <a:r>
-              <a:rPr lang="en" sz="1300">
-                <a:solidFill>
-                  <a:schemeClr val="dk1"/>
-                </a:solidFill>
-                <a:latin typeface="Calibri"/>
-                <a:ea typeface="Calibri"/>
-                <a:cs typeface="Calibri"/>
-                <a:sym typeface="Calibri"/>
-              </a:rPr>
-              <a:t> this week !</a:t>
-            </a:r>
-            <a:endParaRPr sz="1300">
+              <a:t>Sue Desmond-Hellmann (Gates foundation)</a:t>
+            </a:r>
+            <a:endParaRPr sz="1200" b="0" i="0" u="none" strike="noStrike" cap="none">
               <a:solidFill>
                 <a:schemeClr val="dk1"/>
               </a:solidFill>
@@ -28148,38 +30404,25 @@
             </a:endParaRPr>
           </a:p>
           <a:p>
-            <a:pPr marL="0" marR="0" lvl="0" indent="0" algn="l" rtl="0">
-              <a:lnSpc>
-                <a:spcPct val="100000"/>
-              </a:lnSpc>
-              <a:spcBef>
-                <a:spcPts val="0"/>
-              </a:spcBef>
-              <a:spcAft>
-                <a:spcPts val="0"/>
-              </a:spcAft>
-              <a:buClr>
-                <a:schemeClr val="dk1"/>
-              </a:buClr>
-              <a:buSzPts val="1100"/>
-              <a:buFont typeface="Arial"/>
-              <a:buNone/>
-            </a:pPr>
-            <a:r>
-              <a:rPr lang="en" sz="1000" u="sng">
-                <a:solidFill>
-                  <a:schemeClr val="hlink"/>
-                </a:solidFill>
-                <a:latin typeface="Calibri"/>
-                <a:ea typeface="Calibri"/>
-                <a:cs typeface="Calibri"/>
-                <a:sym typeface="Calibri"/>
-                <a:hlinkClick r:id="rId6"/>
-              </a:rPr>
-              <a:t>https://twitter.com/elonmusk/status/1767108624038449405</a:t>
-            </a:r>
-            <a:r>
-              <a:rPr lang="en" sz="1000">
+            <a:pPr marL="457200" marR="0" lvl="0" indent="-304800" algn="l" rtl="0">
+              <a:lnSpc>
+                <a:spcPct val="100000"/>
+              </a:lnSpc>
+              <a:spcBef>
+                <a:spcPts val="0"/>
+              </a:spcBef>
+              <a:spcAft>
+                <a:spcPts val="0"/>
+              </a:spcAft>
+              <a:buClr>
+                <a:schemeClr val="dk1"/>
+              </a:buClr>
+              <a:buSzPts val="1200"/>
+              <a:buFont typeface="Calibri"/>
+              <a:buChar char="●"/>
+            </a:pPr>
+            <a:r>
+              <a:rPr lang="en" sz="1200" b="0" i="0" u="none" strike="noStrike" cap="none">
                 <a:solidFill>
                   <a:schemeClr val="dk1"/>
                 </a:solidFill>
@@ -28188,9 +30431,9 @@
                 <a:cs typeface="Calibri"/>
                 <a:sym typeface="Calibri"/>
               </a:rPr>
-              <a:t> </a:t>
-            </a:r>
-            <a:endParaRPr sz="1000">
+              <a:t>Nicole Seligman (Sony Entertainment)</a:t>
+            </a:r>
+            <a:endParaRPr sz="1200" b="0" i="0" u="none" strike="noStrike" cap="none">
               <a:solidFill>
                 <a:schemeClr val="dk1"/>
               </a:solidFill>
@@ -28200,60 +30443,26 @@
               <a:sym typeface="Calibri"/>
             </a:endParaRPr>
           </a:p>
-        </p:txBody>
-      </p:sp>
-      <p:sp>
-        <p:nvSpPr>
-          <p:cNvPr id="112" name="Google Shape;112;p18"/>
-          <p:cNvSpPr txBox="1"/>
-          <p:nvPr/>
-        </p:nvSpPr>
-        <p:spPr>
-          <a:xfrm>
-            <a:off x="119325" y="4031854"/>
-            <a:ext cx="4381500" cy="437100"/>
-          </a:xfrm>
-          <a:prstGeom prst="rect">
-            <a:avLst/>
-          </a:prstGeom>
-          <a:solidFill>
-            <a:srgbClr val="FFF2CC"/>
-          </a:solidFill>
-          <a:ln w="9525" cap="flat" cmpd="sng">
-            <a:solidFill>
-              <a:srgbClr val="FF0000"/>
-            </a:solidFill>
-            <a:prstDash val="solid"/>
-            <a:round/>
-            <a:headEnd type="none" w="sm" len="sm"/>
-            <a:tailEnd type="none" w="sm" len="sm"/>
-          </a:ln>
-        </p:spPr>
-        <p:txBody>
-          <a:bodyPr spcFirstLastPara="1" wrap="square" lIns="18275" tIns="18275" rIns="18275" bIns="18275" anchor="t" anchorCtr="0">
-            <a:spAutoFit/>
-          </a:bodyPr>
-          <a:lstStyle/>
-          <a:p>
-            <a:pPr marL="0" marR="0" lvl="0" indent="0" algn="l" rtl="0">
-              <a:lnSpc>
-                <a:spcPct val="100000"/>
-              </a:lnSpc>
-              <a:spcBef>
-                <a:spcPts val="0"/>
-              </a:spcBef>
-              <a:spcAft>
-                <a:spcPts val="0"/>
-              </a:spcAft>
-              <a:buClr>
-                <a:schemeClr val="dk1"/>
-              </a:buClr>
-              <a:buSzPts val="1100"/>
-              <a:buFont typeface="Arial"/>
-              <a:buNone/>
-            </a:pPr>
-            <a:r>
-              <a:rPr lang="en" sz="1300">
+          <a:p>
+            <a:pPr marL="457200" marR="0" lvl="0" indent="-304800" algn="l" rtl="0">
+              <a:lnSpc>
+                <a:spcPct val="100000"/>
+              </a:lnSpc>
+              <a:spcBef>
+                <a:spcPts val="0"/>
+              </a:spcBef>
+              <a:spcAft>
+                <a:spcPts val="0"/>
+              </a:spcAft>
+              <a:buClr>
+                <a:schemeClr val="dk1"/>
+              </a:buClr>
+              <a:buSzPts val="1200"/>
+              <a:buFont typeface="Calibri"/>
+              <a:buChar char="●"/>
+            </a:pPr>
+            <a:r>
+              <a:rPr lang="en" sz="1200" b="0" i="0" u="none" strike="noStrike" cap="none">
                 <a:solidFill>
                   <a:schemeClr val="dk1"/>
                 </a:solidFill>
@@ -28262,33 +30471,9 @@
                 <a:cs typeface="Calibri"/>
                 <a:sym typeface="Calibri"/>
               </a:rPr>
-              <a:t>One year anniversary of </a:t>
-            </a:r>
-            <a:r>
-              <a:rPr lang="en" sz="1300" b="1">
-                <a:solidFill>
-                  <a:srgbClr val="FF0000"/>
-                </a:solidFill>
-                <a:latin typeface="Calibri"/>
-                <a:ea typeface="Calibri"/>
-                <a:cs typeface="Calibri"/>
-                <a:sym typeface="Calibri"/>
-              </a:rPr>
-              <a:t>llama.cpp</a:t>
-            </a:r>
-            <a:r>
-              <a:rPr lang="en" sz="1300">
-                <a:solidFill>
-                  <a:schemeClr val="dk1"/>
-                </a:solidFill>
-                <a:latin typeface="Calibri"/>
-                <a:ea typeface="Calibri"/>
-                <a:cs typeface="Calibri"/>
-                <a:sym typeface="Calibri"/>
-              </a:rPr>
-              <a:t> (March 9, 2023). </a:t>
-            </a:r>
-            <a:endParaRPr sz="1300">
+              <a:t>Fidji Simo (Metrodora Institute)</a:t>
+            </a:r>
+            <a:endParaRPr sz="1200" b="0" i="0" u="none" strike="noStrike" cap="none">
               <a:solidFill>
                 <a:schemeClr val="dk1"/>
               </a:solidFill>
@@ -28299,38 +30484,25 @@
             </a:endParaRPr>
           </a:p>
           <a:p>
-            <a:pPr marL="0" marR="0" lvl="0" indent="0" algn="l" rtl="0">
-              <a:lnSpc>
-                <a:spcPct val="100000"/>
-              </a:lnSpc>
-              <a:spcBef>
-                <a:spcPts val="0"/>
-              </a:spcBef>
-              <a:spcAft>
-                <a:spcPts val="0"/>
-              </a:spcAft>
-              <a:buClr>
-                <a:schemeClr val="dk1"/>
-              </a:buClr>
-              <a:buSzPts val="1100"/>
-              <a:buFont typeface="Arial"/>
-              <a:buNone/>
-            </a:pPr>
-            <a:r>
-              <a:rPr lang="en" sz="1300" u="sng">
-                <a:solidFill>
-                  <a:schemeClr val="hlink"/>
-                </a:solidFill>
-                <a:latin typeface="Calibri"/>
-                <a:ea typeface="Calibri"/>
-                <a:cs typeface="Calibri"/>
-                <a:sym typeface="Calibri"/>
-                <a:hlinkClick r:id="rId7"/>
-              </a:rPr>
-              <a:t>https://github.com/ggerganov/llama.cpp</a:t>
-            </a:r>
-            <a:r>
-              <a:rPr lang="en" sz="1300">
+            <a:pPr marL="457200" marR="0" lvl="0" indent="-304800" algn="l" rtl="0">
+              <a:lnSpc>
+                <a:spcPct val="100000"/>
+              </a:lnSpc>
+              <a:spcBef>
+                <a:spcPts val="0"/>
+              </a:spcBef>
+              <a:spcAft>
+                <a:spcPts val="0"/>
+              </a:spcAft>
+              <a:buClr>
+                <a:schemeClr val="dk1"/>
+              </a:buClr>
+              <a:buSzPts val="1200"/>
+              <a:buFont typeface="Calibri"/>
+              <a:buChar char="●"/>
+            </a:pPr>
+            <a:r>
+              <a:rPr lang="en" sz="1200" b="0" i="0" u="none" strike="noStrike" cap="none">
                 <a:solidFill>
                   <a:schemeClr val="dk1"/>
                 </a:solidFill>
@@ -28339,9 +30511,9 @@
                 <a:cs typeface="Calibri"/>
                 <a:sym typeface="Calibri"/>
               </a:rPr>
-              <a:t> </a:t>
-            </a:r>
-            <a:endParaRPr sz="1300">
+              <a:t>Bret Taylor (Chairman, Salesforce)</a:t>
+            </a:r>
+            <a:endParaRPr sz="1200" b="0" i="0" u="none" strike="noStrike" cap="none">
               <a:solidFill>
                 <a:schemeClr val="dk1"/>
               </a:solidFill>
@@ -28351,119 +30523,26 @@
               <a:sym typeface="Calibri"/>
             </a:endParaRPr>
           </a:p>
-        </p:txBody>
-      </p:sp>
-      <p:sp>
-        <p:nvSpPr>
-          <p:cNvPr id="113" name="Google Shape;113;p18"/>
-          <p:cNvSpPr/>
-          <p:nvPr/>
-        </p:nvSpPr>
-        <p:spPr>
-          <a:xfrm>
-            <a:off x="4735875" y="2727400"/>
-            <a:ext cx="644700" cy="188400"/>
-          </a:xfrm>
-          <a:prstGeom prst="rightArrow">
-            <a:avLst>
-              <a:gd name="adj1" fmla="val 50000"/>
-              <a:gd name="adj2" fmla="val 50000"/>
-            </a:avLst>
-          </a:prstGeom>
-          <a:noFill/>
-          <a:ln w="9525" cap="flat" cmpd="sng">
-            <a:solidFill>
-              <a:srgbClr val="3C78D8"/>
-            </a:solidFill>
-            <a:prstDash val="solid"/>
-            <a:round/>
-            <a:headEnd type="none" w="sm" len="sm"/>
-            <a:tailEnd type="none" w="sm" len="sm"/>
-          </a:ln>
-        </p:spPr>
-        <p:txBody>
-          <a:bodyPr spcFirstLastPara="1" wrap="square" lIns="91425" tIns="91425" rIns="91425" bIns="91425" anchor="ctr" anchorCtr="0">
-            <a:noAutofit/>
-          </a:bodyPr>
-          <a:lstStyle/>
-          <a:p>
-            <a:pPr marL="0" lvl="0" indent="0" algn="ctr" rtl="0">
-              <a:spcBef>
-                <a:spcPts val="0"/>
-              </a:spcBef>
-              <a:spcAft>
-                <a:spcPts val="0"/>
-              </a:spcAft>
-              <a:buNone/>
-            </a:pPr>
-            <a:endParaRPr/>
-          </a:p>
-        </p:txBody>
-      </p:sp>
-      <p:sp>
-        <p:nvSpPr>
-          <p:cNvPr id="114" name="Google Shape;114;p18"/>
-          <p:cNvSpPr txBox="1"/>
-          <p:nvPr/>
-        </p:nvSpPr>
-        <p:spPr>
-          <a:xfrm>
-            <a:off x="119325" y="4566629"/>
-            <a:ext cx="4381500" cy="437100"/>
-          </a:xfrm>
-          <a:prstGeom prst="rect">
-            <a:avLst/>
-          </a:prstGeom>
-          <a:solidFill>
-            <a:srgbClr val="FFF2CC"/>
-          </a:solidFill>
-          <a:ln w="9525" cap="flat" cmpd="sng">
-            <a:solidFill>
-              <a:srgbClr val="FF0000"/>
-            </a:solidFill>
-            <a:prstDash val="solid"/>
-            <a:round/>
-            <a:headEnd type="none" w="sm" len="sm"/>
-            <a:tailEnd type="none" w="sm" len="sm"/>
-          </a:ln>
-        </p:spPr>
-        <p:txBody>
-          <a:bodyPr spcFirstLastPara="1" wrap="square" lIns="18275" tIns="18275" rIns="18275" bIns="18275" anchor="t" anchorCtr="0">
-            <a:spAutoFit/>
-          </a:bodyPr>
-          <a:lstStyle/>
-          <a:p>
-            <a:pPr marL="0" marR="0" lvl="0" indent="0" algn="l" rtl="0">
-              <a:lnSpc>
-                <a:spcPct val="100000"/>
-              </a:lnSpc>
-              <a:spcBef>
-                <a:spcPts val="0"/>
-              </a:spcBef>
-              <a:spcAft>
-                <a:spcPts val="0"/>
-              </a:spcAft>
-              <a:buClr>
-                <a:schemeClr val="dk1"/>
-              </a:buClr>
-              <a:buSzPts val="1100"/>
-              <a:buFont typeface="Arial"/>
-              <a:buNone/>
-            </a:pPr>
-            <a:r>
-              <a:rPr lang="en" sz="1300" b="1">
-                <a:solidFill>
-                  <a:srgbClr val="FF0000"/>
-                </a:solidFill>
-                <a:latin typeface="Calibri"/>
-                <a:ea typeface="Calibri"/>
-                <a:cs typeface="Calibri"/>
-                <a:sym typeface="Calibri"/>
-              </a:rPr>
-              <a:t>Fireworks.ai</a:t>
-            </a:r>
-            <a:r>
-              <a:rPr lang="en" sz="1300">
+          <a:p>
+            <a:pPr marL="457200" marR="0" lvl="0" indent="-304800" algn="l" rtl="0">
+              <a:lnSpc>
+                <a:spcPct val="100000"/>
+              </a:lnSpc>
+              <a:spcBef>
+                <a:spcPts val="0"/>
+              </a:spcBef>
+              <a:spcAft>
+                <a:spcPts val="0"/>
+              </a:spcAft>
+              <a:buClr>
+                <a:schemeClr val="dk1"/>
+              </a:buClr>
+              <a:buSzPts val="1200"/>
+              <a:buFont typeface="Calibri"/>
+              <a:buChar char="●"/>
+            </a:pPr>
+            <a:r>
+              <a:rPr lang="en" sz="1200" b="0" i="0" u="none" strike="noStrike" cap="none">
                 <a:solidFill>
                   <a:schemeClr val="dk1"/>
                 </a:solidFill>
@@ -28472,45 +30551,9 @@
                 <a:cs typeface="Calibri"/>
                 <a:sym typeface="Calibri"/>
               </a:rPr>
-              <a:t> - very fast and cheap AI service</a:t>
-            </a:r>
-            <a:br>
-              <a:rPr lang="en" sz="1300">
-                <a:solidFill>
-                  <a:schemeClr val="dk1"/>
-                </a:solidFill>
-                <a:latin typeface="Calibri"/>
-                <a:ea typeface="Calibri"/>
-                <a:cs typeface="Calibri"/>
-                <a:sym typeface="Calibri"/>
-              </a:rPr>
-            </a:br>
-            <a:r>
-              <a:rPr lang="en" sz="1300" u="sng">
-                <a:solidFill>
-                  <a:schemeClr val="hlink"/>
-                </a:solidFill>
-                <a:latin typeface="Calibri"/>
-                <a:ea typeface="Calibri"/>
-                <a:cs typeface="Calibri"/>
-                <a:sym typeface="Calibri"/>
-                <a:hlinkClick r:id="rId8"/>
-              </a:rPr>
-              <a:t>https://fireworks.ai</a:t>
-            </a:r>
-            <a:r>
-              <a:rPr lang="en" sz="1300">
-                <a:solidFill>
-                  <a:schemeClr val="dk1"/>
-                </a:solidFill>
-                <a:latin typeface="Calibri"/>
-                <a:ea typeface="Calibri"/>
-                <a:cs typeface="Calibri"/>
-                <a:sym typeface="Calibri"/>
-              </a:rPr>
-              <a:t> </a:t>
-            </a:r>
-            <a:endParaRPr sz="1300">
+              <a:t>Adam D'Angelo: CEO of Quora</a:t>
+            </a:r>
+            <a:endParaRPr sz="1200" b="0" i="0" u="none" strike="noStrike" cap="none">
               <a:solidFill>
                 <a:schemeClr val="dk1"/>
               </a:solidFill>
@@ -28520,72 +30563,26 @@
               <a:sym typeface="Calibri"/>
             </a:endParaRPr>
           </a:p>
-        </p:txBody>
-      </p:sp>
-      <p:sp>
-        <p:nvSpPr>
-          <p:cNvPr id="115" name="Google Shape;115;p18"/>
-          <p:cNvSpPr txBox="1"/>
-          <p:nvPr/>
-        </p:nvSpPr>
-        <p:spPr>
-          <a:xfrm>
-            <a:off x="4688700" y="4719029"/>
-            <a:ext cx="4381500" cy="237000"/>
-          </a:xfrm>
-          <a:prstGeom prst="rect">
-            <a:avLst/>
-          </a:prstGeom>
-          <a:solidFill>
-            <a:srgbClr val="FFF2CC"/>
-          </a:solidFill>
-          <a:ln w="9525" cap="flat" cmpd="sng">
-            <a:solidFill>
-              <a:srgbClr val="FF0000"/>
-            </a:solidFill>
-            <a:prstDash val="solid"/>
-            <a:round/>
-            <a:headEnd type="none" w="sm" len="sm"/>
-            <a:tailEnd type="none" w="sm" len="sm"/>
-          </a:ln>
-        </p:spPr>
-        <p:txBody>
-          <a:bodyPr spcFirstLastPara="1" wrap="square" lIns="18275" tIns="18275" rIns="18275" bIns="18275" anchor="t" anchorCtr="0">
-            <a:spAutoFit/>
-          </a:bodyPr>
-          <a:lstStyle/>
-          <a:p>
-            <a:pPr marL="0" marR="0" lvl="0" indent="0" algn="l" rtl="0">
-              <a:lnSpc>
-                <a:spcPct val="100000"/>
-              </a:lnSpc>
-              <a:spcBef>
-                <a:spcPts val="0"/>
-              </a:spcBef>
-              <a:spcAft>
-                <a:spcPts val="0"/>
-              </a:spcAft>
-              <a:buClr>
-                <a:schemeClr val="dk1"/>
-              </a:buClr>
-              <a:buSzPts val="1100"/>
-              <a:buFont typeface="Arial"/>
-              <a:buNone/>
-            </a:pPr>
-            <a:r>
-              <a:rPr lang="en" sz="1300" b="1">
-                <a:solidFill>
-                  <a:srgbClr val="FF0000"/>
-                </a:solidFill>
-                <a:latin typeface="Calibri"/>
-                <a:ea typeface="Calibri"/>
-                <a:cs typeface="Calibri"/>
-                <a:sym typeface="Calibri"/>
-              </a:rPr>
-              <a:t>GroqCloud</a:t>
-            </a:r>
-            <a:r>
-              <a:rPr lang="en" sz="1300">
+          <a:p>
+            <a:pPr marL="457200" marR="0" lvl="0" indent="-304800" algn="l" rtl="0">
+              <a:lnSpc>
+                <a:spcPct val="100000"/>
+              </a:lnSpc>
+              <a:spcBef>
+                <a:spcPts val="0"/>
+              </a:spcBef>
+              <a:spcAft>
+                <a:spcPts val="0"/>
+              </a:spcAft>
+              <a:buClr>
+                <a:schemeClr val="dk1"/>
+              </a:buClr>
+              <a:buSzPts val="1200"/>
+              <a:buFont typeface="Calibri"/>
+              <a:buChar char="●"/>
+            </a:pPr>
+            <a:r>
+              <a:rPr lang="en" sz="1200" b="0" i="0" u="none" strike="noStrike" cap="none">
                 <a:solidFill>
                   <a:schemeClr val="dk1"/>
                 </a:solidFill>
@@ -28594,10 +30591,38 @@
                 <a:cs typeface="Calibri"/>
                 <a:sym typeface="Calibri"/>
               </a:rPr>
-              <a:t> - API for AI </a:t>
-            </a:r>
-            <a:r>
-              <a:rPr lang="en" sz="1000">
+              <a:t>Larry Summers (Economist, former Harvard president, former US Treasury Secretary)</a:t>
+            </a:r>
+            <a:endParaRPr sz="1200" b="0" i="0" u="none" strike="noStrike" cap="none">
+              <a:solidFill>
+                <a:schemeClr val="dk1"/>
+              </a:solidFill>
+              <a:latin typeface="Calibri"/>
+              <a:ea typeface="Calibri"/>
+              <a:cs typeface="Calibri"/>
+              <a:sym typeface="Calibri"/>
+            </a:endParaRPr>
+          </a:p>
+          <a:p>
+            <a:pPr marL="457200" marR="0" lvl="0" indent="-304800" algn="l" rtl="0">
+              <a:lnSpc>
+                <a:spcPct val="100000"/>
+              </a:lnSpc>
+              <a:spcBef>
+                <a:spcPts val="0"/>
+              </a:spcBef>
+              <a:spcAft>
+                <a:spcPts val="0"/>
+              </a:spcAft>
+              <a:buClr>
+                <a:schemeClr val="dk1"/>
+              </a:buClr>
+              <a:buSzPts val="1200"/>
+              <a:buFont typeface="Calibri"/>
+              <a:buChar char="●"/>
+            </a:pPr>
+            <a:r>
+              <a:rPr lang="en" sz="1200" b="0" i="0" u="none" strike="noStrike" cap="none">
                 <a:solidFill>
                   <a:schemeClr val="dk1"/>
                 </a:solidFill>
@@ -28606,59 +30631,9 @@
                 <a:cs typeface="Calibri"/>
                 <a:sym typeface="Calibri"/>
               </a:rPr>
-              <a:t>- </a:t>
-            </a:r>
-            <a:r>
-              <a:rPr lang="en" sz="1000" u="sng">
-                <a:solidFill>
-                  <a:schemeClr val="hlink"/>
-                </a:solidFill>
-                <a:latin typeface="Calibri"/>
-                <a:ea typeface="Calibri"/>
-                <a:cs typeface="Calibri"/>
-                <a:sym typeface="Calibri"/>
-                <a:hlinkClick r:id="rId9"/>
-              </a:rPr>
-              <a:t>https://wow.groq.com</a:t>
-            </a:r>
-            <a:r>
-              <a:rPr lang="en" sz="1000">
-                <a:solidFill>
-                  <a:schemeClr val="dk1"/>
-                </a:solidFill>
-                <a:latin typeface="Calibri"/>
-                <a:ea typeface="Calibri"/>
-                <a:cs typeface="Calibri"/>
-                <a:sym typeface="Calibri"/>
-              </a:rPr>
-              <a:t> - </a:t>
-            </a:r>
-            <a:r>
-              <a:rPr lang="en" sz="1000" u="sng">
-                <a:solidFill>
-                  <a:schemeClr val="hlink"/>
-                </a:solidFill>
-                <a:latin typeface="Calibri"/>
-                <a:ea typeface="Calibri"/>
-                <a:cs typeface="Calibri"/>
-                <a:sym typeface="Calibri"/>
-                <a:hlinkClick r:id="rId10"/>
-              </a:rPr>
-              <a:t>https://groq.com</a:t>
-            </a:r>
-            <a:r>
-              <a:rPr lang="en" sz="1000">
-                <a:solidFill>
-                  <a:schemeClr val="dk1"/>
-                </a:solidFill>
-                <a:latin typeface="Calibri"/>
-                <a:ea typeface="Calibri"/>
-                <a:cs typeface="Calibri"/>
-                <a:sym typeface="Calibri"/>
-              </a:rPr>
-              <a:t> </a:t>
-            </a:r>
-            <a:endParaRPr sz="1000">
+              <a:t>Microsoft observer seat</a:t>
+            </a:r>
+            <a:endParaRPr sz="1200" b="0" i="0" u="none" strike="noStrike" cap="none">
               <a:solidFill>
                 <a:schemeClr val="dk1"/>
               </a:solidFill>
@@ -28678,12 +30653,12 @@
 </p:sld>
 </file>
 
-<file path=ppt/slides/slide7.xml><?xml version="1.0" encoding="utf-8"?>
+<file path=ppt/slides/slide9.xml><?xml version="1.0" encoding="utf-8"?>
 <p:sld xmlns:a="http://schemas.openxmlformats.org/drawingml/2006/main" xmlns:r="http://schemas.openxmlformats.org/officeDocument/2006/relationships" xmlns:p="http://schemas.openxmlformats.org/presentationml/2006/main">
   <p:cSld>
     <p:spTree>
       <p:nvGrpSpPr>
-        <p:cNvPr id="1" name="Shape 119"/>
+        <p:cNvPr id="1" name="Shape 140"/>
         <p:cNvGrpSpPr/>
         <p:nvPr/>
       </p:nvGrpSpPr>
@@ -28697,7 +30672,7 @@
       </p:grpSpPr>
       <p:sp>
         <p:nvSpPr>
-          <p:cNvPr id="120" name="Google Shape;120;p19"/>
+          <p:cNvPr id="141" name="Google Shape;141;p21"/>
           <p:cNvSpPr txBox="1"/>
           <p:nvPr/>
         </p:nvSpPr>
@@ -28775,7 +30750,7 @@
       </p:sp>
       <p:sp>
         <p:nvSpPr>
-          <p:cNvPr id="121" name="Google Shape;121;p19"/>
+          <p:cNvPr id="142" name="Google Shape;142;p21"/>
           <p:cNvSpPr txBox="1"/>
           <p:nvPr/>
         </p:nvSpPr>
@@ -28937,174 +30912,7 @@
       </p:sp>
       <p:sp>
         <p:nvSpPr>
-          <p:cNvPr id="122" name="Google Shape;122;p19"/>
-          <p:cNvSpPr txBox="1"/>
-          <p:nvPr/>
-        </p:nvSpPr>
-        <p:spPr>
-          <a:xfrm>
-            <a:off x="119337" y="1156006"/>
-            <a:ext cx="4381500" cy="575700"/>
-          </a:xfrm>
-          <a:prstGeom prst="rect">
-            <a:avLst/>
-          </a:prstGeom>
-          <a:solidFill>
-            <a:srgbClr val="FFF2CC"/>
-          </a:solidFill>
-          <a:ln w="9525" cap="flat" cmpd="sng">
-            <a:solidFill>
-              <a:srgbClr val="FF0000"/>
-            </a:solidFill>
-            <a:prstDash val="solid"/>
-            <a:round/>
-            <a:headEnd type="none" w="sm" len="sm"/>
-            <a:tailEnd type="none" w="sm" len="sm"/>
-          </a:ln>
-        </p:spPr>
-        <p:txBody>
-          <a:bodyPr spcFirstLastPara="1" wrap="square" lIns="18275" tIns="18275" rIns="18275" bIns="18275" anchor="t" anchorCtr="0">
-            <a:spAutoFit/>
-          </a:bodyPr>
-          <a:lstStyle/>
-          <a:p>
-            <a:pPr marL="0" marR="0" lvl="0" indent="0" algn="l" rtl="0">
-              <a:lnSpc>
-                <a:spcPct val="100000"/>
-              </a:lnSpc>
-              <a:spcBef>
-                <a:spcPts val="0"/>
-              </a:spcBef>
-              <a:spcAft>
-                <a:spcPts val="0"/>
-              </a:spcAft>
-              <a:buClr>
-                <a:schemeClr val="dk1"/>
-              </a:buClr>
-              <a:buSzPts val="1100"/>
-              <a:buFont typeface="Arial"/>
-              <a:buNone/>
-            </a:pPr>
-            <a:r>
-              <a:rPr lang="en" sz="1300">
-                <a:solidFill>
-                  <a:schemeClr val="dk1"/>
-                </a:solidFill>
-                <a:latin typeface="Calibri"/>
-                <a:ea typeface="Calibri"/>
-                <a:cs typeface="Calibri"/>
-                <a:sym typeface="Calibri"/>
-              </a:rPr>
-              <a:t>A new LLM a day keeps the GPUs away !</a:t>
-            </a:r>
-            <a:endParaRPr sz="1300">
-              <a:solidFill>
-                <a:schemeClr val="dk1"/>
-              </a:solidFill>
-              <a:latin typeface="Calibri"/>
-              <a:ea typeface="Calibri"/>
-              <a:cs typeface="Calibri"/>
-              <a:sym typeface="Calibri"/>
-            </a:endParaRPr>
-          </a:p>
-          <a:p>
-            <a:pPr marL="0" marR="0" lvl="0" indent="0" algn="l" rtl="0">
-              <a:lnSpc>
-                <a:spcPct val="100000"/>
-              </a:lnSpc>
-              <a:spcBef>
-                <a:spcPts val="0"/>
-              </a:spcBef>
-              <a:spcAft>
-                <a:spcPts val="0"/>
-              </a:spcAft>
-              <a:buClr>
-                <a:schemeClr val="dk1"/>
-              </a:buClr>
-              <a:buSzPts val="1100"/>
-              <a:buFont typeface="Arial"/>
-              <a:buNone/>
-            </a:pPr>
-            <a:r>
-              <a:rPr lang="en" sz="1300">
-                <a:solidFill>
-                  <a:schemeClr val="dk1"/>
-                </a:solidFill>
-                <a:latin typeface="Calibri"/>
-                <a:ea typeface="Calibri"/>
-                <a:cs typeface="Calibri"/>
-                <a:sym typeface="Calibri"/>
-              </a:rPr>
-              <a:t>A TPU keeps GPU away !</a:t>
-            </a:r>
-            <a:endParaRPr sz="1300">
-              <a:solidFill>
-                <a:schemeClr val="dk1"/>
-              </a:solidFill>
-              <a:latin typeface="Calibri"/>
-              <a:ea typeface="Calibri"/>
-              <a:cs typeface="Calibri"/>
-              <a:sym typeface="Calibri"/>
-            </a:endParaRPr>
-          </a:p>
-          <a:p>
-            <a:pPr marL="0" marR="0" lvl="0" indent="0" algn="l" rtl="0">
-              <a:lnSpc>
-                <a:spcPct val="100000"/>
-              </a:lnSpc>
-              <a:spcBef>
-                <a:spcPts val="0"/>
-              </a:spcBef>
-              <a:spcAft>
-                <a:spcPts val="0"/>
-              </a:spcAft>
-              <a:buClr>
-                <a:schemeClr val="dk1"/>
-              </a:buClr>
-              <a:buSzPts val="1100"/>
-              <a:buFont typeface="Arial"/>
-              <a:buNone/>
-            </a:pPr>
-            <a:r>
-              <a:rPr lang="en" sz="900" u="sng">
-                <a:solidFill>
-                  <a:schemeClr val="hlink"/>
-                </a:solidFill>
-                <a:latin typeface="Calibri"/>
-                <a:ea typeface="Calibri"/>
-                <a:cs typeface="Calibri"/>
-                <a:sym typeface="Calibri"/>
-                <a:hlinkClick r:id="rId4"/>
-              </a:rPr>
-              <a:t>https://twitter.com/OriolVinyalsML/status/1767643472893276510</a:t>
-            </a:r>
-            <a:r>
-              <a:rPr lang="en" sz="900">
-                <a:solidFill>
-                  <a:schemeClr val="dk1"/>
-                </a:solidFill>
-                <a:latin typeface="Calibri"/>
-                <a:ea typeface="Calibri"/>
-                <a:cs typeface="Calibri"/>
-                <a:sym typeface="Calibri"/>
-              </a:rPr>
-              <a:t> </a:t>
-            </a:r>
-            <a:endParaRPr sz="900">
-              <a:solidFill>
-                <a:schemeClr val="dk1"/>
-              </a:solidFill>
-              <a:latin typeface="Calibri"/>
-              <a:ea typeface="Calibri"/>
-              <a:cs typeface="Calibri"/>
-              <a:sym typeface="Calibri"/>
-            </a:endParaRPr>
-          </a:p>
-        </p:txBody>
-      </p:sp>
-      <p:sp>
-        <p:nvSpPr>
-          <p:cNvPr id="123" name="Google Shape;123;p19"/>
+          <p:cNvPr id="143" name="Google Shape;143;p21"/>
           <p:cNvSpPr txBox="1"/>
           <p:nvPr/>
         </p:nvSpPr>
@@ -29182,7 +30990,7 @@
                 <a:ea typeface="Calibri"/>
                 <a:cs typeface="Calibri"/>
                 <a:sym typeface="Calibri"/>
-                <a:hlinkClick r:id="rId5"/>
+                <a:hlinkClick r:id="rId4"/>
               </a:rPr>
               <a:t>https://cohere.com</a:t>
             </a:r>
@@ -29229,7 +31037,7 @@
                 <a:ea typeface="Calibri"/>
                 <a:cs typeface="Calibri"/>
                 <a:sym typeface="Calibri"/>
-                <a:hlinkClick r:id="rId6"/>
+                <a:hlinkClick r:id="rId5"/>
               </a:rPr>
               <a:t>https://txt.cohere.com/command-r/</a:t>
             </a:r>
@@ -29276,7 +31084,7 @@
                 <a:ea typeface="Calibri"/>
                 <a:cs typeface="Calibri"/>
                 <a:sym typeface="Calibri"/>
-                <a:hlinkClick r:id="rId7"/>
+                <a:hlinkClick r:id="rId6"/>
               </a:rPr>
               <a:t>https://twitter.com/nickfrosst/status/1767566742652416442</a:t>
             </a:r>
@@ -29838,13 +31646,13 @@
       </p:sp>
       <p:sp>
         <p:nvSpPr>
-          <p:cNvPr id="124" name="Google Shape;124;p19"/>
+          <p:cNvPr id="144" name="Google Shape;144;p21"/>
           <p:cNvSpPr txBox="1"/>
           <p:nvPr/>
         </p:nvSpPr>
         <p:spPr>
           <a:xfrm>
-            <a:off x="119337" y="1815506"/>
+            <a:off x="119337" y="1172164"/>
             <a:ext cx="4381500" cy="1976400"/>
           </a:xfrm>
           <a:prstGeom prst="rect">
@@ -30037,7 +31845,7 @@
                 <a:ea typeface="Calibri"/>
                 <a:cs typeface="Calibri"/>
                 <a:sym typeface="Calibri"/>
-                <a:hlinkClick r:id="rId8"/>
+                <a:hlinkClick r:id="rId7"/>
               </a:rPr>
               <a:t>https://twitter.com/demishassabis/status/1767977070603219255</a:t>
             </a:r>
@@ -30084,7 +31892,7 @@
                 <a:ea typeface="Calibri"/>
                 <a:cs typeface="Calibri"/>
                 <a:sym typeface="Calibri"/>
-                <a:hlinkClick r:id="rId9"/>
+                <a:hlinkClick r:id="rId8"/>
               </a:rPr>
               <a:t>https://deepmind.google/discover/blog/sima-generalist-ai-agent-for-3d-virtual-environments/</a:t>
             </a:r>
@@ -30119,7 +31927,7 @@
                 <a:ea typeface="Calibri"/>
                 <a:cs typeface="Calibri"/>
                 <a:sym typeface="Calibri"/>
-                <a:hlinkClick r:id="rId10"/>
+                <a:hlinkClick r:id="rId9"/>
               </a:rPr>
               <a:t>https://storage.googleapis.com/deepmind-media/DeepMind.com/Blog/sima-generalist-ai-agent-for-3d-virtual-environments/Scaling%20Instructable%20Agents%20Across%20Many%20Simulated%20Worlds.pdf</a:t>
             </a:r>
@@ -30137,13 +31945,13 @@
       </p:sp>
       <p:sp>
         <p:nvSpPr>
-          <p:cNvPr id="125" name="Google Shape;125;p19"/>
+          <p:cNvPr id="145" name="Google Shape;145;p21"/>
           <p:cNvSpPr txBox="1"/>
           <p:nvPr/>
         </p:nvSpPr>
         <p:spPr>
           <a:xfrm>
-            <a:off x="119337" y="3875706"/>
+            <a:off x="119337" y="3232364"/>
             <a:ext cx="4381500" cy="591000"/>
           </a:xfrm>
           <a:prstGeom prst="rect">
@@ -30201,9 +32009,24 @@
                 <a:cs typeface="Calibri"/>
                 <a:sym typeface="Calibri"/>
               </a:rPr>
-              <a:t> (CA) raises $250 Mln in Series E funding at a $6 Bln valuation - Autonomous vehicle software</a:t>
-            </a:r>
-            <a:endParaRPr sz="1300">
+              <a:t> (CA) raises $250 Mln in Series E funding at a $6 Bln valuation - </a:t>
+            </a:r>
+            <a:r>
+              <a:rPr lang="en" sz="1300" b="1">
+                <a:solidFill>
+                  <a:srgbClr val="6AA84F"/>
+                </a:solidFill>
+                <a:latin typeface="Calibri"/>
+                <a:ea typeface="Calibri"/>
+                <a:cs typeface="Calibri"/>
+                <a:sym typeface="Calibri"/>
+              </a:rPr>
+              <a:t>Autonomous vehicle software</a:t>
+            </a:r>
+            <a:endParaRPr sz="1300" b="1">
+              <a:solidFill>
+                <a:srgbClr val="6AA84F"/>
+              </a:solidFill>
               <a:latin typeface="Calibri"/>
               <a:ea typeface="Calibri"/>
               <a:cs typeface="Calibri"/>
@@ -30234,7 +32057,7 @@
                 <a:ea typeface="Calibri"/>
                 <a:cs typeface="Calibri"/>
                 <a:sym typeface="Calibri"/>
-                <a:hlinkClick r:id="rId11"/>
+                <a:hlinkClick r:id="rId10"/>
               </a:rPr>
               <a:t>https://www.appliedintuition.com</a:t>
             </a:r>
@@ -30250,782 +32073,6 @@
           </a:p>
         </p:txBody>
       </p:sp>
-    </p:spTree>
-  </p:cSld>
-  <p:clrMapOvr>
-    <a:masterClrMapping/>
-  </p:clrMapOvr>
-</p:sld>
-</file>
-
-<file path=ppt/slides/slide8.xml><?xml version="1.0" encoding="utf-8"?>
-<p:sld xmlns:a="http://schemas.openxmlformats.org/drawingml/2006/main" xmlns:r="http://schemas.openxmlformats.org/officeDocument/2006/relationships" xmlns:p="http://schemas.openxmlformats.org/presentationml/2006/main">
-  <p:cSld>
-    <p:spTree>
-      <p:nvGrpSpPr>
-        <p:cNvPr id="1" name="Shape 129"/>
-        <p:cNvGrpSpPr/>
-        <p:nvPr/>
-      </p:nvGrpSpPr>
-      <p:grpSpPr>
-        <a:xfrm>
-          <a:off x="0" y="0"/>
-          <a:ext cx="0" cy="0"/>
-          <a:chOff x="0" y="0"/>
-          <a:chExt cx="0" cy="0"/>
-        </a:xfrm>
-      </p:grpSpPr>
-      <p:sp>
-        <p:nvSpPr>
-          <p:cNvPr id="130" name="Google Shape;130;p20"/>
-          <p:cNvSpPr txBox="1"/>
-          <p:nvPr/>
-        </p:nvSpPr>
-        <p:spPr>
-          <a:xfrm>
-            <a:off x="119316" y="0"/>
-            <a:ext cx="2871000" cy="326400"/>
-          </a:xfrm>
-          <a:prstGeom prst="rect">
-            <a:avLst/>
-          </a:prstGeom>
-          <a:noFill/>
-          <a:ln>
-            <a:noFill/>
-          </a:ln>
-        </p:spPr>
-        <p:txBody>
-          <a:bodyPr spcFirstLastPara="1" wrap="square" lIns="9125" tIns="9125" rIns="9125" bIns="9125" anchor="t" anchorCtr="0">
-            <a:spAutoFit/>
-          </a:bodyPr>
-          <a:lstStyle/>
-          <a:p>
-            <a:pPr marL="0" marR="0" lvl="0" indent="0" algn="l" rtl="0">
-              <a:lnSpc>
-                <a:spcPct val="100000"/>
-              </a:lnSpc>
-              <a:spcBef>
-                <a:spcPts val="0"/>
-              </a:spcBef>
-              <a:spcAft>
-                <a:spcPts val="0"/>
-              </a:spcAft>
-              <a:buClr>
-                <a:srgbClr val="000000"/>
-              </a:buClr>
-              <a:buSzPts val="2000"/>
-              <a:buFont typeface="Arial"/>
-              <a:buNone/>
-            </a:pPr>
-            <a:r>
-              <a:rPr lang="en" sz="2000" b="1">
-                <a:solidFill>
-                  <a:schemeClr val="dk1"/>
-                </a:solidFill>
-                <a:latin typeface="Calibri"/>
-                <a:ea typeface="Calibri"/>
-                <a:cs typeface="Calibri"/>
-                <a:sym typeface="Calibri"/>
-              </a:rPr>
-              <a:t>Training Llama3</a:t>
-            </a:r>
-            <a:endParaRPr sz="2000" b="1" i="0" u="none" strike="noStrike" cap="none">
-              <a:solidFill>
-                <a:srgbClr val="000000"/>
-              </a:solidFill>
-              <a:latin typeface="Calibri"/>
-              <a:ea typeface="Calibri"/>
-              <a:cs typeface="Calibri"/>
-              <a:sym typeface="Calibri"/>
-            </a:endParaRPr>
-          </a:p>
-        </p:txBody>
-      </p:sp>
-      <p:sp>
-        <p:nvSpPr>
-          <p:cNvPr id="131" name="Google Shape;131;p20"/>
-          <p:cNvSpPr txBox="1"/>
-          <p:nvPr/>
-        </p:nvSpPr>
-        <p:spPr>
-          <a:xfrm>
-            <a:off x="119325" y="397700"/>
-            <a:ext cx="5176800" cy="1237500"/>
-          </a:xfrm>
-          <a:prstGeom prst="rect">
-            <a:avLst/>
-          </a:prstGeom>
-          <a:solidFill>
-            <a:srgbClr val="FFF2CC"/>
-          </a:solidFill>
-          <a:ln w="9525" cap="flat" cmpd="sng">
-            <a:solidFill>
-              <a:srgbClr val="FF0000"/>
-            </a:solidFill>
-            <a:prstDash val="solid"/>
-            <a:round/>
-            <a:headEnd type="none" w="sm" len="sm"/>
-            <a:tailEnd type="none" w="sm" len="sm"/>
-          </a:ln>
-        </p:spPr>
-        <p:txBody>
-          <a:bodyPr spcFirstLastPara="1" wrap="square" lIns="18275" tIns="18275" rIns="18275" bIns="18275" anchor="t" anchorCtr="0">
-            <a:spAutoFit/>
-          </a:bodyPr>
-          <a:lstStyle/>
-          <a:p>
-            <a:pPr marL="0" marR="0" lvl="0" indent="0" algn="l" rtl="0">
-              <a:lnSpc>
-                <a:spcPct val="100000"/>
-              </a:lnSpc>
-              <a:spcBef>
-                <a:spcPts val="0"/>
-              </a:spcBef>
-              <a:spcAft>
-                <a:spcPts val="0"/>
-              </a:spcAft>
-              <a:buClr>
-                <a:schemeClr val="dk1"/>
-              </a:buClr>
-              <a:buSzPts val="1100"/>
-              <a:buFont typeface="Arial"/>
-              <a:buNone/>
-            </a:pPr>
-            <a:r>
-              <a:rPr lang="en" sz="1200">
-                <a:solidFill>
-                  <a:schemeClr val="dk1"/>
-                </a:solidFill>
-                <a:latin typeface="Calibri"/>
-                <a:ea typeface="Calibri"/>
-                <a:cs typeface="Calibri"/>
-                <a:sym typeface="Calibri"/>
-              </a:rPr>
-              <a:t>Meta Llama3 training:</a:t>
-            </a:r>
-            <a:endParaRPr sz="1200">
-              <a:solidFill>
-                <a:schemeClr val="dk1"/>
-              </a:solidFill>
-              <a:latin typeface="Calibri"/>
-              <a:ea typeface="Calibri"/>
-              <a:cs typeface="Calibri"/>
-              <a:sym typeface="Calibri"/>
-            </a:endParaRPr>
-          </a:p>
-          <a:p>
-            <a:pPr marL="228600" marR="0" lvl="0" indent="-171450" algn="l" rtl="0">
-              <a:lnSpc>
-                <a:spcPct val="100000"/>
-              </a:lnSpc>
-              <a:spcBef>
-                <a:spcPts val="0"/>
-              </a:spcBef>
-              <a:spcAft>
-                <a:spcPts val="0"/>
-              </a:spcAft>
-              <a:buSzPts val="900"/>
-              <a:buFont typeface="Calibri"/>
-              <a:buChar char="●"/>
-            </a:pPr>
-            <a:r>
-              <a:rPr lang="en" sz="900" u="sng">
-                <a:solidFill>
-                  <a:schemeClr val="hlink"/>
-                </a:solidFill>
-                <a:latin typeface="Calibri"/>
-                <a:ea typeface="Calibri"/>
-                <a:cs typeface="Calibri"/>
-                <a:sym typeface="Calibri"/>
-                <a:hlinkClick r:id="rId3"/>
-              </a:rPr>
-              <a:t>https://engineering.fb.com/2024/03/12/data-center-engineering/building-metas-genai-infrastructure/</a:t>
-            </a:r>
-            <a:r>
-              <a:rPr lang="en" sz="900">
-                <a:solidFill>
-                  <a:schemeClr val="dk1"/>
-                </a:solidFill>
-                <a:latin typeface="Calibri"/>
-                <a:ea typeface="Calibri"/>
-                <a:cs typeface="Calibri"/>
-                <a:sym typeface="Calibri"/>
-              </a:rPr>
-              <a:t> </a:t>
-            </a:r>
-            <a:endParaRPr sz="900">
-              <a:solidFill>
-                <a:schemeClr val="dk1"/>
-              </a:solidFill>
-              <a:latin typeface="Calibri"/>
-              <a:ea typeface="Calibri"/>
-              <a:cs typeface="Calibri"/>
-              <a:sym typeface="Calibri"/>
-            </a:endParaRPr>
-          </a:p>
-          <a:p>
-            <a:pPr marL="228600" marR="0" lvl="0" indent="-171450" algn="l" rtl="0">
-              <a:lnSpc>
-                <a:spcPct val="100000"/>
-              </a:lnSpc>
-              <a:spcBef>
-                <a:spcPts val="0"/>
-              </a:spcBef>
-              <a:spcAft>
-                <a:spcPts val="0"/>
-              </a:spcAft>
-              <a:buSzPts val="900"/>
-              <a:buFont typeface="Calibri"/>
-              <a:buChar char="●"/>
-            </a:pPr>
-            <a:r>
-              <a:rPr lang="en" sz="900" u="sng">
-                <a:solidFill>
-                  <a:schemeClr val="hlink"/>
-                </a:solidFill>
-                <a:latin typeface="Calibri"/>
-                <a:ea typeface="Calibri"/>
-                <a:cs typeface="Calibri"/>
-                <a:sym typeface="Calibri"/>
-                <a:hlinkClick r:id="rId4"/>
-              </a:rPr>
-              <a:t>https://twitter.com/soumithchintala/status/1767579981419315400</a:t>
-            </a:r>
-            <a:r>
-              <a:rPr lang="en" sz="900">
-                <a:solidFill>
-                  <a:schemeClr val="dk1"/>
-                </a:solidFill>
-                <a:latin typeface="Calibri"/>
-                <a:ea typeface="Calibri"/>
-                <a:cs typeface="Calibri"/>
-                <a:sym typeface="Calibri"/>
-              </a:rPr>
-              <a:t> </a:t>
-            </a:r>
-            <a:endParaRPr sz="900">
-              <a:solidFill>
-                <a:schemeClr val="dk1"/>
-              </a:solidFill>
-              <a:latin typeface="Calibri"/>
-              <a:ea typeface="Calibri"/>
-              <a:cs typeface="Calibri"/>
-              <a:sym typeface="Calibri"/>
-            </a:endParaRPr>
-          </a:p>
-          <a:p>
-            <a:pPr marL="0" marR="0" lvl="0" indent="0" algn="l" rtl="0">
-              <a:lnSpc>
-                <a:spcPct val="100000"/>
-              </a:lnSpc>
-              <a:spcBef>
-                <a:spcPts val="0"/>
-              </a:spcBef>
-              <a:spcAft>
-                <a:spcPts val="0"/>
-              </a:spcAft>
-              <a:buClr>
-                <a:schemeClr val="dk1"/>
-              </a:buClr>
-              <a:buSzPts val="1100"/>
-              <a:buFont typeface="Arial"/>
-              <a:buNone/>
-            </a:pPr>
-            <a:r>
-              <a:rPr lang="en" sz="1200">
-                <a:solidFill>
-                  <a:schemeClr val="dk1"/>
-                </a:solidFill>
-                <a:latin typeface="Calibri"/>
-                <a:ea typeface="Calibri"/>
-                <a:cs typeface="Calibri"/>
-                <a:sym typeface="Calibri"/>
-              </a:rPr>
-              <a:t>24K H100 Cluster Pods</a:t>
-            </a:r>
-            <a:endParaRPr sz="1200">
-              <a:solidFill>
-                <a:schemeClr val="dk1"/>
-              </a:solidFill>
-              <a:latin typeface="Calibri"/>
-              <a:ea typeface="Calibri"/>
-              <a:cs typeface="Calibri"/>
-              <a:sym typeface="Calibri"/>
-            </a:endParaRPr>
-          </a:p>
-          <a:p>
-            <a:pPr marL="0" lvl="0" indent="0" algn="l" rtl="0">
-              <a:spcBef>
-                <a:spcPts val="0"/>
-              </a:spcBef>
-              <a:spcAft>
-                <a:spcPts val="0"/>
-              </a:spcAft>
-              <a:buClr>
-                <a:schemeClr val="dk1"/>
-              </a:buClr>
-              <a:buSzPts val="1100"/>
-              <a:buFont typeface="Arial"/>
-              <a:buNone/>
-            </a:pPr>
-            <a:r>
-              <a:rPr lang="en" sz="1200">
-                <a:solidFill>
-                  <a:schemeClr val="dk1"/>
-                </a:solidFill>
-                <a:latin typeface="Calibri"/>
-                <a:ea typeface="Calibri"/>
-                <a:cs typeface="Calibri"/>
-                <a:sym typeface="Calibri"/>
-              </a:rPr>
-              <a:t>PyTorch, NCCL library from Nvidia - </a:t>
-            </a:r>
-            <a:r>
-              <a:rPr lang="en" sz="900" u="sng">
-                <a:solidFill>
-                  <a:schemeClr val="hlink"/>
-                </a:solidFill>
-                <a:latin typeface="Calibri"/>
-                <a:ea typeface="Calibri"/>
-                <a:cs typeface="Calibri"/>
-                <a:sym typeface="Calibri"/>
-                <a:hlinkClick r:id="rId5"/>
-              </a:rPr>
-              <a:t>https://developer.nvidia.com/nccl</a:t>
-            </a:r>
-            <a:r>
-              <a:rPr lang="en" sz="900">
-                <a:solidFill>
-                  <a:schemeClr val="dk1"/>
-                </a:solidFill>
-                <a:latin typeface="Calibri"/>
-                <a:ea typeface="Calibri"/>
-                <a:cs typeface="Calibri"/>
-                <a:sym typeface="Calibri"/>
-              </a:rPr>
-              <a:t> </a:t>
-            </a:r>
-            <a:endParaRPr sz="900">
-              <a:solidFill>
-                <a:schemeClr val="dk1"/>
-              </a:solidFill>
-              <a:latin typeface="Calibri"/>
-              <a:ea typeface="Calibri"/>
-              <a:cs typeface="Calibri"/>
-              <a:sym typeface="Calibri"/>
-            </a:endParaRPr>
-          </a:p>
-          <a:p>
-            <a:pPr marL="0" lvl="0" indent="0" algn="l" rtl="0">
-              <a:spcBef>
-                <a:spcPts val="0"/>
-              </a:spcBef>
-              <a:spcAft>
-                <a:spcPts val="0"/>
-              </a:spcAft>
-              <a:buClr>
-                <a:schemeClr val="dk1"/>
-              </a:buClr>
-              <a:buSzPts val="1100"/>
-              <a:buFont typeface="Arial"/>
-              <a:buNone/>
-            </a:pPr>
-            <a:r>
-              <a:rPr lang="en" sz="1200">
-                <a:solidFill>
-                  <a:schemeClr val="dk1"/>
-                </a:solidFill>
-                <a:latin typeface="Calibri"/>
-                <a:ea typeface="Calibri"/>
-                <a:cs typeface="Calibri"/>
-                <a:sym typeface="Calibri"/>
-              </a:rPr>
-              <a:t>Network: RoCEv2 - </a:t>
-            </a:r>
-            <a:r>
-              <a:rPr lang="en" sz="900" u="sng">
-                <a:solidFill>
-                  <a:schemeClr val="hlink"/>
-                </a:solidFill>
-                <a:latin typeface="Calibri"/>
-                <a:ea typeface="Calibri"/>
-                <a:cs typeface="Calibri"/>
-                <a:sym typeface="Calibri"/>
-                <a:hlinkClick r:id="rId6"/>
-              </a:rPr>
-              <a:t>https://docs.nvidia.com/networking/display/winofv55053000/rocev2</a:t>
-            </a:r>
-            <a:r>
-              <a:rPr lang="en" sz="900">
-                <a:solidFill>
-                  <a:schemeClr val="dk1"/>
-                </a:solidFill>
-                <a:latin typeface="Calibri"/>
-                <a:ea typeface="Calibri"/>
-                <a:cs typeface="Calibri"/>
-                <a:sym typeface="Calibri"/>
-              </a:rPr>
-              <a:t> </a:t>
-            </a:r>
-            <a:endParaRPr sz="900">
-              <a:solidFill>
-                <a:schemeClr val="dk1"/>
-              </a:solidFill>
-              <a:latin typeface="Calibri"/>
-              <a:ea typeface="Calibri"/>
-              <a:cs typeface="Calibri"/>
-              <a:sym typeface="Calibri"/>
-            </a:endParaRPr>
-          </a:p>
-          <a:p>
-            <a:pPr marL="0" lvl="0" indent="0" algn="l" rtl="0">
-              <a:spcBef>
-                <a:spcPts val="0"/>
-              </a:spcBef>
-              <a:spcAft>
-                <a:spcPts val="0"/>
-              </a:spcAft>
-              <a:buClr>
-                <a:schemeClr val="dk1"/>
-              </a:buClr>
-              <a:buSzPts val="1100"/>
-              <a:buFont typeface="Arial"/>
-              <a:buNone/>
-            </a:pPr>
-            <a:r>
-              <a:rPr lang="en" sz="1200">
-                <a:solidFill>
-                  <a:schemeClr val="dk1"/>
-                </a:solidFill>
-                <a:latin typeface="Calibri"/>
-                <a:ea typeface="Calibri"/>
-                <a:cs typeface="Calibri"/>
-                <a:sym typeface="Calibri"/>
-              </a:rPr>
-              <a:t>Storage: NFS/FUSE based on Tectonic/Hammerspace</a:t>
-            </a:r>
-            <a:endParaRPr sz="1200">
-              <a:solidFill>
-                <a:schemeClr val="dk1"/>
-              </a:solidFill>
-              <a:latin typeface="Calibri"/>
-              <a:ea typeface="Calibri"/>
-              <a:cs typeface="Calibri"/>
-              <a:sym typeface="Calibri"/>
-            </a:endParaRPr>
-          </a:p>
-        </p:txBody>
-      </p:sp>
-      <p:pic>
-        <p:nvPicPr>
-          <p:cNvPr id="132" name="Google Shape;132;p20"/>
-          <p:cNvPicPr preferRelativeResize="0"/>
-          <p:nvPr/>
-        </p:nvPicPr>
-        <p:blipFill>
-          <a:blip r:embed="rId7" cstate="email">
-            <a:alphaModFix/>
-            <a:extLst>
-              <a:ext uri="{28A0092B-C50C-407E-A947-70E740481C1C}">
-                <a14:useLocalDpi xmlns:a14="http://schemas.microsoft.com/office/drawing/2010/main"/>
-              </a:ext>
-            </a:extLst>
-          </a:blip>
-          <a:stretch>
-            <a:fillRect/>
-          </a:stretch>
-        </p:blipFill>
-        <p:spPr>
-          <a:xfrm>
-            <a:off x="2207625" y="1706500"/>
-            <a:ext cx="4703977" cy="3369725"/>
-          </a:xfrm>
-          <a:prstGeom prst="rect">
-            <a:avLst/>
-          </a:prstGeom>
-          <a:noFill/>
-          <a:ln w="9525" cap="flat" cmpd="sng">
-            <a:solidFill>
-              <a:srgbClr val="FF0000"/>
-            </a:solidFill>
-            <a:prstDash val="solid"/>
-            <a:round/>
-            <a:headEnd type="none" w="sm" len="sm"/>
-            <a:tailEnd type="none" w="sm" len="sm"/>
-          </a:ln>
-        </p:spPr>
-      </p:pic>
-    </p:spTree>
-  </p:cSld>
-  <p:clrMapOvr>
-    <a:masterClrMapping/>
-  </p:clrMapOvr>
-</p:sld>
-</file>
-
-<file path=ppt/slides/slide9.xml><?xml version="1.0" encoding="utf-8"?>
-<p:sld xmlns:a="http://schemas.openxmlformats.org/drawingml/2006/main" xmlns:r="http://schemas.openxmlformats.org/officeDocument/2006/relationships" xmlns:p="http://schemas.openxmlformats.org/presentationml/2006/main">
-  <p:cSld>
-    <p:spTree>
-      <p:nvGrpSpPr>
-        <p:cNvPr id="1" name="Shape 136"/>
-        <p:cNvGrpSpPr/>
-        <p:nvPr/>
-      </p:nvGrpSpPr>
-      <p:grpSpPr>
-        <a:xfrm>
-          <a:off x="0" y="0"/>
-          <a:ext cx="0" cy="0"/>
-          <a:chOff x="0" y="0"/>
-          <a:chExt cx="0" cy="0"/>
-        </a:xfrm>
-      </p:grpSpPr>
-      <p:sp>
-        <p:nvSpPr>
-          <p:cNvPr id="137" name="Google Shape;137;p21"/>
-          <p:cNvSpPr txBox="1"/>
-          <p:nvPr/>
-        </p:nvSpPr>
-        <p:spPr>
-          <a:xfrm>
-            <a:off x="119316" y="0"/>
-            <a:ext cx="2871000" cy="326400"/>
-          </a:xfrm>
-          <a:prstGeom prst="rect">
-            <a:avLst/>
-          </a:prstGeom>
-          <a:noFill/>
-          <a:ln>
-            <a:noFill/>
-          </a:ln>
-        </p:spPr>
-        <p:txBody>
-          <a:bodyPr spcFirstLastPara="1" wrap="square" lIns="9125" tIns="9125" rIns="9125" bIns="9125" anchor="t" anchorCtr="0">
-            <a:spAutoFit/>
-          </a:bodyPr>
-          <a:lstStyle/>
-          <a:p>
-            <a:pPr marL="0" marR="0" lvl="0" indent="0" algn="l" rtl="0">
-              <a:lnSpc>
-                <a:spcPct val="100000"/>
-              </a:lnSpc>
-              <a:spcBef>
-                <a:spcPts val="0"/>
-              </a:spcBef>
-              <a:spcAft>
-                <a:spcPts val="0"/>
-              </a:spcAft>
-              <a:buClr>
-                <a:srgbClr val="000000"/>
-              </a:buClr>
-              <a:buSzPts val="2000"/>
-              <a:buFont typeface="Arial"/>
-              <a:buNone/>
-            </a:pPr>
-            <a:r>
-              <a:rPr lang="en" sz="2000" b="1">
-                <a:solidFill>
-                  <a:schemeClr val="dk1"/>
-                </a:solidFill>
-                <a:latin typeface="Calibri"/>
-                <a:ea typeface="Calibri"/>
-                <a:cs typeface="Calibri"/>
-                <a:sym typeface="Calibri"/>
-              </a:rPr>
-              <a:t>Nvidia</a:t>
-            </a:r>
-            <a:endParaRPr sz="2000" b="1" i="0" u="none" strike="noStrike" cap="none">
-              <a:solidFill>
-                <a:srgbClr val="000000"/>
-              </a:solidFill>
-              <a:latin typeface="Calibri"/>
-              <a:ea typeface="Calibri"/>
-              <a:cs typeface="Calibri"/>
-              <a:sym typeface="Calibri"/>
-            </a:endParaRPr>
-          </a:p>
-        </p:txBody>
-      </p:sp>
-      <p:sp>
-        <p:nvSpPr>
-          <p:cNvPr id="138" name="Google Shape;138;p21"/>
-          <p:cNvSpPr txBox="1"/>
-          <p:nvPr/>
-        </p:nvSpPr>
-        <p:spPr>
-          <a:xfrm>
-            <a:off x="119325" y="397700"/>
-            <a:ext cx="4329000" cy="437100"/>
-          </a:xfrm>
-          <a:prstGeom prst="rect">
-            <a:avLst/>
-          </a:prstGeom>
-          <a:solidFill>
-            <a:srgbClr val="FFF2CC"/>
-          </a:solidFill>
-          <a:ln w="9525" cap="flat" cmpd="sng">
-            <a:solidFill>
-              <a:srgbClr val="FF0000"/>
-            </a:solidFill>
-            <a:prstDash val="solid"/>
-            <a:round/>
-            <a:headEnd type="none" w="sm" len="sm"/>
-            <a:tailEnd type="none" w="sm" len="sm"/>
-          </a:ln>
-        </p:spPr>
-        <p:txBody>
-          <a:bodyPr spcFirstLastPara="1" wrap="square" lIns="18275" tIns="18275" rIns="18275" bIns="18275" anchor="t" anchorCtr="0">
-            <a:spAutoFit/>
-          </a:bodyPr>
-          <a:lstStyle/>
-          <a:p>
-            <a:pPr marL="0" marR="0" lvl="0" indent="0" algn="l" rtl="0">
-              <a:lnSpc>
-                <a:spcPct val="100000"/>
-              </a:lnSpc>
-              <a:spcBef>
-                <a:spcPts val="0"/>
-              </a:spcBef>
-              <a:spcAft>
-                <a:spcPts val="0"/>
-              </a:spcAft>
-              <a:buClr>
-                <a:schemeClr val="dk1"/>
-              </a:buClr>
-              <a:buSzPts val="1100"/>
-              <a:buFont typeface="Arial"/>
-              <a:buNone/>
-            </a:pPr>
-            <a:r>
-              <a:rPr lang="en" sz="1300">
-                <a:solidFill>
-                  <a:schemeClr val="dk1"/>
-                </a:solidFill>
-                <a:latin typeface="Calibri"/>
-                <a:ea typeface="Calibri"/>
-                <a:cs typeface="Calibri"/>
-                <a:sym typeface="Calibri"/>
-              </a:rPr>
-              <a:t>Nvidia is now also very active in making an AI model portfolio. </a:t>
-            </a:r>
-            <a:endParaRPr sz="1300">
-              <a:solidFill>
-                <a:schemeClr val="dk1"/>
-              </a:solidFill>
-              <a:latin typeface="Calibri"/>
-              <a:ea typeface="Calibri"/>
-              <a:cs typeface="Calibri"/>
-              <a:sym typeface="Calibri"/>
-            </a:endParaRPr>
-          </a:p>
-          <a:p>
-            <a:pPr marL="0" marR="0" lvl="0" indent="0" algn="l" rtl="0">
-              <a:lnSpc>
-                <a:spcPct val="100000"/>
-              </a:lnSpc>
-              <a:spcBef>
-                <a:spcPts val="0"/>
-              </a:spcBef>
-              <a:spcAft>
-                <a:spcPts val="0"/>
-              </a:spcAft>
-              <a:buClr>
-                <a:schemeClr val="dk1"/>
-              </a:buClr>
-              <a:buSzPts val="1100"/>
-              <a:buFont typeface="Arial"/>
-              <a:buNone/>
-            </a:pPr>
-            <a:r>
-              <a:rPr lang="en" sz="1300">
-                <a:solidFill>
-                  <a:schemeClr val="dk1"/>
-                </a:solidFill>
-                <a:latin typeface="Calibri"/>
-                <a:ea typeface="Calibri"/>
-                <a:cs typeface="Calibri"/>
-                <a:sym typeface="Calibri"/>
-              </a:rPr>
-              <a:t>Helps them sell the GPUs</a:t>
-            </a:r>
-            <a:endParaRPr sz="1300">
-              <a:solidFill>
-                <a:schemeClr val="dk1"/>
-              </a:solidFill>
-              <a:latin typeface="Calibri"/>
-              <a:ea typeface="Calibri"/>
-              <a:cs typeface="Calibri"/>
-              <a:sym typeface="Calibri"/>
-            </a:endParaRPr>
-          </a:p>
-        </p:txBody>
-      </p:sp>
-      <p:pic>
-        <p:nvPicPr>
-          <p:cNvPr id="139" name="Google Shape;139;p21"/>
-          <p:cNvPicPr preferRelativeResize="0"/>
-          <p:nvPr/>
-        </p:nvPicPr>
-        <p:blipFill>
-          <a:blip r:embed="rId3" cstate="email">
-            <a:alphaModFix/>
-            <a:extLst>
-              <a:ext uri="{28A0092B-C50C-407E-A947-70E740481C1C}">
-                <a14:useLocalDpi xmlns:a14="http://schemas.microsoft.com/office/drawing/2010/main"/>
-              </a:ext>
-            </a:extLst>
-          </a:blip>
-          <a:stretch>
-            <a:fillRect/>
-          </a:stretch>
-        </p:blipFill>
-        <p:spPr>
-          <a:xfrm>
-            <a:off x="119325" y="906099"/>
-            <a:ext cx="8479200" cy="1552900"/>
-          </a:xfrm>
-          <a:prstGeom prst="rect">
-            <a:avLst/>
-          </a:prstGeom>
-          <a:noFill/>
-          <a:ln>
-            <a:noFill/>
-          </a:ln>
-        </p:spPr>
-      </p:pic>
-      <p:pic>
-        <p:nvPicPr>
-          <p:cNvPr id="140" name="Google Shape;140;p21"/>
-          <p:cNvPicPr preferRelativeResize="0"/>
-          <p:nvPr/>
-        </p:nvPicPr>
-        <p:blipFill>
-          <a:blip r:embed="rId4" cstate="email">
-            <a:alphaModFix/>
-            <a:extLst>
-              <a:ext uri="{28A0092B-C50C-407E-A947-70E740481C1C}">
-                <a14:useLocalDpi xmlns:a14="http://schemas.microsoft.com/office/drawing/2010/main"/>
-              </a:ext>
-            </a:extLst>
-          </a:blip>
-          <a:stretch>
-            <a:fillRect/>
-          </a:stretch>
-        </p:blipFill>
-        <p:spPr>
-          <a:xfrm>
-            <a:off x="152400" y="2611399"/>
-            <a:ext cx="4607995" cy="2379700"/>
-          </a:xfrm>
-          <a:prstGeom prst="rect">
-            <a:avLst/>
-          </a:prstGeom>
-          <a:noFill/>
-          <a:ln>
-            <a:noFill/>
-          </a:ln>
-        </p:spPr>
-      </p:pic>
     </p:spTree>
   </p:cSld>
   <p:clrMapOvr>

--- a/2024/2024-03-15-AI-Updates.pptx
+++ b/2024/2024-03-15-AI-Updates.pptx
@@ -31692,6 +31692,18 @@
               <a:buNone/>
             </a:pPr>
             <a:r>
+              <a:rPr lang="en" sz="1200" b="1">
+                <a:solidFill>
+                  <a:srgbClr val="FF0000"/>
+                </a:solidFill>
+                <a:latin typeface="Calibri"/>
+                <a:ea typeface="Calibri"/>
+                <a:cs typeface="Calibri"/>
+                <a:sym typeface="Calibri"/>
+              </a:rPr>
+              <a:t>SIMA</a:t>
+            </a:r>
+            <a:r>
               <a:rPr lang="en" sz="1200">
                 <a:solidFill>
                   <a:schemeClr val="dk1"/>
@@ -31701,7 +31713,31 @@
                 <a:cs typeface="Calibri"/>
                 <a:sym typeface="Calibri"/>
               </a:rPr>
-              <a:t>SIMA = Scalable Instructable Multiworld Agent (Google Deepmind)</a:t>
+              <a:t> = </a:t>
+            </a:r>
+            <a:r>
+              <a:rPr lang="en" sz="1200" b="1">
+                <a:solidFill>
+                  <a:srgbClr val="FF0000"/>
+                </a:solidFill>
+                <a:latin typeface="Calibri"/>
+                <a:ea typeface="Calibri"/>
+                <a:cs typeface="Calibri"/>
+                <a:sym typeface="Calibri"/>
+              </a:rPr>
+              <a:t>Scalable Instructable Multiworld Agent</a:t>
+            </a:r>
+            <a:r>
+              <a:rPr lang="en" sz="1200">
+                <a:solidFill>
+                  <a:schemeClr val="dk1"/>
+                </a:solidFill>
+                <a:latin typeface="Calibri"/>
+                <a:ea typeface="Calibri"/>
+                <a:cs typeface="Calibri"/>
+                <a:sym typeface="Calibri"/>
+              </a:rPr>
+              <a:t> (Google Deepmind)</a:t>
             </a:r>
             <a:endParaRPr sz="1200">
               <a:solidFill>
@@ -31729,6 +31765,18 @@
               <a:buNone/>
             </a:pPr>
             <a:r>
+              <a:rPr lang="en" sz="1200" b="1">
+                <a:solidFill>
+                  <a:srgbClr val="FF0000"/>
+                </a:solidFill>
+                <a:latin typeface="Calibri"/>
+                <a:ea typeface="Calibri"/>
+                <a:cs typeface="Calibri"/>
+                <a:sym typeface="Calibri"/>
+              </a:rPr>
+              <a:t>SIMA</a:t>
+            </a:r>
+            <a:r>
               <a:rPr lang="en" sz="1200">
                 <a:solidFill>
                   <a:schemeClr val="dk1"/>
@@ -31738,7 +31786,7 @@
                 <a:cs typeface="Calibri"/>
                 <a:sym typeface="Calibri"/>
               </a:rPr>
-              <a:t>SIMA is a general AI agent for games &amp; 3D virtual settings. </a:t>
+              <a:t> is a general AI agent for games &amp; 3D virtual settings. </a:t>
             </a:r>
             <a:endParaRPr sz="1200">
               <a:solidFill>
@@ -31766,6 +31814,18 @@
               <a:buNone/>
             </a:pPr>
             <a:r>
+              <a:rPr lang="en" sz="1200" b="1">
+                <a:solidFill>
+                  <a:srgbClr val="FF0000"/>
+                </a:solidFill>
+                <a:latin typeface="Calibri"/>
+                <a:ea typeface="Calibri"/>
+                <a:cs typeface="Calibri"/>
+                <a:sym typeface="Calibri"/>
+              </a:rPr>
+              <a:t>SIMA</a:t>
+            </a:r>
+            <a:r>
               <a:rPr lang="en" sz="1200">
                 <a:solidFill>
                   <a:schemeClr val="dk1"/>
@@ -31775,7 +31835,7 @@
                 <a:cs typeface="Calibri"/>
                 <a:sym typeface="Calibri"/>
               </a:rPr>
-              <a:t>SIMA is the first agent that has demonstrated that it can follow natural-language instructions to carry out a wide range of tasks across a large array of game worlds, similar to how a human would play.</a:t>
+              <a:t> is the first agent that has demonstrated that it can follow natural-language instructions to carry out a wide range of tasks across a large array of game worlds, similar to how a human would play.</a:t>
             </a:r>
             <a:endParaRPr sz="1200">
               <a:solidFill>
@@ -31812,11 +31872,23 @@
                 <a:cs typeface="Calibri"/>
                 <a:sym typeface="Calibri"/>
               </a:rPr>
-              <a:t>GOAT of AI: GOAT = Greatest Of All Time</a:t>
-            </a:r>
-            <a:endParaRPr sz="1200">
-              <a:solidFill>
-                <a:schemeClr val="dk1"/>
+              <a:t>GOAT of AI: </a:t>
+            </a:r>
+            <a:r>
+              <a:rPr lang="en" sz="1200" b="1">
+                <a:solidFill>
+                  <a:srgbClr val="FF0000"/>
+                </a:solidFill>
+                <a:latin typeface="Calibri"/>
+                <a:ea typeface="Calibri"/>
+                <a:cs typeface="Calibri"/>
+                <a:sym typeface="Calibri"/>
+              </a:rPr>
+              <a:t>GOAT = Greatest Of All Time</a:t>
+            </a:r>
+            <a:endParaRPr sz="1200" b="1">
+              <a:solidFill>
+                <a:srgbClr val="FF0000"/>
               </a:solidFill>
               <a:latin typeface="Calibri"/>
               <a:ea typeface="Calibri"/>
